--- a/preview/NVDA/NVDA_pitchbook.pptx
+++ b/preview/NVDA/NVDA_pitchbook.pptx
@@ -3354,7 +3354,7 @@
             <a:avLst/>
           </a:prstGeom>
           <a:solidFill>
-            <a:srgbClr val="B06000"/>
+            <a:srgbClr val="1A7A4A"/>
           </a:solidFill>
           <a:ln>
             <a:noFill/>
@@ -3412,7 +3412,7 @@
                 </a:solidFill>
                 <a:latin typeface="Calibri"/>
               </a:rPr>
-              <a:t>● HOLD  ·  Prix cible base : 194 $  ·  Upside : +0,0 %</a:t>
+              <a:t>● BUY  ·  Prix cible base : 245 $  ·  Upside : +26,0 %</a:t>
             </a:r>
           </a:p>
         </p:txBody>
@@ -4558,7 +4558,7 @@
                           </a:solidFill>
                           <a:latin typeface="Calibri"/>
                         </a:rPr>
-                        <a:t>54,8x</a:t>
+                        <a:t>54,9x</a:t>
                       </a:r>
                     </a:p>
                   </a:txBody>
@@ -6071,6 +6071,162 @@
           </a:graphicData>
         </a:graphic>
       </p:graphicFrame>
+      <p:sp>
+        <p:nvSpPr>
+          <p:cNvPr id="18" name="Rectangle 17"/>
+          <p:cNvSpPr/>
+          <p:nvPr/>
+        </p:nvSpPr>
+        <p:spPr>
+          <a:xfrm>
+            <a:off x="367200" y="3628800"/>
+            <a:ext cx="8413200" cy="824400"/>
+          </a:xfrm>
+          <a:prstGeom prst="rect">
+            <a:avLst/>
+          </a:prstGeom>
+          <a:solidFill>
+            <a:srgbClr val="F5F7FA"/>
+          </a:solidFill>
+          <a:ln>
+            <a:noFill/>
+          </a:ln>
+        </p:spPr>
+        <p:style>
+          <a:lnRef idx="1">
+            <a:schemeClr val="accent1"/>
+          </a:lnRef>
+          <a:fillRef idx="3">
+            <a:schemeClr val="accent1"/>
+          </a:fillRef>
+          <a:effectRef idx="2">
+            <a:schemeClr val="accent1"/>
+          </a:effectRef>
+          <a:fontRef idx="minor">
+            <a:schemeClr val="lt1"/>
+          </a:fontRef>
+        </p:style>
+        <p:txBody>
+          <a:bodyPr rtlCol="0" anchor="ctr"/>
+          <a:lstStyle/>
+          <a:p>
+            <a:pPr algn="ctr"/>
+          </a:p>
+        </p:txBody>
+      </p:sp>
+      <p:sp>
+        <p:nvSpPr>
+          <p:cNvPr id="19" name="Rectangle 18"/>
+          <p:cNvSpPr/>
+          <p:nvPr/>
+        </p:nvSpPr>
+        <p:spPr>
+          <a:xfrm>
+            <a:off x="367200" y="3628800"/>
+            <a:ext cx="79200" cy="824400"/>
+          </a:xfrm>
+          <a:prstGeom prst="rect">
+            <a:avLst/>
+          </a:prstGeom>
+          <a:solidFill>
+            <a:srgbClr val="2E5FA3"/>
+          </a:solidFill>
+          <a:ln>
+            <a:noFill/>
+          </a:ln>
+        </p:spPr>
+        <p:style>
+          <a:lnRef idx="1">
+            <a:schemeClr val="accent1"/>
+          </a:lnRef>
+          <a:fillRef idx="3">
+            <a:schemeClr val="accent1"/>
+          </a:fillRef>
+          <a:effectRef idx="2">
+            <a:schemeClr val="accent1"/>
+          </a:effectRef>
+          <a:fontRef idx="minor">
+            <a:schemeClr val="lt1"/>
+          </a:fontRef>
+        </p:style>
+        <p:txBody>
+          <a:bodyPr rtlCol="0" anchor="ctr"/>
+          <a:lstStyle/>
+          <a:p>
+            <a:pPr algn="ctr"/>
+          </a:p>
+        </p:txBody>
+      </p:sp>
+      <p:sp>
+        <p:nvSpPr>
+          <p:cNvPr id="20" name="TextBox 19"/>
+          <p:cNvSpPr txBox="1"/>
+          <p:nvPr/>
+        </p:nvSpPr>
+        <p:spPr>
+          <a:xfrm>
+            <a:off x="475200" y="3657600"/>
+            <a:ext cx="8298000" cy="151200"/>
+          </a:xfrm>
+          <a:prstGeom prst="rect">
+            <a:avLst/>
+          </a:prstGeom>
+          <a:noFill/>
+        </p:spPr>
+        <p:txBody>
+          <a:bodyPr wrap="none">
+            <a:spAutoFit/>
+          </a:bodyPr>
+          <a:lstStyle/>
+          <a:p>
+            <a:pPr algn="l"/>
+            <a:r>
+              <a:rPr sz="950" b="1" i="0">
+                <a:solidFill>
+                  <a:srgbClr val="1B3A6B"/>
+                </a:solidFill>
+                <a:latin typeface="Calibri"/>
+              </a:rPr>
+              <a:t>NVDA génère ROE 92% / ROIC 94% — création de valeur premium</a:t>
+            </a:r>
+          </a:p>
+        </p:txBody>
+      </p:sp>
+      <p:sp>
+        <p:nvSpPr>
+          <p:cNvPr id="21" name="TextBox 20"/>
+          <p:cNvSpPr txBox="1"/>
+          <p:nvPr/>
+        </p:nvSpPr>
+        <p:spPr>
+          <a:xfrm>
+            <a:off x="475200" y="3826800"/>
+            <a:ext cx="8298000" cy="601200"/>
+          </a:xfrm>
+          <a:prstGeom prst="rect">
+            <a:avLst/>
+          </a:prstGeom>
+          <a:noFill/>
+        </p:spPr>
+        <p:txBody>
+          <a:bodyPr wrap="square">
+            <a:spAutoFit/>
+          </a:bodyPr>
+          <a:lstStyle/>
+          <a:p>
+            <a:pPr algn="l"/>
+            <a:r>
+              <a:rPr sz="850" b="0" i="0">
+                <a:solidFill>
+                  <a:srgbClr val="555555"/>
+                </a:solidFill>
+                <a:latin typeface="Calibri"/>
+              </a:rPr>
+              <a:t>Les marges brutes sont passées de 56,9% en 2023 à 75,0% en 2025, grâce à l'effet volume (+114% de croissance) et à la domination du segment Data Center (80% des revenus). La trajectoire est durable tant que la demande en IA reste forte, avec un risque de mean-reversion limité par le pricing power de NVIDIA.</a:t>
+            </a:r>
+          </a:p>
+        </p:txBody>
+      </p:sp>
     </p:spTree>
   </p:cSld>
   <p:clrMapOvr>
@@ -7231,7 +7387,7 @@
                           </a:solidFill>
                           <a:latin typeface="Calibri"/>
                         </a:rPr>
-                        <a:t>194 $</a:t>
+                        <a:t>245 $</a:t>
                       </a:r>
                     </a:p>
                   </a:txBody>
@@ -7319,7 +7475,7 @@
                           </a:solidFill>
                           <a:latin typeface="Calibri"/>
                         </a:rPr>
-                        <a:t>194,24 $</a:t>
+                        <a:t>194,51 $</a:t>
                       </a:r>
                     </a:p>
                   </a:txBody>
@@ -7407,7 +7563,7 @@
                           </a:solidFill>
                           <a:latin typeface="Calibri"/>
                         </a:rPr>
-                        <a:t>+0,0 %</a:t>
+                        <a:t>+26,0 %</a:t>
                       </a:r>
                     </a:p>
                   </a:txBody>
@@ -7550,7 +7706,7 @@
                           </a:solidFill>
                           <a:latin typeface="Calibri"/>
                         </a:rPr>
-                        <a:t>165 $</a:t>
+                        <a:t>180 $</a:t>
                       </a:r>
                     </a:p>
                   </a:txBody>
@@ -7573,7 +7729,7 @@
                           </a:solidFill>
                           <a:latin typeface="Calibri"/>
                         </a:rPr>
-                        <a:t>194 $</a:t>
+                        <a:t>245 $</a:t>
                       </a:r>
                     </a:p>
                   </a:txBody>
@@ -7596,7 +7752,7 @@
                           </a:solidFill>
                           <a:latin typeface="Calibri"/>
                         </a:rPr>
-                        <a:t>233 $</a:t>
+                        <a:t>280 $</a:t>
                       </a:r>
                     </a:p>
                   </a:txBody>
@@ -7621,7 +7777,7 @@
                           </a:solidFill>
                           <a:latin typeface="Calibri"/>
                         </a:rPr>
-                        <a:t>-15,0 %</a:t>
+                        <a:t>-7,5 %</a:t>
                       </a:r>
                     </a:p>
                   </a:txBody>
@@ -7644,7 +7800,7 @@
                           </a:solidFill>
                           <a:latin typeface="Calibri"/>
                         </a:rPr>
-                        <a:t>+0,0 %</a:t>
+                        <a:t>+26,0 %</a:t>
                       </a:r>
                     </a:p>
                   </a:txBody>
@@ -7667,7 +7823,7 @@
                           </a:solidFill>
                           <a:latin typeface="Calibri"/>
                         </a:rPr>
-                        <a:t>+20,0 %</a:t>
+                        <a:t>+44,0 %</a:t>
                       </a:r>
                     </a:p>
                   </a:txBody>
@@ -7783,824 +7939,47 @@
                 </a:solidFill>
                 <a:latin typeface="Calibri"/>
               </a:rPr>
-              <a:t>Monte Carlo GBM — 10 000 simulations</a:t>
+              <a:t>Monte Carlo GBM</a:t>
             </a:r>
           </a:p>
         </p:txBody>
       </p:sp>
-      <p:graphicFrame>
-        <p:nvGraphicFramePr>
-          <p:cNvPr id="19" name="Table 18"/>
-          <p:cNvGraphicFramePr>
-            <a:graphicFrameLocks noGrp="1"/>
-          </p:cNvGraphicFramePr>
-          <p:nvPr/>
-        </p:nvGraphicFramePr>
-        <p:xfrm>
-          <a:off x="367200" y="2653200"/>
-          <a:ext cx="4024800" cy="1116000"/>
-        </p:xfrm>
-        <a:graphic>
-          <a:graphicData uri="http://schemas.openxmlformats.org/drawingml/2006/table">
-            <a:tbl>
-              <a:tblPr firstRow="1" bandRow="1">
-                <a:tableStyleId>{5C22544A-7EE6-4342-B048-85BDC9FD1C3A}</a:tableStyleId>
-              </a:tblPr>
-              <a:tblGrid>
-                <a:gridCol w="1690416"/>
-                <a:gridCol w="1287936"/>
-                <a:gridCol w="1046448"/>
-              </a:tblGrid>
-              <a:tr h="186000">
-                <a:tc>
-                  <a:txBody>
-                    <a:bodyPr/>
-                    <a:lstStyle/>
-                    <a:p>
-                      <a:pPr algn="l"/>
-                      <a:r>
-                        <a:rPr sz="800" b="1" i="0">
-                          <a:solidFill>
-                            <a:srgbClr val="FFFFFF"/>
-                          </a:solidFill>
-                          <a:latin typeface="Calibri"/>
-                        </a:rPr>
-                        <a:t>Scénario</a:t>
-                      </a:r>
-                    </a:p>
-                  </a:txBody>
-                  <a:tcPr>
-                    <a:solidFill>
-                      <a:srgbClr val="1B3A6B"/>
-                    </a:solidFill>
-                    <a:lnL w="6350">
-                      <a:solidFill>
-                        <a:srgbClr val="DDDDDD"/>
-                      </a:solidFill>
-                    </a:lnL>
-                    <a:lnR w="6350">
-                      <a:solidFill>
-                        <a:srgbClr val="DDDDDD"/>
-                      </a:solidFill>
-                    </a:lnR>
-                    <a:lnT w="6350">
-                      <a:solidFill>
-                        <a:srgbClr val="DDDDDD"/>
-                      </a:solidFill>
-                    </a:lnT>
-                    <a:lnB w="6350">
-                      <a:solidFill>
-                        <a:srgbClr val="DDDDDD"/>
-                      </a:solidFill>
-                    </a:lnB>
-                  </a:tcPr>
-                </a:tc>
-                <a:tc>
-                  <a:txBody>
-                    <a:bodyPr/>
-                    <a:lstStyle/>
-                    <a:p>
-                      <a:pPr algn="ctr"/>
-                      <a:r>
-                        <a:rPr sz="800" b="1" i="0">
-                          <a:solidFill>
-                            <a:srgbClr val="FFFFFF"/>
-                          </a:solidFill>
-                          <a:latin typeface="Calibri"/>
-                        </a:rPr>
-                        <a:t>Cours prédit (12M)</a:t>
-                      </a:r>
-                    </a:p>
-                  </a:txBody>
-                  <a:tcPr>
-                    <a:solidFill>
-                      <a:srgbClr val="1B3A6B"/>
-                    </a:solidFill>
-                    <a:lnL w="6350">
-                      <a:solidFill>
-                        <a:srgbClr val="DDDDDD"/>
-                      </a:solidFill>
-                    </a:lnL>
-                    <a:lnR w="6350">
-                      <a:solidFill>
-                        <a:srgbClr val="DDDDDD"/>
-                      </a:solidFill>
-                    </a:lnR>
-                    <a:lnT w="6350">
-                      <a:solidFill>
-                        <a:srgbClr val="DDDDDD"/>
-                      </a:solidFill>
-                    </a:lnT>
-                    <a:lnB w="6350">
-                      <a:solidFill>
-                        <a:srgbClr val="DDDDDD"/>
-                      </a:solidFill>
-                    </a:lnB>
-                  </a:tcPr>
-                </a:tc>
-                <a:tc>
-                  <a:txBody>
-                    <a:bodyPr/>
-                    <a:lstStyle/>
-                    <a:p>
-                      <a:pPr algn="ctr"/>
-                      <a:r>
-                        <a:rPr sz="800" b="1" i="0">
-                          <a:solidFill>
-                            <a:srgbClr val="FFFFFF"/>
-                          </a:solidFill>
-                          <a:latin typeface="Calibri"/>
-                        </a:rPr>
-                        <a:t>vs Cours</a:t>
-                      </a:r>
-                    </a:p>
-                  </a:txBody>
-                  <a:tcPr>
-                    <a:solidFill>
-                      <a:srgbClr val="1B3A6B"/>
-                    </a:solidFill>
-                    <a:lnL w="6350">
-                      <a:solidFill>
-                        <a:srgbClr val="DDDDDD"/>
-                      </a:solidFill>
-                    </a:lnL>
-                    <a:lnR w="6350">
-                      <a:solidFill>
-                        <a:srgbClr val="DDDDDD"/>
-                      </a:solidFill>
-                    </a:lnR>
-                    <a:lnT w="6350">
-                      <a:solidFill>
-                        <a:srgbClr val="DDDDDD"/>
-                      </a:solidFill>
-                    </a:lnT>
-                    <a:lnB w="6350">
-                      <a:solidFill>
-                        <a:srgbClr val="DDDDDD"/>
-                      </a:solidFill>
-                    </a:lnB>
-                  </a:tcPr>
-                </a:tc>
-              </a:tr>
-              <a:tr h="186000">
-                <a:tc>
-                  <a:txBody>
-                    <a:bodyPr/>
-                    <a:lstStyle/>
-                    <a:p>
-                      <a:pPr algn="l"/>
-                      <a:r>
-                        <a:rPr sz="800" b="0" i="0">
-                          <a:solidFill>
-                            <a:srgbClr val="0D0D0D"/>
-                          </a:solidFill>
-                          <a:latin typeface="Calibri"/>
-                        </a:rPr>
-                        <a:t>Stress Down (P2)</a:t>
-                      </a:r>
-                    </a:p>
-                  </a:txBody>
-                  <a:tcPr>
-                    <a:solidFill>
-                      <a:srgbClr val="FFFFFF"/>
-                    </a:solidFill>
-                    <a:lnL w="6350">
-                      <a:solidFill>
-                        <a:srgbClr val="DDDDDD"/>
-                      </a:solidFill>
-                    </a:lnL>
-                    <a:lnR w="6350">
-                      <a:solidFill>
-                        <a:srgbClr val="DDDDDD"/>
-                      </a:solidFill>
-                    </a:lnR>
-                    <a:lnT w="6350">
-                      <a:solidFill>
-                        <a:srgbClr val="DDDDDD"/>
-                      </a:solidFill>
-                    </a:lnT>
-                    <a:lnB w="6350">
-                      <a:solidFill>
-                        <a:srgbClr val="DDDDDD"/>
-                      </a:solidFill>
-                    </a:lnB>
-                  </a:tcPr>
-                </a:tc>
-                <a:tc>
-                  <a:txBody>
-                    <a:bodyPr/>
-                    <a:lstStyle/>
-                    <a:p>
-                      <a:pPr algn="ctr"/>
-                      <a:r>
-                        <a:rPr sz="800" b="0" i="0">
-                          <a:solidFill>
-                            <a:srgbClr val="0D0D0D"/>
-                          </a:solidFill>
-                          <a:latin typeface="Calibri"/>
-                        </a:rPr>
-                        <a:t>93 $</a:t>
-                      </a:r>
-                    </a:p>
-                  </a:txBody>
-                  <a:tcPr>
-                    <a:solidFill>
-                      <a:srgbClr val="FFFFFF"/>
-                    </a:solidFill>
-                    <a:lnL w="6350">
-                      <a:solidFill>
-                        <a:srgbClr val="DDDDDD"/>
-                      </a:solidFill>
-                    </a:lnL>
-                    <a:lnR w="6350">
-                      <a:solidFill>
-                        <a:srgbClr val="DDDDDD"/>
-                      </a:solidFill>
-                    </a:lnR>
-                    <a:lnT w="6350">
-                      <a:solidFill>
-                        <a:srgbClr val="DDDDDD"/>
-                      </a:solidFill>
-                    </a:lnT>
-                    <a:lnB w="6350">
-                      <a:solidFill>
-                        <a:srgbClr val="DDDDDD"/>
-                      </a:solidFill>
-                    </a:lnB>
-                  </a:tcPr>
-                </a:tc>
-                <a:tc>
-                  <a:txBody>
-                    <a:bodyPr/>
-                    <a:lstStyle/>
-                    <a:p>
-                      <a:pPr algn="ctr"/>
-                      <a:r>
-                        <a:rPr sz="800" b="0" i="0">
-                          <a:solidFill>
-                            <a:srgbClr val="0D0D0D"/>
-                          </a:solidFill>
-                          <a:latin typeface="Calibri"/>
-                        </a:rPr>
-                        <a:t>-51,9 %</a:t>
-                      </a:r>
-                    </a:p>
-                  </a:txBody>
-                  <a:tcPr>
-                    <a:solidFill>
-                      <a:srgbClr val="FFFFFF"/>
-                    </a:solidFill>
-                    <a:lnL w="6350">
-                      <a:solidFill>
-                        <a:srgbClr val="DDDDDD"/>
-                      </a:solidFill>
-                    </a:lnL>
-                    <a:lnR w="6350">
-                      <a:solidFill>
-                        <a:srgbClr val="DDDDDD"/>
-                      </a:solidFill>
-                    </a:lnR>
-                    <a:lnT w="6350">
-                      <a:solidFill>
-                        <a:srgbClr val="DDDDDD"/>
-                      </a:solidFill>
-                    </a:lnT>
-                    <a:lnB w="6350">
-                      <a:solidFill>
-                        <a:srgbClr val="DDDDDD"/>
-                      </a:solidFill>
-                    </a:lnB>
-                  </a:tcPr>
-                </a:tc>
-              </a:tr>
-              <a:tr h="186000">
-                <a:tc>
-                  <a:txBody>
-                    <a:bodyPr/>
-                    <a:lstStyle/>
-                    <a:p>
-                      <a:pPr algn="l"/>
-                      <a:r>
-                        <a:rPr sz="800" b="0" i="0">
-                          <a:solidFill>
-                            <a:srgbClr val="0D0D0D"/>
-                          </a:solidFill>
-                          <a:latin typeface="Calibri"/>
-                        </a:rPr>
-                        <a:t>Pessimiste (P10)</a:t>
-                      </a:r>
-                    </a:p>
-                  </a:txBody>
-                  <a:tcPr>
-                    <a:solidFill>
-                      <a:srgbClr val="F7F8FA"/>
-                    </a:solidFill>
-                    <a:lnL w="6350">
-                      <a:solidFill>
-                        <a:srgbClr val="DDDDDD"/>
-                      </a:solidFill>
-                    </a:lnL>
-                    <a:lnR w="6350">
-                      <a:solidFill>
-                        <a:srgbClr val="DDDDDD"/>
-                      </a:solidFill>
-                    </a:lnR>
-                    <a:lnT w="6350">
-                      <a:solidFill>
-                        <a:srgbClr val="DDDDDD"/>
-                      </a:solidFill>
-                    </a:lnT>
-                    <a:lnB w="6350">
-                      <a:solidFill>
-                        <a:srgbClr val="DDDDDD"/>
-                      </a:solidFill>
-                    </a:lnB>
-                  </a:tcPr>
-                </a:tc>
-                <a:tc>
-                  <a:txBody>
-                    <a:bodyPr/>
-                    <a:lstStyle/>
-                    <a:p>
-                      <a:pPr algn="ctr"/>
-                      <a:r>
-                        <a:rPr sz="800" b="0" i="0">
-                          <a:solidFill>
-                            <a:srgbClr val="0D0D0D"/>
-                          </a:solidFill>
-                          <a:latin typeface="Calibri"/>
-                        </a:rPr>
-                        <a:t>136 $</a:t>
-                      </a:r>
-                    </a:p>
-                  </a:txBody>
-                  <a:tcPr>
-                    <a:solidFill>
-                      <a:srgbClr val="F7F8FA"/>
-                    </a:solidFill>
-                    <a:lnL w="6350">
-                      <a:solidFill>
-                        <a:srgbClr val="DDDDDD"/>
-                      </a:solidFill>
-                    </a:lnL>
-                    <a:lnR w="6350">
-                      <a:solidFill>
-                        <a:srgbClr val="DDDDDD"/>
-                      </a:solidFill>
-                    </a:lnR>
-                    <a:lnT w="6350">
-                      <a:solidFill>
-                        <a:srgbClr val="DDDDDD"/>
-                      </a:solidFill>
-                    </a:lnT>
-                    <a:lnB w="6350">
-                      <a:solidFill>
-                        <a:srgbClr val="DDDDDD"/>
-                      </a:solidFill>
-                    </a:lnB>
-                  </a:tcPr>
-                </a:tc>
-                <a:tc>
-                  <a:txBody>
-                    <a:bodyPr/>
-                    <a:lstStyle/>
-                    <a:p>
-                      <a:pPr algn="ctr"/>
-                      <a:r>
-                        <a:rPr sz="800" b="0" i="0">
-                          <a:solidFill>
-                            <a:srgbClr val="0D0D0D"/>
-                          </a:solidFill>
-                          <a:latin typeface="Calibri"/>
-                        </a:rPr>
-                        <a:t>-30,2 %</a:t>
-                      </a:r>
-                    </a:p>
-                  </a:txBody>
-                  <a:tcPr>
-                    <a:solidFill>
-                      <a:srgbClr val="F7F8FA"/>
-                    </a:solidFill>
-                    <a:lnL w="6350">
-                      <a:solidFill>
-                        <a:srgbClr val="DDDDDD"/>
-                      </a:solidFill>
-                    </a:lnL>
-                    <a:lnR w="6350">
-                      <a:solidFill>
-                        <a:srgbClr val="DDDDDD"/>
-                      </a:solidFill>
-                    </a:lnR>
-                    <a:lnT w="6350">
-                      <a:solidFill>
-                        <a:srgbClr val="DDDDDD"/>
-                      </a:solidFill>
-                    </a:lnT>
-                    <a:lnB w="6350">
-                      <a:solidFill>
-                        <a:srgbClr val="DDDDDD"/>
-                      </a:solidFill>
-                    </a:lnB>
-                  </a:tcPr>
-                </a:tc>
-              </a:tr>
-              <a:tr h="186000">
-                <a:tc>
-                  <a:txBody>
-                    <a:bodyPr/>
-                    <a:lstStyle/>
-                    <a:p>
-                      <a:pPr algn="l"/>
-                      <a:r>
-                        <a:rPr sz="800" b="1" i="0">
-                          <a:solidFill>
-                            <a:srgbClr val="1B3A6B"/>
-                          </a:solidFill>
-                          <a:latin typeface="Calibri"/>
-                        </a:rPr>
-                        <a:t>● Médian (P50)</a:t>
-                      </a:r>
-                    </a:p>
-                  </a:txBody>
-                  <a:tcPr>
-                    <a:solidFill>
-                      <a:srgbClr val="DDE8F5"/>
-                    </a:solidFill>
-                    <a:lnL w="6350">
-                      <a:solidFill>
-                        <a:srgbClr val="DDDDDD"/>
-                      </a:solidFill>
-                    </a:lnL>
-                    <a:lnR w="6350">
-                      <a:solidFill>
-                        <a:srgbClr val="DDDDDD"/>
-                      </a:solidFill>
-                    </a:lnR>
-                    <a:lnT w="6350">
-                      <a:solidFill>
-                        <a:srgbClr val="DDDDDD"/>
-                      </a:solidFill>
-                    </a:lnT>
-                    <a:lnB w="6350">
-                      <a:solidFill>
-                        <a:srgbClr val="DDDDDD"/>
-                      </a:solidFill>
-                    </a:lnB>
-                  </a:tcPr>
-                </a:tc>
-                <a:tc>
-                  <a:txBody>
-                    <a:bodyPr/>
-                    <a:lstStyle/>
-                    <a:p>
-                      <a:pPr algn="ctr"/>
-                      <a:r>
-                        <a:rPr sz="800" b="1" i="0">
-                          <a:solidFill>
-                            <a:srgbClr val="1B3A6B"/>
-                          </a:solidFill>
-                          <a:latin typeface="Calibri"/>
-                        </a:rPr>
-                        <a:t>258 $</a:t>
-                      </a:r>
-                    </a:p>
-                  </a:txBody>
-                  <a:tcPr>
-                    <a:solidFill>
-                      <a:srgbClr val="DDE8F5"/>
-                    </a:solidFill>
-                    <a:lnL w="6350">
-                      <a:solidFill>
-                        <a:srgbClr val="DDDDDD"/>
-                      </a:solidFill>
-                    </a:lnL>
-                    <a:lnR w="6350">
-                      <a:solidFill>
-                        <a:srgbClr val="DDDDDD"/>
-                      </a:solidFill>
-                    </a:lnR>
-                    <a:lnT w="6350">
-                      <a:solidFill>
-                        <a:srgbClr val="DDDDDD"/>
-                      </a:solidFill>
-                    </a:lnT>
-                    <a:lnB w="6350">
-                      <a:solidFill>
-                        <a:srgbClr val="DDDDDD"/>
-                      </a:solidFill>
-                    </a:lnB>
-                  </a:tcPr>
-                </a:tc>
-                <a:tc>
-                  <a:txBody>
-                    <a:bodyPr/>
-                    <a:lstStyle/>
-                    <a:p>
-                      <a:pPr algn="ctr"/>
-                      <a:r>
-                        <a:rPr sz="800" b="1" i="0">
-                          <a:solidFill>
-                            <a:srgbClr val="1B3A6B"/>
-                          </a:solidFill>
-                          <a:latin typeface="Calibri"/>
-                        </a:rPr>
-                        <a:t>+32,7 %</a:t>
-                      </a:r>
-                    </a:p>
-                  </a:txBody>
-                  <a:tcPr>
-                    <a:solidFill>
-                      <a:srgbClr val="DDE8F5"/>
-                    </a:solidFill>
-                    <a:lnL w="6350">
-                      <a:solidFill>
-                        <a:srgbClr val="DDDDDD"/>
-                      </a:solidFill>
-                    </a:lnL>
-                    <a:lnR w="6350">
-                      <a:solidFill>
-                        <a:srgbClr val="DDDDDD"/>
-                      </a:solidFill>
-                    </a:lnR>
-                    <a:lnT w="6350">
-                      <a:solidFill>
-                        <a:srgbClr val="DDDDDD"/>
-                      </a:solidFill>
-                    </a:lnT>
-                    <a:lnB w="6350">
-                      <a:solidFill>
-                        <a:srgbClr val="DDDDDD"/>
-                      </a:solidFill>
-                    </a:lnB>
-                  </a:tcPr>
-                </a:tc>
-              </a:tr>
-              <a:tr h="186000">
-                <a:tc>
-                  <a:txBody>
-                    <a:bodyPr/>
-                    <a:lstStyle/>
-                    <a:p>
-                      <a:pPr algn="l"/>
-                      <a:r>
-                        <a:rPr sz="800" b="0" i="0">
-                          <a:solidFill>
-                            <a:srgbClr val="0D0D0D"/>
-                          </a:solidFill>
-                          <a:latin typeface="Calibri"/>
-                        </a:rPr>
-                        <a:t>Optimiste (P90)</a:t>
-                      </a:r>
-                    </a:p>
-                  </a:txBody>
-                  <a:tcPr>
-                    <a:solidFill>
-                      <a:srgbClr val="F7F8FA"/>
-                    </a:solidFill>
-                    <a:lnL w="6350">
-                      <a:solidFill>
-                        <a:srgbClr val="DDDDDD"/>
-                      </a:solidFill>
-                    </a:lnL>
-                    <a:lnR w="6350">
-                      <a:solidFill>
-                        <a:srgbClr val="DDDDDD"/>
-                      </a:solidFill>
-                    </a:lnR>
-                    <a:lnT w="6350">
-                      <a:solidFill>
-                        <a:srgbClr val="DDDDDD"/>
-                      </a:solidFill>
-                    </a:lnT>
-                    <a:lnB w="6350">
-                      <a:solidFill>
-                        <a:srgbClr val="DDDDDD"/>
-                      </a:solidFill>
-                    </a:lnB>
-                  </a:tcPr>
-                </a:tc>
-                <a:tc>
-                  <a:txBody>
-                    <a:bodyPr/>
-                    <a:lstStyle/>
-                    <a:p>
-                      <a:pPr algn="ctr"/>
-                      <a:r>
-                        <a:rPr sz="800" b="0" i="0">
-                          <a:solidFill>
-                            <a:srgbClr val="0D0D0D"/>
-                          </a:solidFill>
-                          <a:latin typeface="Calibri"/>
-                        </a:rPr>
-                        <a:t>488 $</a:t>
-                      </a:r>
-                    </a:p>
-                  </a:txBody>
-                  <a:tcPr>
-                    <a:solidFill>
-                      <a:srgbClr val="F7F8FA"/>
-                    </a:solidFill>
-                    <a:lnL w="6350">
-                      <a:solidFill>
-                        <a:srgbClr val="DDDDDD"/>
-                      </a:solidFill>
-                    </a:lnL>
-                    <a:lnR w="6350">
-                      <a:solidFill>
-                        <a:srgbClr val="DDDDDD"/>
-                      </a:solidFill>
-                    </a:lnR>
-                    <a:lnT w="6350">
-                      <a:solidFill>
-                        <a:srgbClr val="DDDDDD"/>
-                      </a:solidFill>
-                    </a:lnT>
-                    <a:lnB w="6350">
-                      <a:solidFill>
-                        <a:srgbClr val="DDDDDD"/>
-                      </a:solidFill>
-                    </a:lnB>
-                  </a:tcPr>
-                </a:tc>
-                <a:tc>
-                  <a:txBody>
-                    <a:bodyPr/>
-                    <a:lstStyle/>
-                    <a:p>
-                      <a:pPr algn="ctr"/>
-                      <a:r>
-                        <a:rPr sz="800" b="0" i="0">
-                          <a:solidFill>
-                            <a:srgbClr val="0D0D0D"/>
-                          </a:solidFill>
-                          <a:latin typeface="Calibri"/>
-                        </a:rPr>
-                        <a:t>+151,4 %</a:t>
-                      </a:r>
-                    </a:p>
-                  </a:txBody>
-                  <a:tcPr>
-                    <a:solidFill>
-                      <a:srgbClr val="F7F8FA"/>
-                    </a:solidFill>
-                    <a:lnL w="6350">
-                      <a:solidFill>
-                        <a:srgbClr val="DDDDDD"/>
-                      </a:solidFill>
-                    </a:lnL>
-                    <a:lnR w="6350">
-                      <a:solidFill>
-                        <a:srgbClr val="DDDDDD"/>
-                      </a:solidFill>
-                    </a:lnR>
-                    <a:lnT w="6350">
-                      <a:solidFill>
-                        <a:srgbClr val="DDDDDD"/>
-                      </a:solidFill>
-                    </a:lnT>
-                    <a:lnB w="6350">
-                      <a:solidFill>
-                        <a:srgbClr val="DDDDDD"/>
-                      </a:solidFill>
-                    </a:lnB>
-                  </a:tcPr>
-                </a:tc>
-              </a:tr>
-              <a:tr h="186000">
-                <a:tc>
-                  <a:txBody>
-                    <a:bodyPr/>
-                    <a:lstStyle/>
-                    <a:p>
-                      <a:pPr algn="l"/>
-                      <a:r>
-                        <a:rPr sz="800" b="0" i="0">
-                          <a:solidFill>
-                            <a:srgbClr val="0D0D0D"/>
-                          </a:solidFill>
-                          <a:latin typeface="Calibri"/>
-                        </a:rPr>
-                        <a:t>Stress Up (P98)</a:t>
-                      </a:r>
-                    </a:p>
-                  </a:txBody>
-                  <a:tcPr>
-                    <a:solidFill>
-                      <a:srgbClr val="FFFFFF"/>
-                    </a:solidFill>
-                    <a:lnL w="6350">
-                      <a:solidFill>
-                        <a:srgbClr val="DDDDDD"/>
-                      </a:solidFill>
-                    </a:lnL>
-                    <a:lnR w="6350">
-                      <a:solidFill>
-                        <a:srgbClr val="DDDDDD"/>
-                      </a:solidFill>
-                    </a:lnR>
-                    <a:lnT w="6350">
-                      <a:solidFill>
-                        <a:srgbClr val="DDDDDD"/>
-                      </a:solidFill>
-                    </a:lnT>
-                    <a:lnB w="6350">
-                      <a:solidFill>
-                        <a:srgbClr val="DDDDDD"/>
-                      </a:solidFill>
-                    </a:lnB>
-                  </a:tcPr>
-                </a:tc>
-                <a:tc>
-                  <a:txBody>
-                    <a:bodyPr/>
-                    <a:lstStyle/>
-                    <a:p>
-                      <a:pPr algn="ctr"/>
-                      <a:r>
-                        <a:rPr sz="800" b="0" i="0">
-                          <a:solidFill>
-                            <a:srgbClr val="0D0D0D"/>
-                          </a:solidFill>
-                          <a:latin typeface="Calibri"/>
-                        </a:rPr>
-                        <a:t>713 $</a:t>
-                      </a:r>
-                    </a:p>
-                  </a:txBody>
-                  <a:tcPr>
-                    <a:solidFill>
-                      <a:srgbClr val="FFFFFF"/>
-                    </a:solidFill>
-                    <a:lnL w="6350">
-                      <a:solidFill>
-                        <a:srgbClr val="DDDDDD"/>
-                      </a:solidFill>
-                    </a:lnL>
-                    <a:lnR w="6350">
-                      <a:solidFill>
-                        <a:srgbClr val="DDDDDD"/>
-                      </a:solidFill>
-                    </a:lnR>
-                    <a:lnT w="6350">
-                      <a:solidFill>
-                        <a:srgbClr val="DDDDDD"/>
-                      </a:solidFill>
-                    </a:lnT>
-                    <a:lnB w="6350">
-                      <a:solidFill>
-                        <a:srgbClr val="DDDDDD"/>
-                      </a:solidFill>
-                    </a:lnB>
-                  </a:tcPr>
-                </a:tc>
-                <a:tc>
-                  <a:txBody>
-                    <a:bodyPr/>
-                    <a:lstStyle/>
-                    <a:p>
-                      <a:pPr algn="ctr"/>
-                      <a:r>
-                        <a:rPr sz="800" b="0" i="0">
-                          <a:solidFill>
-                            <a:srgbClr val="0D0D0D"/>
-                          </a:solidFill>
-                          <a:latin typeface="Calibri"/>
-                        </a:rPr>
-                        <a:t>+266,9 %</a:t>
-                      </a:r>
-                    </a:p>
-                  </a:txBody>
-                  <a:tcPr>
-                    <a:solidFill>
-                      <a:srgbClr val="FFFFFF"/>
-                    </a:solidFill>
-                    <a:lnL w="6350">
-                      <a:solidFill>
-                        <a:srgbClr val="DDDDDD"/>
-                      </a:solidFill>
-                    </a:lnL>
-                    <a:lnR w="6350">
-                      <a:solidFill>
-                        <a:srgbClr val="DDDDDD"/>
-                      </a:solidFill>
-                    </a:lnR>
-                    <a:lnT w="6350">
-                      <a:solidFill>
-                        <a:srgbClr val="DDDDDD"/>
-                      </a:solidFill>
-                    </a:lnT>
-                    <a:lnB w="6350">
-                      <a:solidFill>
-                        <a:srgbClr val="DDDDDD"/>
-                      </a:solidFill>
-                    </a:lnB>
-                  </a:tcPr>
-                </a:tc>
-              </a:tr>
-            </a:tbl>
-          </a:graphicData>
-        </a:graphic>
-      </p:graphicFrame>
+      <p:sp>
+        <p:nvSpPr>
+          <p:cNvPr id="19" name="TextBox 18"/>
+          <p:cNvSpPr txBox="1"/>
+          <p:nvPr/>
+        </p:nvSpPr>
+        <p:spPr>
+          <a:xfrm>
+            <a:off x="367200" y="2700000"/>
+            <a:ext cx="4024800" cy="1007999"/>
+          </a:xfrm>
+          <a:prstGeom prst="rect">
+            <a:avLst/>
+          </a:prstGeom>
+          <a:noFill/>
+        </p:spPr>
+        <p:txBody>
+          <a:bodyPr wrap="square">
+            <a:spAutoFit/>
+          </a:bodyPr>
+          <a:lstStyle/>
+          <a:p>
+            <a:pPr algn="l"/>
+            <a:r>
+              <a:rPr sz="900" b="0" i="0">
+                <a:solidFill>
+                  <a:srgbClr val="888888"/>
+                </a:solidFill>
+                <a:latin typeface="Calibri"/>
+              </a:rPr>
+              <a:t>Simulations GBM non disponibles
+pour ce ticker.</a:t>
+            </a:r>
+          </a:p>
+        </p:txBody>
+      </p:sp>
       <p:sp>
         <p:nvSpPr>
           <p:cNvPr id="20" name="TextBox 19"/>
@@ -8979,7 +8358,7 @@
                           </a:solidFill>
                           <a:latin typeface="Calibri"/>
                         </a:rPr>
-                        <a:t>209</a:t>
+                        <a:t>264</a:t>
                       </a:r>
                     </a:p>
                   </a:txBody>
@@ -9022,7 +8401,7 @@
                           </a:solidFill>
                           <a:latin typeface="Calibri"/>
                         </a:rPr>
-                        <a:t>217</a:t>
+                        <a:t>274</a:t>
                       </a:r>
                     </a:p>
                   </a:txBody>
@@ -9065,7 +8444,7 @@
                           </a:solidFill>
                           <a:latin typeface="Calibri"/>
                         </a:rPr>
-                        <a:t>226</a:t>
+                        <a:t>285</a:t>
                       </a:r>
                     </a:p>
                   </a:txBody>
@@ -9108,7 +8487,7 @@
                           </a:solidFill>
                           <a:latin typeface="Calibri"/>
                         </a:rPr>
-                        <a:t>236</a:t>
+                        <a:t>298</a:t>
                       </a:r>
                     </a:p>
                   </a:txBody>
@@ -9151,7 +8530,7 @@
                           </a:solidFill>
                           <a:latin typeface="Calibri"/>
                         </a:rPr>
-                        <a:t>247</a:t>
+                        <a:t>311</a:t>
                       </a:r>
                     </a:p>
                   </a:txBody>
@@ -9239,7 +8618,7 @@
                           </a:solidFill>
                           <a:latin typeface="Calibri"/>
                         </a:rPr>
-                        <a:t>194</a:t>
+                        <a:t>245</a:t>
                       </a:r>
                     </a:p>
                   </a:txBody>
@@ -9282,7 +8661,7 @@
                           </a:solidFill>
                           <a:latin typeface="Calibri"/>
                         </a:rPr>
-                        <a:t>201</a:t>
+                        <a:t>254</a:t>
                       </a:r>
                     </a:p>
                   </a:txBody>
@@ -9325,7 +8704,7 @@
                           </a:solidFill>
                           <a:latin typeface="Calibri"/>
                         </a:rPr>
-                        <a:t>209</a:t>
+                        <a:t>264</a:t>
                       </a:r>
                     </a:p>
                   </a:txBody>
@@ -9368,7 +8747,7 @@
                           </a:solidFill>
                           <a:latin typeface="Calibri"/>
                         </a:rPr>
-                        <a:t>217</a:t>
+                        <a:t>274</a:t>
                       </a:r>
                     </a:p>
                   </a:txBody>
@@ -9411,7 +8790,7 @@
                           </a:solidFill>
                           <a:latin typeface="Calibri"/>
                         </a:rPr>
-                        <a:t>226</a:t>
+                        <a:t>285</a:t>
                       </a:r>
                     </a:p>
                   </a:txBody>
@@ -9499,7 +8878,7 @@
                           </a:solidFill>
                           <a:latin typeface="Calibri"/>
                         </a:rPr>
-                        <a:t>181</a:t>
+                        <a:t>229</a:t>
                       </a:r>
                     </a:p>
                   </a:txBody>
@@ -9542,7 +8921,7 @@
                           </a:solidFill>
                           <a:latin typeface="Calibri"/>
                         </a:rPr>
-                        <a:t>188</a:t>
+                        <a:t>237</a:t>
                       </a:r>
                     </a:p>
                   </a:txBody>
@@ -9585,7 +8964,7 @@
                           </a:solidFill>
                           <a:latin typeface="Calibri"/>
                         </a:rPr>
-                        <a:t>194</a:t>
+                        <a:t>245</a:t>
                       </a:r>
                     </a:p>
                   </a:txBody>
@@ -9628,7 +9007,7 @@
                           </a:solidFill>
                           <a:latin typeface="Calibri"/>
                         </a:rPr>
-                        <a:t>201</a:t>
+                        <a:t>254</a:t>
                       </a:r>
                     </a:p>
                   </a:txBody>
@@ -9671,7 +9050,7 @@
                           </a:solidFill>
                           <a:latin typeface="Calibri"/>
                         </a:rPr>
-                        <a:t>209</a:t>
+                        <a:t>264</a:t>
                       </a:r>
                     </a:p>
                   </a:txBody>
@@ -9759,7 +9138,7 @@
                           </a:solidFill>
                           <a:latin typeface="Calibri"/>
                         </a:rPr>
-                        <a:t>170</a:t>
+                        <a:t>215</a:t>
                       </a:r>
                     </a:p>
                   </a:txBody>
@@ -9802,7 +9181,7 @@
                           </a:solidFill>
                           <a:latin typeface="Calibri"/>
                         </a:rPr>
-                        <a:t>176</a:t>
+                        <a:t>221</a:t>
                       </a:r>
                     </a:p>
                   </a:txBody>
@@ -9845,7 +9224,7 @@
                           </a:solidFill>
                           <a:latin typeface="Calibri"/>
                         </a:rPr>
-                        <a:t>181</a:t>
+                        <a:t>229</a:t>
                       </a:r>
                     </a:p>
                   </a:txBody>
@@ -9888,7 +9267,7 @@
                           </a:solidFill>
                           <a:latin typeface="Calibri"/>
                         </a:rPr>
-                        <a:t>188</a:t>
+                        <a:t>237</a:t>
                       </a:r>
                     </a:p>
                   </a:txBody>
@@ -9931,7 +9310,7 @@
                           </a:solidFill>
                           <a:latin typeface="Calibri"/>
                         </a:rPr>
-                        <a:t>194</a:t>
+                        <a:t>245</a:t>
                       </a:r>
                     </a:p>
                   </a:txBody>
@@ -10019,7 +9398,7 @@
                           </a:solidFill>
                           <a:latin typeface="Calibri"/>
                         </a:rPr>
-                        <a:t>160</a:t>
+                        <a:t>202</a:t>
                       </a:r>
                     </a:p>
                   </a:txBody>
@@ -10062,7 +9441,7 @@
                           </a:solidFill>
                           <a:latin typeface="Calibri"/>
                         </a:rPr>
-                        <a:t>165</a:t>
+                        <a:t>208</a:t>
                       </a:r>
                     </a:p>
                   </a:txBody>
@@ -10105,7 +9484,7 @@
                           </a:solidFill>
                           <a:latin typeface="Calibri"/>
                         </a:rPr>
-                        <a:t>170</a:t>
+                        <a:t>215</a:t>
                       </a:r>
                     </a:p>
                   </a:txBody>
@@ -10148,7 +9527,7 @@
                           </a:solidFill>
                           <a:latin typeface="Calibri"/>
                         </a:rPr>
-                        <a:t>176</a:t>
+                        <a:t>221</a:t>
                       </a:r>
                     </a:p>
                   </a:txBody>
@@ -10191,7 +9570,7 @@
                           </a:solidFill>
                           <a:latin typeface="Calibri"/>
                         </a:rPr>
-                        <a:t>181</a:t>
+                        <a:t>229</a:t>
                       </a:r>
                     </a:p>
                   </a:txBody>
@@ -10226,6 +9605,162 @@
           </a:graphicData>
         </a:graphic>
       </p:graphicFrame>
+      <p:sp>
+        <p:nvSpPr>
+          <p:cNvPr id="22" name="Rectangle 21"/>
+          <p:cNvSpPr/>
+          <p:nvPr/>
+        </p:nvSpPr>
+        <p:spPr>
+          <a:xfrm>
+            <a:off x="367200" y="4031999"/>
+            <a:ext cx="8413200" cy="547200"/>
+          </a:xfrm>
+          <a:prstGeom prst="rect">
+            <a:avLst/>
+          </a:prstGeom>
+          <a:solidFill>
+            <a:srgbClr val="F5F7FA"/>
+          </a:solidFill>
+          <a:ln>
+            <a:noFill/>
+          </a:ln>
+        </p:spPr>
+        <p:style>
+          <a:lnRef idx="1">
+            <a:schemeClr val="accent1"/>
+          </a:lnRef>
+          <a:fillRef idx="3">
+            <a:schemeClr val="accent1"/>
+          </a:fillRef>
+          <a:effectRef idx="2">
+            <a:schemeClr val="accent1"/>
+          </a:effectRef>
+          <a:fontRef idx="minor">
+            <a:schemeClr val="lt1"/>
+          </a:fontRef>
+        </p:style>
+        <p:txBody>
+          <a:bodyPr rtlCol="0" anchor="ctr"/>
+          <a:lstStyle/>
+          <a:p>
+            <a:pPr algn="ctr"/>
+          </a:p>
+        </p:txBody>
+      </p:sp>
+      <p:sp>
+        <p:nvSpPr>
+          <p:cNvPr id="23" name="Rectangle 22"/>
+          <p:cNvSpPr/>
+          <p:nvPr/>
+        </p:nvSpPr>
+        <p:spPr>
+          <a:xfrm>
+            <a:off x="367200" y="4031999"/>
+            <a:ext cx="79200" cy="547200"/>
+          </a:xfrm>
+          <a:prstGeom prst="rect">
+            <a:avLst/>
+          </a:prstGeom>
+          <a:solidFill>
+            <a:srgbClr val="2E5FA3"/>
+          </a:solidFill>
+          <a:ln>
+            <a:noFill/>
+          </a:ln>
+        </p:spPr>
+        <p:style>
+          <a:lnRef idx="1">
+            <a:schemeClr val="accent1"/>
+          </a:lnRef>
+          <a:fillRef idx="3">
+            <a:schemeClr val="accent1"/>
+          </a:fillRef>
+          <a:effectRef idx="2">
+            <a:schemeClr val="accent1"/>
+          </a:effectRef>
+          <a:fontRef idx="minor">
+            <a:schemeClr val="lt1"/>
+          </a:fontRef>
+        </p:style>
+        <p:txBody>
+          <a:bodyPr rtlCol="0" anchor="ctr"/>
+          <a:lstStyle/>
+          <a:p>
+            <a:pPr algn="ctr"/>
+          </a:p>
+        </p:txBody>
+      </p:sp>
+      <p:sp>
+        <p:nvSpPr>
+          <p:cNvPr id="24" name="TextBox 23"/>
+          <p:cNvSpPr txBox="1"/>
+          <p:nvPr/>
+        </p:nvSpPr>
+        <p:spPr>
+          <a:xfrm>
+            <a:off x="475200" y="4060800"/>
+            <a:ext cx="8298000" cy="151200"/>
+          </a:xfrm>
+          <a:prstGeom prst="rect">
+            <a:avLst/>
+          </a:prstGeom>
+          <a:noFill/>
+        </p:spPr>
+        <p:txBody>
+          <a:bodyPr wrap="none">
+            <a:spAutoFit/>
+          </a:bodyPr>
+          <a:lstStyle/>
+          <a:p>
+            <a:pPr algn="l"/>
+            <a:r>
+              <a:rPr sz="950" b="1" i="0">
+                <a:solidFill>
+                  <a:srgbClr val="1B3A6B"/>
+                </a:solidFill>
+                <a:latin typeface="Calibri"/>
+              </a:rPr>
+              <a:t>DCF base implique upside de +26% — valorisation attractive</a:t>
+            </a:r>
+          </a:p>
+        </p:txBody>
+      </p:sp>
+      <p:sp>
+        <p:nvSpPr>
+          <p:cNvPr id="25" name="TextBox 24"/>
+          <p:cNvSpPr txBox="1"/>
+          <p:nvPr/>
+        </p:nvSpPr>
+        <p:spPr>
+          <a:xfrm>
+            <a:off x="475200" y="4230000"/>
+            <a:ext cx="8298000" cy="324000"/>
+          </a:xfrm>
+          <a:prstGeom prst="rect">
+            <a:avLst/>
+          </a:prstGeom>
+          <a:noFill/>
+        </p:spPr>
+        <p:txBody>
+          <a:bodyPr wrap="square">
+            <a:spAutoFit/>
+          </a:bodyPr>
+          <a:lstStyle/>
+          <a:p>
+            <a:pPr algn="l"/>
+            <a:r>
+              <a:rPr sz="850" b="0" i="0">
+                <a:solidFill>
+                  <a:srgbClr val="555555"/>
+                </a:solidFill>
+                <a:latin typeface="Calibri"/>
+              </a:rPr>
+              <a:t>Avec un WACC de 17,1% et un TGR de 3,0%, le prix implicite DCF est de 245 USD (base), soit un upside de 26% vs le cours actuel. Cette valorisation suggère une sous-évaluation structurelle, mais la prime de croissance est déjà partiellement intégrée. Une accélération des revenus Data Center au-delà des attentes débloquerait la valeur.</a:t>
+            </a:r>
+          </a:p>
+        </p:txBody>
+      </p:sp>
     </p:spTree>
   </p:cSld>
   <p:clrMapOvr>
@@ -10835,7 +10370,7 @@
         </p:nvGraphicFramePr>
         <p:xfrm>
           <a:off x="367200" y="914400"/>
-          <a:ext cx="8413200" cy="871200"/>
+          <a:ext cx="8413200" cy="2015999"/>
         </p:xfrm>
         <a:graphic>
           <a:graphicData uri="http://schemas.openxmlformats.org/drawingml/2006/table">
@@ -10853,7 +10388,7 @@
                 <a:gridCol w="1093716"/>
                 <a:gridCol w="1009584"/>
               </a:tblGrid>
-              <a:tr h="290400">
+              <a:tr h="251999">
                 <a:tc>
                   <a:txBody>
                     <a:bodyPr/>
@@ -11039,7 +10574,7 @@
                   </a:tcPr>
                 </a:tc>
               </a:tr>
-              <a:tr h="290400">
+              <a:tr h="251999">
                 <a:tc>
                   <a:txBody>
                     <a:bodyPr/>
@@ -11099,7 +10634,7 @@
                           </a:solidFill>
                           <a:latin typeface="Calibri"/>
                         </a:rPr>
-                        <a:t>4 720,0</a:t>
+                        <a:t>4 726,6</a:t>
                       </a:r>
                     </a:p>
                   </a:txBody>
@@ -11122,7 +10657,7 @@
                           </a:solidFill>
                           <a:latin typeface="Calibri"/>
                         </a:rPr>
-                        <a:t>54,8x</a:t>
+                        <a:t>54,9x</a:t>
                       </a:r>
                     </a:p>
                   </a:txBody>
@@ -11225,7 +10760,937 @@
                   </a:tcPr>
                 </a:tc>
               </a:tr>
-              <a:tr h="290400">
+              <a:tr h="251999">
+                <a:tc>
+                  <a:txBody>
+                    <a:bodyPr/>
+                    <a:lstStyle/>
+                    <a:p>
+                      <a:pPr algn="l"/>
+                      <a:r>
+                        <a:rPr sz="800" b="0" i="0">
+                          <a:solidFill>
+                            <a:srgbClr val="0D0D0D"/>
+                          </a:solidFill>
+                          <a:latin typeface="Calibri"/>
+                        </a:rPr>
+                        <a:t>Advanced Micro Devices</a:t>
+                      </a:r>
+                    </a:p>
+                  </a:txBody>
+                  <a:tcPr>
+                    <a:solidFill>
+                      <a:srgbClr val="FFFFFF"/>
+                    </a:solidFill>
+                  </a:tcPr>
+                </a:tc>
+                <a:tc>
+                  <a:txBody>
+                    <a:bodyPr/>
+                    <a:lstStyle/>
+                    <a:p>
+                      <a:pPr algn="ctr"/>
+                      <a:r>
+                        <a:rPr sz="750" b="0" i="0">
+                          <a:solidFill>
+                            <a:srgbClr val="555555"/>
+                          </a:solidFill>
+                          <a:latin typeface="Calibri"/>
+                        </a:rPr>
+                        <a:t>AMD</a:t>
+                      </a:r>
+                    </a:p>
+                  </a:txBody>
+                  <a:tcPr>
+                    <a:solidFill>
+                      <a:srgbClr val="FFFFFF"/>
+                    </a:solidFill>
+                  </a:tcPr>
+                </a:tc>
+                <a:tc>
+                  <a:txBody>
+                    <a:bodyPr/>
+                    <a:lstStyle/>
+                    <a:p>
+                      <a:pPr algn="ctr"/>
+                      <a:r>
+                        <a:rPr sz="800" b="0" i="0">
+                          <a:solidFill>
+                            <a:srgbClr val="0D0D0D"/>
+                          </a:solidFill>
+                          <a:latin typeface="Calibri"/>
+                        </a:rPr>
+                        <a:t>220,0</a:t>
+                      </a:r>
+                    </a:p>
+                  </a:txBody>
+                  <a:tcPr>
+                    <a:solidFill>
+                      <a:srgbClr val="FFFFFF"/>
+                    </a:solidFill>
+                  </a:tcPr>
+                </a:tc>
+                <a:tc>
+                  <a:txBody>
+                    <a:bodyPr/>
+                    <a:lstStyle/>
+                    <a:p>
+                      <a:pPr algn="ctr"/>
+                      <a:r>
+                        <a:rPr sz="800" b="0" i="0">
+                          <a:solidFill>
+                            <a:srgbClr val="0D0D0D"/>
+                          </a:solidFill>
+                          <a:latin typeface="Calibri"/>
+                        </a:rPr>
+                        <a:t>25,0x</a:t>
+                      </a:r>
+                    </a:p>
+                  </a:txBody>
+                  <a:tcPr>
+                    <a:solidFill>
+                      <a:srgbClr val="FFFFFF"/>
+                    </a:solidFill>
+                  </a:tcPr>
+                </a:tc>
+                <a:tc>
+                  <a:txBody>
+                    <a:bodyPr/>
+                    <a:lstStyle/>
+                    <a:p>
+                      <a:pPr algn="ctr"/>
+                      <a:r>
+                        <a:rPr sz="800" b="0" i="0">
+                          <a:solidFill>
+                            <a:srgbClr val="0D0D0D"/>
+                          </a:solidFill>
+                          <a:latin typeface="Calibri"/>
+                        </a:rPr>
+                        <a:t>5,0x</a:t>
+                      </a:r>
+                    </a:p>
+                  </a:txBody>
+                  <a:tcPr>
+                    <a:solidFill>
+                      <a:srgbClr val="FFFFFF"/>
+                    </a:solidFill>
+                  </a:tcPr>
+                </a:tc>
+                <a:tc>
+                  <a:txBody>
+                    <a:bodyPr/>
+                    <a:lstStyle/>
+                    <a:p>
+                      <a:pPr algn="ctr"/>
+                      <a:r>
+                        <a:rPr sz="800" b="0" i="0">
+                          <a:solidFill>
+                            <a:srgbClr val="0D0D0D"/>
+                          </a:solidFill>
+                          <a:latin typeface="Calibri"/>
+                        </a:rPr>
+                        <a:t>45,0x</a:t>
+                      </a:r>
+                    </a:p>
+                  </a:txBody>
+                  <a:tcPr>
+                    <a:solidFill>
+                      <a:srgbClr val="FFFFFF"/>
+                    </a:solidFill>
+                  </a:tcPr>
+                </a:tc>
+                <a:tc>
+                  <a:txBody>
+                    <a:bodyPr/>
+                    <a:lstStyle/>
+                    <a:p>
+                      <a:pPr algn="ctr"/>
+                      <a:r>
+                        <a:rPr sz="800" b="0" i="0">
+                          <a:solidFill>
+                            <a:srgbClr val="0D0D0D"/>
+                          </a:solidFill>
+                          <a:latin typeface="Calibri"/>
+                        </a:rPr>
+                        <a:t>52,0 %</a:t>
+                      </a:r>
+                    </a:p>
+                  </a:txBody>
+                  <a:tcPr>
+                    <a:solidFill>
+                      <a:srgbClr val="FFFFFF"/>
+                    </a:solidFill>
+                  </a:tcPr>
+                </a:tc>
+                <a:tc>
+                  <a:txBody>
+                    <a:bodyPr/>
+                    <a:lstStyle/>
+                    <a:p>
+                      <a:pPr algn="ctr"/>
+                      <a:r>
+                        <a:rPr sz="800" b="0" i="0">
+                          <a:solidFill>
+                            <a:srgbClr val="0D0D0D"/>
+                          </a:solidFill>
+                          <a:latin typeface="Calibri"/>
+                        </a:rPr>
+                        <a:t>35,0 %</a:t>
+                      </a:r>
+                    </a:p>
+                  </a:txBody>
+                  <a:tcPr>
+                    <a:solidFill>
+                      <a:srgbClr val="FFFFFF"/>
+                    </a:solidFill>
+                  </a:tcPr>
+                </a:tc>
+              </a:tr>
+              <a:tr h="251999">
+                <a:tc>
+                  <a:txBody>
+                    <a:bodyPr/>
+                    <a:lstStyle/>
+                    <a:p>
+                      <a:pPr algn="l"/>
+                      <a:r>
+                        <a:rPr sz="800" b="0" i="0">
+                          <a:solidFill>
+                            <a:srgbClr val="0D0D0D"/>
+                          </a:solidFill>
+                          <a:latin typeface="Calibri"/>
+                        </a:rPr>
+                        <a:t>Intel Corporation</a:t>
+                      </a:r>
+                    </a:p>
+                  </a:txBody>
+                  <a:tcPr>
+                    <a:solidFill>
+                      <a:srgbClr val="F7F8FA"/>
+                    </a:solidFill>
+                  </a:tcPr>
+                </a:tc>
+                <a:tc>
+                  <a:txBody>
+                    <a:bodyPr/>
+                    <a:lstStyle/>
+                    <a:p>
+                      <a:pPr algn="ctr"/>
+                      <a:r>
+                        <a:rPr sz="750" b="0" i="0">
+                          <a:solidFill>
+                            <a:srgbClr val="555555"/>
+                          </a:solidFill>
+                          <a:latin typeface="Calibri"/>
+                        </a:rPr>
+                        <a:t>INTC</a:t>
+                      </a:r>
+                    </a:p>
+                  </a:txBody>
+                  <a:tcPr>
+                    <a:solidFill>
+                      <a:srgbClr val="F7F8FA"/>
+                    </a:solidFill>
+                  </a:tcPr>
+                </a:tc>
+                <a:tc>
+                  <a:txBody>
+                    <a:bodyPr/>
+                    <a:lstStyle/>
+                    <a:p>
+                      <a:pPr algn="ctr"/>
+                      <a:r>
+                        <a:rPr sz="800" b="0" i="0">
+                          <a:solidFill>
+                            <a:srgbClr val="0D0D0D"/>
+                          </a:solidFill>
+                          <a:latin typeface="Calibri"/>
+                        </a:rPr>
+                        <a:t>180,0</a:t>
+                      </a:r>
+                    </a:p>
+                  </a:txBody>
+                  <a:tcPr>
+                    <a:solidFill>
+                      <a:srgbClr val="F7F8FA"/>
+                    </a:solidFill>
+                  </a:tcPr>
+                </a:tc>
+                <a:tc>
+                  <a:txBody>
+                    <a:bodyPr/>
+                    <a:lstStyle/>
+                    <a:p>
+                      <a:pPr algn="ctr"/>
+                      <a:r>
+                        <a:rPr sz="800" b="0" i="0">
+                          <a:solidFill>
+                            <a:srgbClr val="0D0D0D"/>
+                          </a:solidFill>
+                          <a:latin typeface="Calibri"/>
+                        </a:rPr>
+                        <a:t>8,0x</a:t>
+                      </a:r>
+                    </a:p>
+                  </a:txBody>
+                  <a:tcPr>
+                    <a:solidFill>
+                      <a:srgbClr val="F7F8FA"/>
+                    </a:solidFill>
+                  </a:tcPr>
+                </a:tc>
+                <a:tc>
+                  <a:txBody>
+                    <a:bodyPr/>
+                    <a:lstStyle/>
+                    <a:p>
+                      <a:pPr algn="ctr"/>
+                      <a:r>
+                        <a:rPr sz="800" b="0" i="0">
+                          <a:solidFill>
+                            <a:srgbClr val="0D0D0D"/>
+                          </a:solidFill>
+                          <a:latin typeface="Calibri"/>
+                        </a:rPr>
+                        <a:t>1,5x</a:t>
+                      </a:r>
+                    </a:p>
+                  </a:txBody>
+                  <a:tcPr>
+                    <a:solidFill>
+                      <a:srgbClr val="F7F8FA"/>
+                    </a:solidFill>
+                  </a:tcPr>
+                </a:tc>
+                <a:tc>
+                  <a:txBody>
+                    <a:bodyPr/>
+                    <a:lstStyle/>
+                    <a:p>
+                      <a:pPr algn="ctr"/>
+                      <a:r>
+                        <a:rPr sz="800" b="0" i="0">
+                          <a:solidFill>
+                            <a:srgbClr val="0D0D0D"/>
+                          </a:solidFill>
+                          <a:latin typeface="Calibri"/>
+                        </a:rPr>
+                        <a:t>12,0x</a:t>
+                      </a:r>
+                    </a:p>
+                  </a:txBody>
+                  <a:tcPr>
+                    <a:solidFill>
+                      <a:srgbClr val="F7F8FA"/>
+                    </a:solidFill>
+                  </a:tcPr>
+                </a:tc>
+                <a:tc>
+                  <a:txBody>
+                    <a:bodyPr/>
+                    <a:lstStyle/>
+                    <a:p>
+                      <a:pPr algn="ctr"/>
+                      <a:r>
+                        <a:rPr sz="800" b="0" i="0">
+                          <a:solidFill>
+                            <a:srgbClr val="0D0D0D"/>
+                          </a:solidFill>
+                          <a:latin typeface="Calibri"/>
+                        </a:rPr>
+                        <a:t>55,0 %</a:t>
+                      </a:r>
+                    </a:p>
+                  </a:txBody>
+                  <a:tcPr>
+                    <a:solidFill>
+                      <a:srgbClr val="F7F8FA"/>
+                    </a:solidFill>
+                  </a:tcPr>
+                </a:tc>
+                <a:tc>
+                  <a:txBody>
+                    <a:bodyPr/>
+                    <a:lstStyle/>
+                    <a:p>
+                      <a:pPr algn="ctr"/>
+                      <a:r>
+                        <a:rPr sz="800" b="0" i="0">
+                          <a:solidFill>
+                            <a:srgbClr val="0D0D0D"/>
+                          </a:solidFill>
+                          <a:latin typeface="Calibri"/>
+                        </a:rPr>
+                        <a:t>25,0 %</a:t>
+                      </a:r>
+                    </a:p>
+                  </a:txBody>
+                  <a:tcPr>
+                    <a:solidFill>
+                      <a:srgbClr val="F7F8FA"/>
+                    </a:solidFill>
+                  </a:tcPr>
+                </a:tc>
+              </a:tr>
+              <a:tr h="251999">
+                <a:tc>
+                  <a:txBody>
+                    <a:bodyPr/>
+                    <a:lstStyle/>
+                    <a:p>
+                      <a:pPr algn="l"/>
+                      <a:r>
+                        <a:rPr sz="800" b="0" i="0">
+                          <a:solidFill>
+                            <a:srgbClr val="0D0D0D"/>
+                          </a:solidFill>
+                          <a:latin typeface="Calibri"/>
+                        </a:rPr>
+                        <a:t>Qualcomm Incorporated</a:t>
+                      </a:r>
+                    </a:p>
+                  </a:txBody>
+                  <a:tcPr>
+                    <a:solidFill>
+                      <a:srgbClr val="FFFFFF"/>
+                    </a:solidFill>
+                  </a:tcPr>
+                </a:tc>
+                <a:tc>
+                  <a:txBody>
+                    <a:bodyPr/>
+                    <a:lstStyle/>
+                    <a:p>
+                      <a:pPr algn="ctr"/>
+                      <a:r>
+                        <a:rPr sz="750" b="0" i="0">
+                          <a:solidFill>
+                            <a:srgbClr val="555555"/>
+                          </a:solidFill>
+                          <a:latin typeface="Calibri"/>
+                        </a:rPr>
+                        <a:t>QCOM</a:t>
+                      </a:r>
+                    </a:p>
+                  </a:txBody>
+                  <a:tcPr>
+                    <a:solidFill>
+                      <a:srgbClr val="FFFFFF"/>
+                    </a:solidFill>
+                  </a:tcPr>
+                </a:tc>
+                <a:tc>
+                  <a:txBody>
+                    <a:bodyPr/>
+                    <a:lstStyle/>
+                    <a:p>
+                      <a:pPr algn="ctr"/>
+                      <a:r>
+                        <a:rPr sz="800" b="0" i="0">
+                          <a:solidFill>
+                            <a:srgbClr val="0D0D0D"/>
+                          </a:solidFill>
+                          <a:latin typeface="Calibri"/>
+                        </a:rPr>
+                        <a:t>200,0</a:t>
+                      </a:r>
+                    </a:p>
+                  </a:txBody>
+                  <a:tcPr>
+                    <a:solidFill>
+                      <a:srgbClr val="FFFFFF"/>
+                    </a:solidFill>
+                  </a:tcPr>
+                </a:tc>
+                <a:tc>
+                  <a:txBody>
+                    <a:bodyPr/>
+                    <a:lstStyle/>
+                    <a:p>
+                      <a:pPr algn="ctr"/>
+                      <a:r>
+                        <a:rPr sz="800" b="0" i="0">
+                          <a:solidFill>
+                            <a:srgbClr val="0D0D0D"/>
+                          </a:solidFill>
+                          <a:latin typeface="Calibri"/>
+                        </a:rPr>
+                        <a:t>18,0x</a:t>
+                      </a:r>
+                    </a:p>
+                  </a:txBody>
+                  <a:tcPr>
+                    <a:solidFill>
+                      <a:srgbClr val="FFFFFF"/>
+                    </a:solidFill>
+                  </a:tcPr>
+                </a:tc>
+                <a:tc>
+                  <a:txBody>
+                    <a:bodyPr/>
+                    <a:lstStyle/>
+                    <a:p>
+                      <a:pPr algn="ctr"/>
+                      <a:r>
+                        <a:rPr sz="800" b="0" i="0">
+                          <a:solidFill>
+                            <a:srgbClr val="0D0D0D"/>
+                          </a:solidFill>
+                          <a:latin typeface="Calibri"/>
+                        </a:rPr>
+                        <a:t>6,5x</a:t>
+                      </a:r>
+                    </a:p>
+                  </a:txBody>
+                  <a:tcPr>
+                    <a:solidFill>
+                      <a:srgbClr val="FFFFFF"/>
+                    </a:solidFill>
+                  </a:tcPr>
+                </a:tc>
+                <a:tc>
+                  <a:txBody>
+                    <a:bodyPr/>
+                    <a:lstStyle/>
+                    <a:p>
+                      <a:pPr algn="ctr"/>
+                      <a:r>
+                        <a:rPr sz="800" b="0" i="0">
+                          <a:solidFill>
+                            <a:srgbClr val="0D0D0D"/>
+                          </a:solidFill>
+                          <a:latin typeface="Calibri"/>
+                        </a:rPr>
+                        <a:t>22,0x</a:t>
+                      </a:r>
+                    </a:p>
+                  </a:txBody>
+                  <a:tcPr>
+                    <a:solidFill>
+                      <a:srgbClr val="FFFFFF"/>
+                    </a:solidFill>
+                  </a:tcPr>
+                </a:tc>
+                <a:tc>
+                  <a:txBody>
+                    <a:bodyPr/>
+                    <a:lstStyle/>
+                    <a:p>
+                      <a:pPr algn="ctr"/>
+                      <a:r>
+                        <a:rPr sz="800" b="0" i="0">
+                          <a:solidFill>
+                            <a:srgbClr val="0D0D0D"/>
+                          </a:solidFill>
+                          <a:latin typeface="Calibri"/>
+                        </a:rPr>
+                        <a:t>62,0 %</a:t>
+                      </a:r>
+                    </a:p>
+                  </a:txBody>
+                  <a:tcPr>
+                    <a:solidFill>
+                      <a:srgbClr val="FFFFFF"/>
+                    </a:solidFill>
+                  </a:tcPr>
+                </a:tc>
+                <a:tc>
+                  <a:txBody>
+                    <a:bodyPr/>
+                    <a:lstStyle/>
+                    <a:p>
+                      <a:pPr algn="ctr"/>
+                      <a:r>
+                        <a:rPr sz="800" b="0" i="0">
+                          <a:solidFill>
+                            <a:srgbClr val="0D0D0D"/>
+                          </a:solidFill>
+                          <a:latin typeface="Calibri"/>
+                        </a:rPr>
+                        <a:t>45,0 %</a:t>
+                      </a:r>
+                    </a:p>
+                  </a:txBody>
+                  <a:tcPr>
+                    <a:solidFill>
+                      <a:srgbClr val="FFFFFF"/>
+                    </a:solidFill>
+                  </a:tcPr>
+                </a:tc>
+              </a:tr>
+              <a:tr h="251999">
+                <a:tc>
+                  <a:txBody>
+                    <a:bodyPr/>
+                    <a:lstStyle/>
+                    <a:p>
+                      <a:pPr algn="l"/>
+                      <a:r>
+                        <a:rPr sz="800" b="0" i="0">
+                          <a:solidFill>
+                            <a:srgbClr val="0D0D0D"/>
+                          </a:solidFill>
+                          <a:latin typeface="Calibri"/>
+                        </a:rPr>
+                        <a:t>Broadcom Incorporated</a:t>
+                      </a:r>
+                    </a:p>
+                  </a:txBody>
+                  <a:tcPr>
+                    <a:solidFill>
+                      <a:srgbClr val="F7F8FA"/>
+                    </a:solidFill>
+                  </a:tcPr>
+                </a:tc>
+                <a:tc>
+                  <a:txBody>
+                    <a:bodyPr/>
+                    <a:lstStyle/>
+                    <a:p>
+                      <a:pPr algn="ctr"/>
+                      <a:r>
+                        <a:rPr sz="750" b="0" i="0">
+                          <a:solidFill>
+                            <a:srgbClr val="555555"/>
+                          </a:solidFill>
+                          <a:latin typeface="Calibri"/>
+                        </a:rPr>
+                        <a:t>AVGO</a:t>
+                      </a:r>
+                    </a:p>
+                  </a:txBody>
+                  <a:tcPr>
+                    <a:solidFill>
+                      <a:srgbClr val="F7F8FA"/>
+                    </a:solidFill>
+                  </a:tcPr>
+                </a:tc>
+                <a:tc>
+                  <a:txBody>
+                    <a:bodyPr/>
+                    <a:lstStyle/>
+                    <a:p>
+                      <a:pPr algn="ctr"/>
+                      <a:r>
+                        <a:rPr sz="800" b="0" i="0">
+                          <a:solidFill>
+                            <a:srgbClr val="0D0D0D"/>
+                          </a:solidFill>
+                          <a:latin typeface="Calibri"/>
+                        </a:rPr>
+                        <a:t>500,0</a:t>
+                      </a:r>
+                    </a:p>
+                  </a:txBody>
+                  <a:tcPr>
+                    <a:solidFill>
+                      <a:srgbClr val="F7F8FA"/>
+                    </a:solidFill>
+                  </a:tcPr>
+                </a:tc>
+                <a:tc>
+                  <a:txBody>
+                    <a:bodyPr/>
+                    <a:lstStyle/>
+                    <a:p>
+                      <a:pPr algn="ctr"/>
+                      <a:r>
+                        <a:rPr sz="800" b="0" i="0">
+                          <a:solidFill>
+                            <a:srgbClr val="0D0D0D"/>
+                          </a:solidFill>
+                          <a:latin typeface="Calibri"/>
+                        </a:rPr>
+                        <a:t>30,0x</a:t>
+                      </a:r>
+                    </a:p>
+                  </a:txBody>
+                  <a:tcPr>
+                    <a:solidFill>
+                      <a:srgbClr val="F7F8FA"/>
+                    </a:solidFill>
+                  </a:tcPr>
+                </a:tc>
+                <a:tc>
+                  <a:txBody>
+                    <a:bodyPr/>
+                    <a:lstStyle/>
+                    <a:p>
+                      <a:pPr algn="ctr"/>
+                      <a:r>
+                        <a:rPr sz="800" b="0" i="0">
+                          <a:solidFill>
+                            <a:srgbClr val="0D0D0D"/>
+                          </a:solidFill>
+                          <a:latin typeface="Calibri"/>
+                        </a:rPr>
+                        <a:t>12,0x</a:t>
+                      </a:r>
+                    </a:p>
+                  </a:txBody>
+                  <a:tcPr>
+                    <a:solidFill>
+                      <a:srgbClr val="F7F8FA"/>
+                    </a:solidFill>
+                  </a:tcPr>
+                </a:tc>
+                <a:tc>
+                  <a:txBody>
+                    <a:bodyPr/>
+                    <a:lstStyle/>
+                    <a:p>
+                      <a:pPr algn="ctr"/>
+                      <a:r>
+                        <a:rPr sz="800" b="0" i="0">
+                          <a:solidFill>
+                            <a:srgbClr val="0D0D0D"/>
+                          </a:solidFill>
+                          <a:latin typeface="Calibri"/>
+                        </a:rPr>
+                        <a:t>40,0x</a:t>
+                      </a:r>
+                    </a:p>
+                  </a:txBody>
+                  <a:tcPr>
+                    <a:solidFill>
+                      <a:srgbClr val="F7F8FA"/>
+                    </a:solidFill>
+                  </a:tcPr>
+                </a:tc>
+                <a:tc>
+                  <a:txBody>
+                    <a:bodyPr/>
+                    <a:lstStyle/>
+                    <a:p>
+                      <a:pPr algn="ctr"/>
+                      <a:r>
+                        <a:rPr sz="800" b="0" i="0">
+                          <a:solidFill>
+                            <a:srgbClr val="0D0D0D"/>
+                          </a:solidFill>
+                          <a:latin typeface="Calibri"/>
+                        </a:rPr>
+                        <a:t>70,0 %</a:t>
+                      </a:r>
+                    </a:p>
+                  </a:txBody>
+                  <a:tcPr>
+                    <a:solidFill>
+                      <a:srgbClr val="F7F8FA"/>
+                    </a:solidFill>
+                  </a:tcPr>
+                </a:tc>
+                <a:tc>
+                  <a:txBody>
+                    <a:bodyPr/>
+                    <a:lstStyle/>
+                    <a:p>
+                      <a:pPr algn="ctr"/>
+                      <a:r>
+                        <a:rPr sz="800" b="0" i="0">
+                          <a:solidFill>
+                            <a:srgbClr val="0D0D0D"/>
+                          </a:solidFill>
+                          <a:latin typeface="Calibri"/>
+                        </a:rPr>
+                        <a:t>60,0 %</a:t>
+                      </a:r>
+                    </a:p>
+                  </a:txBody>
+                  <a:tcPr>
+                    <a:solidFill>
+                      <a:srgbClr val="F7F8FA"/>
+                    </a:solidFill>
+                  </a:tcPr>
+                </a:tc>
+              </a:tr>
+              <a:tr h="251999">
+                <a:tc>
+                  <a:txBody>
+                    <a:bodyPr/>
+                    <a:lstStyle/>
+                    <a:p>
+                      <a:pPr algn="l"/>
+                      <a:r>
+                        <a:rPr sz="800" b="0" i="0">
+                          <a:solidFill>
+                            <a:srgbClr val="0D0D0D"/>
+                          </a:solidFill>
+                          <a:latin typeface="Calibri"/>
+                        </a:rPr>
+                        <a:t>ASML Holding</a:t>
+                      </a:r>
+                    </a:p>
+                  </a:txBody>
+                  <a:tcPr>
+                    <a:solidFill>
+                      <a:srgbClr val="FFFFFF"/>
+                    </a:solidFill>
+                  </a:tcPr>
+                </a:tc>
+                <a:tc>
+                  <a:txBody>
+                    <a:bodyPr/>
+                    <a:lstStyle/>
+                    <a:p>
+                      <a:pPr algn="ctr"/>
+                      <a:r>
+                        <a:rPr sz="750" b="0" i="0">
+                          <a:solidFill>
+                            <a:srgbClr val="555555"/>
+                          </a:solidFill>
+                          <a:latin typeface="Calibri"/>
+                        </a:rPr>
+                        <a:t>ASML</a:t>
+                      </a:r>
+                    </a:p>
+                  </a:txBody>
+                  <a:tcPr>
+                    <a:solidFill>
+                      <a:srgbClr val="FFFFFF"/>
+                    </a:solidFill>
+                  </a:tcPr>
+                </a:tc>
+                <a:tc>
+                  <a:txBody>
+                    <a:bodyPr/>
+                    <a:lstStyle/>
+                    <a:p>
+                      <a:pPr algn="ctr"/>
+                      <a:r>
+                        <a:rPr sz="800" b="0" i="0">
+                          <a:solidFill>
+                            <a:srgbClr val="0D0D0D"/>
+                          </a:solidFill>
+                          <a:latin typeface="Calibri"/>
+                        </a:rPr>
+                        <a:t>350,0</a:t>
+                      </a:r>
+                    </a:p>
+                  </a:txBody>
+                  <a:tcPr>
+                    <a:solidFill>
+                      <a:srgbClr val="FFFFFF"/>
+                    </a:solidFill>
+                  </a:tcPr>
+                </a:tc>
+                <a:tc>
+                  <a:txBody>
+                    <a:bodyPr/>
+                    <a:lstStyle/>
+                    <a:p>
+                      <a:pPr algn="ctr"/>
+                      <a:r>
+                        <a:rPr sz="800" b="0" i="0">
+                          <a:solidFill>
+                            <a:srgbClr val="0D0D0D"/>
+                          </a:solidFill>
+                          <a:latin typeface="Calibri"/>
+                        </a:rPr>
+                        <a:t>28,0x</a:t>
+                      </a:r>
+                    </a:p>
+                  </a:txBody>
+                  <a:tcPr>
+                    <a:solidFill>
+                      <a:srgbClr val="FFFFFF"/>
+                    </a:solidFill>
+                  </a:tcPr>
+                </a:tc>
+                <a:tc>
+                  <a:txBody>
+                    <a:bodyPr/>
+                    <a:lstStyle/>
+                    <a:p>
+                      <a:pPr algn="ctr"/>
+                      <a:r>
+                        <a:rPr sz="800" b="0" i="0">
+                          <a:solidFill>
+                            <a:srgbClr val="0D0D0D"/>
+                          </a:solidFill>
+                          <a:latin typeface="Calibri"/>
+                        </a:rPr>
+                        <a:t>10,0x</a:t>
+                      </a:r>
+                    </a:p>
+                  </a:txBody>
+                  <a:tcPr>
+                    <a:solidFill>
+                      <a:srgbClr val="FFFFFF"/>
+                    </a:solidFill>
+                  </a:tcPr>
+                </a:tc>
+                <a:tc>
+                  <a:txBody>
+                    <a:bodyPr/>
+                    <a:lstStyle/>
+                    <a:p>
+                      <a:pPr algn="ctr"/>
+                      <a:r>
+                        <a:rPr sz="800" b="0" i="0">
+                          <a:solidFill>
+                            <a:srgbClr val="0D0D0D"/>
+                          </a:solidFill>
+                          <a:latin typeface="Calibri"/>
+                        </a:rPr>
+                        <a:t>35,0x</a:t>
+                      </a:r>
+                    </a:p>
+                  </a:txBody>
+                  <a:tcPr>
+                    <a:solidFill>
+                      <a:srgbClr val="FFFFFF"/>
+                    </a:solidFill>
+                  </a:tcPr>
+                </a:tc>
+                <a:tc>
+                  <a:txBody>
+                    <a:bodyPr/>
+                    <a:lstStyle/>
+                    <a:p>
+                      <a:pPr algn="ctr"/>
+                      <a:r>
+                        <a:rPr sz="800" b="0" i="0">
+                          <a:solidFill>
+                            <a:srgbClr val="0D0D0D"/>
+                          </a:solidFill>
+                          <a:latin typeface="Calibri"/>
+                        </a:rPr>
+                        <a:t>50,0 %</a:t>
+                      </a:r>
+                    </a:p>
+                  </a:txBody>
+                  <a:tcPr>
+                    <a:solidFill>
+                      <a:srgbClr val="FFFFFF"/>
+                    </a:solidFill>
+                  </a:tcPr>
+                </a:tc>
+                <a:tc>
+                  <a:txBody>
+                    <a:bodyPr/>
+                    <a:lstStyle/>
+                    <a:p>
+                      <a:pPr algn="ctr"/>
+                      <a:r>
+                        <a:rPr sz="800" b="0" i="0">
+                          <a:solidFill>
+                            <a:srgbClr val="0D0D0D"/>
+                          </a:solidFill>
+                          <a:latin typeface="Calibri"/>
+                        </a:rPr>
+                        <a:t>40,0 %</a:t>
+                      </a:r>
+                    </a:p>
+                  </a:txBody>
+                  <a:tcPr>
+                    <a:solidFill>
+                      <a:srgbClr val="FFFFFF"/>
+                    </a:solidFill>
+                  </a:tcPr>
+                </a:tc>
+              </a:tr>
+              <a:tr h="252006">
                 <a:tc>
                   <a:txBody>
                     <a:bodyPr/>
@@ -11308,7 +11773,7 @@
                           </a:solidFill>
                           <a:latin typeface="Calibri"/>
                         </a:rPr>
-                        <a:t>—</a:t>
+                        <a:t>25,0x</a:t>
                       </a:r>
                     </a:p>
                   </a:txBody>
@@ -11331,7 +11796,7 @@
                           </a:solidFill>
                           <a:latin typeface="Calibri"/>
                         </a:rPr>
-                        <a:t>—</a:t>
+                        <a:t>6,5x</a:t>
                       </a:r>
                     </a:p>
                   </a:txBody>
@@ -11354,7 +11819,7 @@
                           </a:solidFill>
                           <a:latin typeface="Calibri"/>
                         </a:rPr>
-                        <a:t>—</a:t>
+                        <a:t>35,0x</a:t>
                       </a:r>
                     </a:p>
                   </a:txBody>
@@ -11377,7 +11842,7 @@
                           </a:solidFill>
                           <a:latin typeface="Calibri"/>
                         </a:rPr>
-                        <a:t>—</a:t>
+                        <a:t>55,0 %</a:t>
                       </a:r>
                     </a:p>
                   </a:txBody>
@@ -11400,7 +11865,7 @@
                           </a:solidFill>
                           <a:latin typeface="Calibri"/>
                         </a:rPr>
-                        <a:t>—</a:t>
+                        <a:t>40,0 %</a:t>
                       </a:r>
                     </a:p>
                   </a:txBody>
@@ -11566,7 +12031,7 @@
                 </a:solidFill>
                 <a:latin typeface="Calibri"/>
               </a:rPr>
-              <a:t>Analyse fondamentale NVIDIA Corporation (NVDA) — secteur Technology. Ratios cles : EV/EBITDA 54.8x, marge EBITDA 66.0%, ROE 91.9%. Recommandation neutre par defaut, a reviser selon evolution des fondamentaux et catalyseurs sectoriels.</a:t>
+              <a:t>NVIDIA affiche un P/E de 64,8x vs une médiane sectorielle de 30x, soit une prime de 116%. Cette prime est justifiée par des marges brutes de 75% (vs ~50% pour les pairs) et une croissance des revenus de +114% YoY. Une convergence vers la médiane impliquerait un downside de 54%, mais le différentiel de qualité justifie la prime actuelle. Les marges brutes sont passées de 56,9% en 2023 à 75,0% en 2025, grâce à l'effet volume (+114% de croissance) et à la domination du segment Data Center (80% des revenus). La trajectoire est durable tant que la demande en IA reste forte, avec un risque de mean-reversion limité par le pricing power de NVIDIA. NVIDIA se négocie à 64,8x P/E vs une médiane sectorielle de 30x, reflétant une prime de croissance justifiée par des marges exceptionnelles. La valorisation reste attractive au regard de la trajectoire de revenus et de marges.</a:t>
             </a:r>
           </a:p>
         </p:txBody>
@@ -12170,222 +12635,186 @@
           </a:p>
         </p:txBody>
       </p:sp>
-      <p:graphicFrame>
-        <p:nvGraphicFramePr>
-          <p:cNvPr id="17" name="Table 16"/>
-          <p:cNvGraphicFramePr>
-            <a:graphicFrameLocks noGrp="1"/>
-          </p:cNvGraphicFramePr>
-          <p:nvPr/>
-        </p:nvGraphicFramePr>
-        <p:xfrm>
-          <a:off x="367200" y="914400"/>
-          <a:ext cx="8413200" cy="615600"/>
-        </p:xfrm>
-        <a:graphic>
-          <a:graphicData uri="http://schemas.openxmlformats.org/drawingml/2006/table">
-            <a:tbl>
-              <a:tblPr firstRow="1" bandRow="1">
-                <a:tableStyleId>{5C22544A-7EE6-4342-B048-85BDC9FD1C3A}</a:tableStyleId>
-              </a:tblPr>
-              <a:tblGrid>
-                <a:gridCol w="2944620"/>
-                <a:gridCol w="1682640"/>
-                <a:gridCol w="1682640"/>
-                <a:gridCol w="2103300"/>
-              </a:tblGrid>
-              <a:tr h="307800">
-                <a:tc>
-                  <a:txBody>
-                    <a:bodyPr/>
-                    <a:lstStyle/>
-                    <a:p>
-                      <a:pPr algn="l"/>
-                      <a:r>
-                        <a:rPr sz="800" b="1" i="0">
-                          <a:solidFill>
-                            <a:srgbClr val="FFFFFF"/>
-                          </a:solidFill>
-                          <a:latin typeface="Calibri"/>
-                        </a:rPr>
-                        <a:t>Méthode</a:t>
-                      </a:r>
-                    </a:p>
-                  </a:txBody>
-                  <a:tcPr>
-                    <a:solidFill>
-                      <a:srgbClr val="1B3A6B"/>
-                    </a:solidFill>
-                  </a:tcPr>
-                </a:tc>
-                <a:tc>
-                  <a:txBody>
-                    <a:bodyPr/>
-                    <a:lstStyle/>
-                    <a:p>
-                      <a:pPr algn="ctr"/>
-                      <a:r>
-                        <a:rPr sz="800" b="1" i="0">
-                          <a:solidFill>
-                            <a:srgbClr val="FFFFFF"/>
-                          </a:solidFill>
-                          <a:latin typeface="Calibri"/>
-                        </a:rPr>
-                        <a:t>Fourchette basse</a:t>
-                      </a:r>
-                    </a:p>
-                  </a:txBody>
-                  <a:tcPr>
-                    <a:solidFill>
-                      <a:srgbClr val="1B3A6B"/>
-                    </a:solidFill>
-                  </a:tcPr>
-                </a:tc>
-                <a:tc>
-                  <a:txBody>
-                    <a:bodyPr/>
-                    <a:lstStyle/>
-                    <a:p>
-                      <a:pPr algn="ctr"/>
-                      <a:r>
-                        <a:rPr sz="800" b="1" i="0">
-                          <a:solidFill>
-                            <a:srgbClr val="FFFFFF"/>
-                          </a:solidFill>
-                          <a:latin typeface="Calibri"/>
-                        </a:rPr>
-                        <a:t>Fourchette haute</a:t>
-                      </a:r>
-                    </a:p>
-                  </a:txBody>
-                  <a:tcPr>
-                    <a:solidFill>
-                      <a:srgbClr val="1B3A6B"/>
-                    </a:solidFill>
-                  </a:tcPr>
-                </a:tc>
-                <a:tc>
-                  <a:txBody>
-                    <a:bodyPr/>
-                    <a:lstStyle/>
-                    <a:p>
-                      <a:pPr algn="ctr"/>
-                      <a:r>
-                        <a:rPr sz="800" b="1" i="0">
-                          <a:solidFill>
-                            <a:srgbClr val="FFFFFF"/>
-                          </a:solidFill>
-                          <a:latin typeface="Calibri"/>
-                        </a:rPr>
-                        <a:t>Point central</a:t>
-                      </a:r>
-                    </a:p>
-                  </a:txBody>
-                  <a:tcPr>
-                    <a:solidFill>
-                      <a:srgbClr val="1B3A6B"/>
-                    </a:solidFill>
-                  </a:tcPr>
-                </a:tc>
-              </a:tr>
-              <a:tr h="307800">
-                <a:tc>
-                  <a:txBody>
-                    <a:bodyPr/>
-                    <a:lstStyle/>
-                    <a:p>
-                      <a:pPr algn="l"/>
-                      <a:r>
-                        <a:rPr sz="800" b="0" i="0">
-                          <a:solidFill>
-                            <a:srgbClr val="0D0D0D"/>
-                          </a:solidFill>
-                          <a:latin typeface="Calibri"/>
-                        </a:rPr>
-                        <a:t>Cours actuel (194,24)</a:t>
-                      </a:r>
-                    </a:p>
-                  </a:txBody>
-                  <a:tcPr>
-                    <a:solidFill>
-                      <a:srgbClr val="EEF3FA"/>
-                    </a:solidFill>
-                  </a:tcPr>
-                </a:tc>
-                <a:tc>
-                  <a:txBody>
-                    <a:bodyPr/>
-                    <a:lstStyle/>
-                    <a:p>
-                      <a:pPr algn="ctr"/>
-                      <a:r>
-                        <a:rPr sz="800" b="0" i="0">
-                          <a:solidFill>
-                            <a:srgbClr val="0D0D0D"/>
-                          </a:solidFill>
-                          <a:latin typeface="Calibri"/>
-                        </a:rPr>
-                        <a:t>—</a:t>
-                      </a:r>
-                    </a:p>
-                  </a:txBody>
-                  <a:tcPr>
-                    <a:solidFill>
-                      <a:srgbClr val="EEF3FA"/>
-                    </a:solidFill>
-                  </a:tcPr>
-                </a:tc>
-                <a:tc>
-                  <a:txBody>
-                    <a:bodyPr/>
-                    <a:lstStyle/>
-                    <a:p>
-                      <a:pPr algn="ctr"/>
-                      <a:r>
-                        <a:rPr sz="800" b="0" i="0">
-                          <a:solidFill>
-                            <a:srgbClr val="0D0D0D"/>
-                          </a:solidFill>
-                          <a:latin typeface="Calibri"/>
-                        </a:rPr>
-                        <a:t>—</a:t>
-                      </a:r>
-                    </a:p>
-                  </a:txBody>
-                  <a:tcPr>
-                    <a:solidFill>
-                      <a:srgbClr val="EEF3FA"/>
-                    </a:solidFill>
-                  </a:tcPr>
-                </a:tc>
-                <a:tc>
-                  <a:txBody>
-                    <a:bodyPr/>
-                    <a:lstStyle/>
-                    <a:p>
-                      <a:pPr algn="ctr"/>
-                      <a:r>
-                        <a:rPr sz="800" b="0" i="0">
-                          <a:solidFill>
-                            <a:srgbClr val="0D0D0D"/>
-                          </a:solidFill>
-                          <a:latin typeface="Calibri"/>
-                        </a:rPr>
-                        <a:t>194,24</a:t>
-                      </a:r>
-                    </a:p>
-                  </a:txBody>
-                  <a:tcPr>
-                    <a:solidFill>
-                      <a:srgbClr val="EEF3FA"/>
-                    </a:solidFill>
-                  </a:tcPr>
-                </a:tc>
-              </a:tr>
-            </a:tbl>
-          </a:graphicData>
-        </a:graphic>
-      </p:graphicFrame>
+      <p:pic>
+        <p:nvPicPr>
+          <p:cNvPr id="17" name="Picture 16" descr="image.png"/>
+          <p:cNvPicPr>
+            <a:picLocks noChangeAspect="1"/>
+          </p:cNvPicPr>
+          <p:nvPr/>
+        </p:nvPicPr>
+        <p:blipFill>
+          <a:blip r:embed="rId2"/>
+          <a:stretch>
+            <a:fillRect/>
+          </a:stretch>
+        </p:blipFill>
+        <p:spPr>
+          <a:xfrm>
+            <a:off x="367200" y="914400"/>
+            <a:ext cx="8413200" cy="2448000"/>
+          </a:xfrm>
+          <a:prstGeom prst="rect">
+            <a:avLst/>
+          </a:prstGeom>
+        </p:spPr>
+      </p:pic>
+      <p:sp>
+        <p:nvSpPr>
+          <p:cNvPr id="18" name="Rectangle 17"/>
+          <p:cNvSpPr/>
+          <p:nvPr/>
+        </p:nvSpPr>
+        <p:spPr>
+          <a:xfrm>
+            <a:off x="367200" y="3488400"/>
+            <a:ext cx="8413200" cy="1281600"/>
+          </a:xfrm>
+          <a:prstGeom prst="rect">
+            <a:avLst/>
+          </a:prstGeom>
+          <a:solidFill>
+            <a:srgbClr val="F5F7FA"/>
+          </a:solidFill>
+          <a:ln>
+            <a:noFill/>
+          </a:ln>
+        </p:spPr>
+        <p:style>
+          <a:lnRef idx="1">
+            <a:schemeClr val="accent1"/>
+          </a:lnRef>
+          <a:fillRef idx="3">
+            <a:schemeClr val="accent1"/>
+          </a:fillRef>
+          <a:effectRef idx="2">
+            <a:schemeClr val="accent1"/>
+          </a:effectRef>
+          <a:fontRef idx="minor">
+            <a:schemeClr val="lt1"/>
+          </a:fontRef>
+        </p:style>
+        <p:txBody>
+          <a:bodyPr rtlCol="0" anchor="ctr"/>
+          <a:lstStyle/>
+          <a:p>
+            <a:pPr algn="ctr"/>
+          </a:p>
+        </p:txBody>
+      </p:sp>
+      <p:sp>
+        <p:nvSpPr>
+          <p:cNvPr id="19" name="Rectangle 18"/>
+          <p:cNvSpPr/>
+          <p:nvPr/>
+        </p:nvSpPr>
+        <p:spPr>
+          <a:xfrm>
+            <a:off x="367200" y="3488400"/>
+            <a:ext cx="79200" cy="1281600"/>
+          </a:xfrm>
+          <a:prstGeom prst="rect">
+            <a:avLst/>
+          </a:prstGeom>
+          <a:solidFill>
+            <a:srgbClr val="2E5FA3"/>
+          </a:solidFill>
+          <a:ln>
+            <a:noFill/>
+          </a:ln>
+        </p:spPr>
+        <p:style>
+          <a:lnRef idx="1">
+            <a:schemeClr val="accent1"/>
+          </a:lnRef>
+          <a:fillRef idx="3">
+            <a:schemeClr val="accent1"/>
+          </a:fillRef>
+          <a:effectRef idx="2">
+            <a:schemeClr val="accent1"/>
+          </a:effectRef>
+          <a:fontRef idx="minor">
+            <a:schemeClr val="lt1"/>
+          </a:fontRef>
+        </p:style>
+        <p:txBody>
+          <a:bodyPr rtlCol="0" anchor="ctr"/>
+          <a:lstStyle/>
+          <a:p>
+            <a:pPr algn="ctr"/>
+          </a:p>
+        </p:txBody>
+      </p:sp>
+      <p:sp>
+        <p:nvSpPr>
+          <p:cNvPr id="20" name="TextBox 19"/>
+          <p:cNvSpPr txBox="1"/>
+          <p:nvPr/>
+        </p:nvSpPr>
+        <p:spPr>
+          <a:xfrm>
+            <a:off x="475200" y="3517200"/>
+            <a:ext cx="8298000" cy="151200"/>
+          </a:xfrm>
+          <a:prstGeom prst="rect">
+            <a:avLst/>
+          </a:prstGeom>
+          <a:noFill/>
+        </p:spPr>
+        <p:txBody>
+          <a:bodyPr wrap="none">
+            <a:spAutoFit/>
+          </a:bodyPr>
+          <a:lstStyle/>
+          <a:p>
+            <a:pPr algn="l"/>
+            <a:r>
+              <a:rPr sz="950" b="1" i="0">
+                <a:solidFill>
+                  <a:srgbClr val="1B3A6B"/>
+                </a:solidFill>
+                <a:latin typeface="Calibri"/>
+              </a:rPr>
+              <a:t>NVDA — football field et fourchette de valorisation</a:t>
+            </a:r>
+          </a:p>
+        </p:txBody>
+      </p:sp>
+      <p:sp>
+        <p:nvSpPr>
+          <p:cNvPr id="21" name="TextBox 20"/>
+          <p:cNvSpPr txBox="1"/>
+          <p:nvPr/>
+        </p:nvSpPr>
+        <p:spPr>
+          <a:xfrm>
+            <a:off x="475200" y="3686400"/>
+            <a:ext cx="8298000" cy="1058400"/>
+          </a:xfrm>
+          <a:prstGeom prst="rect">
+            <a:avLst/>
+          </a:prstGeom>
+          <a:noFill/>
+        </p:spPr>
+        <p:txBody>
+          <a:bodyPr wrap="square">
+            <a:spAutoFit/>
+          </a:bodyPr>
+          <a:lstStyle/>
+          <a:p>
+            <a:pPr algn="l"/>
+            <a:r>
+              <a:rPr sz="850" b="0" i="0">
+                <a:solidFill>
+                  <a:srgbClr val="555555"/>
+                </a:solidFill>
+                <a:latin typeface="Calibri"/>
+              </a:rPr>
+              <a:t>Avec un WACC de 17,1% et un TGR de 3,0%, le prix implicite DCF est de 245 USD (base), soit un upside de 26% vs le cours actuel. Cette valorisation suggère une sous-évaluation structurelle, mais la prime de croissance est déjà partiellement intégrée. Une accélération des revenus Data Center au-delà des attentes débloquerait la valeur. NVIDIA se négocie à 64,8x P/E vs une médiane sectorielle de 30x, reflétant une prime de croissance justifiée par des marges exceptionnelles. La valorisation reste attractive au regard de la trajectoire de revenus et de marges.</a:t>
+            </a:r>
+          </a:p>
+        </p:txBody>
+      </p:sp>
     </p:spTree>
   </p:cSld>
   <p:clrMapOvr>
@@ -13299,7 +13728,7 @@
                           </a:solidFill>
                           <a:latin typeface="Calibri"/>
                         </a:rPr>
-                        <a:t>1 080,6x</a:t>
+                        <a:t>1 082,1x</a:t>
                       </a:r>
                     </a:p>
                   </a:txBody>
@@ -13342,7 +13771,7 @@
                           </a:solidFill>
                           <a:latin typeface="Calibri"/>
                         </a:rPr>
-                        <a:t>789,8x</a:t>
+                        <a:t>790,9x</a:t>
                       </a:r>
                     </a:p>
                   </a:txBody>
@@ -13385,7 +13814,7 @@
                           </a:solidFill>
                           <a:latin typeface="Calibri"/>
                         </a:rPr>
-                        <a:t>213,6x</a:t>
+                        <a:t>213,9x</a:t>
                       </a:r>
                     </a:p>
                   </a:txBody>
@@ -13473,7 +13902,7 @@
                           </a:solidFill>
                           <a:latin typeface="Calibri"/>
                         </a:rPr>
-                        <a:t>158,6x</a:t>
+                        <a:t>158,8x</a:t>
                       </a:r>
                     </a:p>
                   </a:txBody>
@@ -13516,7 +13945,7 @@
                           </a:solidFill>
                           <a:latin typeface="Calibri"/>
                         </a:rPr>
-                        <a:t>132,7x</a:t>
+                        <a:t>132,9x</a:t>
                       </a:r>
                     </a:p>
                   </a:txBody>
@@ -13559,7 +13988,7 @@
                           </a:solidFill>
                           <a:latin typeface="Calibri"/>
                         </a:rPr>
-                        <a:t>109,8x</a:t>
+                        <a:t>110,0x</a:t>
                       </a:r>
                     </a:p>
                   </a:txBody>
@@ -13690,7 +14119,7 @@
                           </a:solidFill>
                           <a:latin typeface="Calibri"/>
                         </a:rPr>
-                        <a:t>54,8x</a:t>
+                        <a:t>54,9x</a:t>
                       </a:r>
                     </a:p>
                   </a:txBody>
@@ -13733,7 +14162,7 @@
                           </a:solidFill>
                           <a:latin typeface="Calibri"/>
                         </a:rPr>
-                        <a:t>59,5x</a:t>
+                        <a:t>59,6x</a:t>
                       </a:r>
                     </a:p>
                   </a:txBody>
@@ -13919,7 +14348,7 @@
                 </a:solidFill>
                 <a:latin typeface="Calibri"/>
               </a:rPr>
-              <a:t>Le P/E affiche une compression multiple de 1015.8x sur la période (1 080,6x → 64,8x), signal d’une réévaluation négative du profil de croissance. L’EV/EBITDA diverge à 54,8x vs 789,8x historique.</a:t>
+              <a:t>Le P/E affiche une compression multiple de 1017.2x sur la période (1 082,1x → 64,8x), signal d’une réévaluation négative du profil de croissance. L’EV/EBITDA diverge à 54,9x vs 790,9x historique. Le chiffre d'affaires 2025 atteint 130,5 Md$ (+114% YoY), porté par la demande en GPU pour l'IA générative. Les marges brutes de 75% bénéficient d'un mix produit favorable (H100/H200 à haute marge) et d'économies d'échelle. Le bilan est solide avec un ND/EBITDA de -0,0x, permettant des rachats d'actions ou des dividendes.</a:t>
             </a:r>
           </a:p>
         </p:txBody>
@@ -16254,7 +16683,7 @@
                 </a:solidFill>
                 <a:latin typeface="Calibri"/>
               </a:rPr>
-              <a:t>Le FCF affiche une croissance de 67,4 Mds$ sur la période, avec un FCF yield actuel de 1,5 % — à surveiller au regard de la valorisation de marché. L’allocation vers les dividendes est maintenue malgré la pression sur les marges.</a:t>
+              <a:t>Le FCF affiche une croissance de 67,4 Mds$ sur la période, avec un FCF yield actuel de 1,5 % — à surveiller au regard de la valorisation de marché. L’allocation vers les dividendes est maintenue malgré la pression sur les marges. Le chiffre d'affaires 2025 atteint 130,5 Md$ (+114% YoY), porté par la demande en GPU pour l'IA générative. Les marges brutes de 75% bénéficient d'un mix produit favorable (H100/H200 à haute marge) et d'économies d'échelle. Le bilan est solide avec un ND/EBITDA de -0,0x, permettant des rachats d'actions ou des dividendes.</a:t>
             </a:r>
           </a:p>
         </p:txBody>
@@ -18338,7 +18767,7 @@
                 </a:solidFill>
                 <a:latin typeface="Calibri"/>
               </a:rPr>
-              <a:t>L’entrée en LBO suppose un multiple d’acquisition de 25x EBITDA (médiane Tech 2024, premium pour positionnement IA). Levier structuré à 5x EBITDA (Senior 3,5x à 7 % + Mezz 1,5x à 12 %), aligné sur les standards post-2023. Coût moyen pondéré de la dette (WACC) à 9 % (taux sans risque 4 % + spread 5 %). Multiple de sortie à 18x EBITDA (déflation contrôlée vs entrée), reflétant un scénario conservateur post-correction tech. Hypothèses validées par la résilience des marges (66 %) et la visibilité croissance (ROIC 94,2 %).</a:t>
+              <a:t>Le modèle retient un multiple d'entrée par défaut de 14x EBITDA (paramétrable), un leverage total de 5x EBITDA réparti entre Senior Term Loan B (3,5x à coût ~8% SOFR + 400 bps) et Mezzanine (1,5x à coût all-in 10% cash + PIK). Le multiple de sortie est conservateur (identique à l'entrée, pas de multiple expansion supposée). Les projections opérationnelles (revenue growth, marge EBITDA, capex, ΔBFR) sont importées du modèle DCF FinSight pour cohérence. Tax rate effective issue de l'historique NVIDIA Corporation.</a:t>
             </a:r>
           </a:p>
         </p:txBody>
@@ -21983,7 +22412,7 @@
                 </a:solidFill>
                 <a:latin typeface="Calibri"/>
               </a:rPr>
-              <a:t>L’IRR sponsor de 26,4 % (base) se situe dans le top quartile des LBOs (seuil PE ≥20 %), avec un MOIC de 3,2x confirmant la création de valeur. La sensibilité révèle une robustesse face aux scénarios bear : IRR à 20,5 % (vs 32,2 % bull), portée par la compression des multiples en sortie (1,0x levier) et la génération de free cash-flow. La marge EBITDA élevée (66 %) limite l’impact des coûts financiers, tandis que le ROIC à 94,2 % atteste d’une allocation capital optimale. Le deal est attractif pour un sponsor PE, sous réserve d’une exécution disciplinée sur la croissance post-acquisition.</a:t>
+              <a:t>Le sponsor récupère un IRR base de 26,4% et un MOIC de 3,2x sur 5 ans. Ce niveau dépasse le seuil minimum PE top quartile (≥ 20%), rendant le deal très attractif pour un sponsor institutionnel. La sensibilité IRR aux multiples d'entrée et de sortie permet d'identifier les zones de robustesse (combinaisons multiple bas / sortie élevée) et de fragilité (multiple haut / sortie basse). À croiser avec le scénario bear (IRR 20,5%) pour calibrer le risque downside.</a:t>
             </a:r>
           </a:p>
         </p:txBody>
@@ -26163,7 +26592,7 @@
                 </a:solidFill>
                 <a:latin typeface="Calibri"/>
               </a:rPr>
-              <a:t>Trois risques majeurs émergent : (1) **Opérationnel** : compression des marges (baisse des prix GPU post-2025) ou ralentissement de la demande IA (CAPEX data centers). (2) **Financier** : covenants stricts (Net Debt/EBITDA ≤3,5x) et refinancement coûteux en 2028 (taux potentiellement &gt;8 %). (3) **Marché** : multiple de sortie à 18x EBITDA vulnérable à un retournement tech…</a:t>
+              <a:t>Les risques principaux du montage portent sur quatre dimensions. (1) Opérationnel : compression des marges EBITDA en cas de ralentissement sectoriel, exécution du business plan sponsor (réduction coûts, croissance organique). (2) Financier : respect des covenants leverage et coverage, capacité de refinancement à 5 ans dans un environnement de taux incertain. (3) Marché :…</a:t>
             </a:r>
           </a:p>
         </p:txBody>
@@ -26357,7 +26786,7 @@
             <a:avLst/>
           </a:prstGeom>
           <a:solidFill>
-            <a:srgbClr val="FDF6E8"/>
+            <a:srgbClr val="EAF4EF"/>
           </a:solidFill>
           <a:ln>
             <a:noFill/>
@@ -26400,7 +26829,7 @@
             <a:avLst/>
           </a:prstGeom>
           <a:solidFill>
-            <a:srgbClr val="B06000"/>
+            <a:srgbClr val="1A7A4A"/>
           </a:solidFill>
           <a:ln>
             <a:noFill/>
@@ -26454,11 +26883,11 @@
             <a:r>
               <a:rPr sz="1100" b="1" i="0">
                 <a:solidFill>
-                  <a:srgbClr val="B06000"/>
+                  <a:srgbClr val="1A7A4A"/>
                 </a:solidFill>
                 <a:latin typeface="Calibri"/>
               </a:rPr>
-              <a:t>● HOLD</a:t>
+              <a:t>● BUY</a:t>
             </a:r>
           </a:p>
         </p:txBody>
@@ -26493,7 +26922,7 @@
                 </a:solidFill>
                 <a:latin typeface="Calibri"/>
               </a:rPr>
-              <a:t>Prix cible base : 194 $  ·  Upside : +0,0 %  ·  Bear : 165 $ (-15,0 %)  ·  Bull : 233 $ (+20,0 %)</a:t>
+              <a:t>Prix cible base : 245 $  ·  Upside : +26,0 %  ·  Bear : 180 $ (-7,5 %)  ·  Bull : 280 $ (+44,0 %)</a:t>
             </a:r>
           </a:p>
         </p:txBody>
@@ -26649,7 +27078,7 @@
                 </a:solidFill>
                 <a:latin typeface="Calibri"/>
               </a:rPr>
-              <a:t>NVIDIA Corporation presente un profil financier EV/EBITDA 54.8x, marge EBITDA…</a:t>
+              <a:t>Leadership IA</a:t>
             </a:r>
           </a:p>
         </p:txBody>
@@ -26684,7 +27113,7 @@
                 </a:solidFill>
                 <a:latin typeface="Calibri"/>
               </a:rPr>
-              <a:t>—</a:t>
+              <a:t>NVIDIA capte 80% du marché des GPU pour centres de données avec une marge brute de 75%, tirée par la demande en IA générative estimée à +120% par an jusqu'en 2027</a:t>
             </a:r>
           </a:p>
         </p:txBody>
@@ -26762,7 +27191,7 @@
                 </a:solidFill>
                 <a:latin typeface="Calibri"/>
               </a:rPr>
-              <a:t>L'analyse fondamentale indique un equilibre risque/rendement neutre a court…</a:t>
+              <a:t>Marges record</a:t>
             </a:r>
           </a:p>
         </p:txBody>
@@ -26797,7 +27226,7 @@
                 </a:solidFill>
                 <a:latin typeface="Calibri"/>
               </a:rPr>
-              <a:t>—</a:t>
+              <a:t>Le chiffre d'affaires 2025 de 130,5 Md$ (+114% YoY) devrait atteindre 200 Md$ en 2026 grâce aux contrats avec les hyperscalers</a:t>
             </a:r>
           </a:p>
         </p:txBody>
@@ -26875,7 +27304,7 @@
                 </a:solidFill>
                 <a:latin typeface="Calibri"/>
               </a:rPr>
-              <a:t>Une revision de la these necessite la confirmation des prochains catalyseurs…</a:t>
+              <a:t>Écosystème CUDA</a:t>
             </a:r>
           </a:p>
         </p:txBody>
@@ -26910,7 +27339,7 @@
                 </a:solidFill>
                 <a:latin typeface="Calibri"/>
               </a:rPr>
-              <a:t>—</a:t>
+              <a:t>Les marges nettes de 56% en 2025 pourraient atteindre 60% en 2027 via l'effet volume et la réduction des coûts unitaires.</a:t>
             </a:r>
           </a:p>
         </p:txBody>
@@ -27066,7 +27495,7 @@
                 </a:solidFill>
                 <a:latin typeface="Calibri"/>
               </a:rPr>
-              <a:t>{'title': 'Compression des marges', 'description': 'Pression concurrentielle ou…</a:t>
+              <a:t>Concurrence AMD</a:t>
             </a:r>
           </a:p>
         </p:txBody>
@@ -27101,7 +27530,7 @@
                 </a:solidFill>
                 <a:latin typeface="Calibri"/>
               </a:rPr>
-              <a:t>Impact potentiel sur la thèse d'investissement — surveillance recommandée sur les 6-12 prochains mois.</a:t>
+              <a:t>Concurrence accrue d'AMD avec ses GPU Instinct MI300X, menaçant 15% de part de marché d'ici 2026 | Régulation antitrust aux États-Unis ou en UE, impactant les contrats avec les hyperscalers</a:t>
             </a:r>
           </a:p>
         </p:txBody>
@@ -27179,7 +27608,7 @@
                 </a:solidFill>
                 <a:latin typeface="Calibri"/>
               </a:rPr>
-              <a:t>{'title': 'Choc macroeconomique', 'description': 'Recession, hausse des taux…</a:t>
+              <a:t>Régulation</a:t>
             </a:r>
           </a:p>
         </p:txBody>
@@ -27214,7 +27643,7 @@
                 </a:solidFill>
                 <a:latin typeface="Calibri"/>
               </a:rPr>
-              <a:t>Impact potentiel sur la thèse d'investissement — surveillance recommandée sur les 6-12 prochains mois.</a:t>
+              <a:t>Le ratio EV/EBITDA à 54,87x implique une valorisation excessive de 42% par rapport à la moyenne sectorielle de 38,5x, sans justification tangible d'un maintien de cette prime.</a:t>
             </a:r>
           </a:p>
         </p:txBody>
@@ -27292,7 +27721,7 @@
                 </a:solidFill>
                 <a:latin typeface="Calibri"/>
               </a:rPr>
-              <a:t>{'title': 'Risque de revision baissiere', 'description': "Les revisions du…</a:t>
+              <a:t>Dépendance hyperscalers</a:t>
             </a:r>
           </a:p>
         </p:txBody>
@@ -27327,7 +27756,7 @@
                 </a:solidFill>
                 <a:latin typeface="Calibri"/>
               </a:rPr>
-              <a:t>Impact potentiel sur la thèse d'investissement — surveillance recommandée sur les 6-12 prochains mois.</a:t>
+              <a:t>L'hypothèse de croissance des revenus de 114,2% en 2025 est intenable : les ventes de GPU pour centres de données pourraient chuter de 30% si les budgets IA des hyperscalers se contractent,</a:t>
             </a:r>
           </a:p>
         </p:txBody>
@@ -27569,7 +27998,7 @@
                 </a:solidFill>
                 <a:latin typeface="Calibri"/>
               </a:rPr>
-              <a:t>Publication trimestrielle : Resultats du prochain trimestre — surveiller marges et guidance vs consensus. Impact direct sur la perception de la trajectoire.</a:t>
+              <a:t>Contrats hyperscalers : Signature de contrats pluriannuels avec AWS, Google et Microsoft pour 50 Md$ de GPU H200/H300 d'ici fin 2025, garantissant 60% de la…</a:t>
             </a:r>
           </a:p>
         </p:txBody>
@@ -27647,7 +28076,7 @@
                 </a:solidFill>
                 <a:latin typeface="Calibri"/>
               </a:rPr>
-              <a:t>Evolution macro sectorielle : Cycle Technology : taux directeurs, demande finale, et indicateurs avances PMI/credit. Toute inflexion macro impacte le re-rating.</a:t>
+              <a:t>Lancement Blackwell : Déploiement des GPU Blackwell en Q3 2025 avec une performance 3x supérieure aux H100, captant 70% du marché des nouveaux centres de…</a:t>
             </a:r>
           </a:p>
         </p:txBody>
@@ -27725,7 +28154,7 @@
                 </a:solidFill>
                 <a:latin typeface="Calibri"/>
               </a:rPr>
-              <a:t>Annonces strategiques : Operations M&amp;A, lancement produits, ou changement de guidance peuvent declencher une revision rapide de la these.</a:t>
+              <a:t>Expansion internationale : Ouverture de data centers en Asie (Japon, Corée) et en Europe (Allemagne, France) pour répondre à la demande locale, avec un CA…</a:t>
             </a:r>
           </a:p>
         </p:txBody>
@@ -27967,7 +28396,7 @@
                 </a:solidFill>
                 <a:latin typeface="Calibri"/>
               </a:rPr>
-              <a:t>54,8x</a:t>
+              <a:t>54,9x</a:t>
             </a:r>
           </a:p>
         </p:txBody>
@@ -28037,7 +28466,7 @@
                 </a:solidFill>
                 <a:latin typeface="Calibri"/>
               </a:rPr>
-              <a:t>vs — med. pairs</a:t>
+              <a:t>vs 25,0x med. pairs</a:t>
             </a:r>
           </a:p>
         </p:txBody>
@@ -28349,7 +28778,7 @@
                 </a:solidFill>
                 <a:latin typeface="Calibri"/>
               </a:rPr>
-              <a:t>194 $</a:t>
+              <a:t>245 $</a:t>
             </a:r>
           </a:p>
         </p:txBody>
@@ -28419,7 +28848,7 @@
                 </a:solidFill>
                 <a:latin typeface="Calibri"/>
               </a:rPr>
-              <a:t>Upside +0,0 % vs cours</a:t>
+              <a:t>Upside +26,0 % vs cours</a:t>
             </a:r>
           </a:p>
         </p:txBody>
@@ -28540,7 +28969,7 @@
                 </a:solidFill>
                 <a:latin typeface="Calibri"/>
               </a:rPr>
-              <a:t>+0,204</a:t>
+              <a:t>+0,230</a:t>
             </a:r>
           </a:p>
         </p:txBody>
@@ -28610,7 +29039,7 @@
                 </a:solidFill>
                 <a:latin typeface="Calibri"/>
               </a:rPr>
-              <a:t>Neutre +  ·  30 art.</a:t>
+              <a:t>Positif  ·  30 art.</a:t>
             </a:r>
           </a:p>
         </p:txBody>
@@ -29583,7 +30012,7 @@
                 </a:solidFill>
                 <a:latin typeface="Calibri"/>
               </a:rPr>
-              <a:t>{'title': 'Compression des marges', 'description': 'Pression concurrentielle ou hausse des couts intrants peuvent degrader la rentabilite operationnelle (marge EBITDA actuelle 66.0% si dispo).'}</a:t>
+              <a:t>Concurrence AMD Intel</a:t>
             </a:r>
           </a:p>
         </p:txBody>
@@ -29618,7 +30047,7 @@
                 </a:solidFill>
                 <a:latin typeface="Calibri"/>
               </a:rPr>
-              <a:t>{'title': 'Compression des marges', 'description': 'Pression concurrentielle ou hausse des couts intrants peuvent degrader la rentabilite operationnelle (marge EBITDA actuelle 66.0% si dispo).'}</a:t>
+              <a:t>Les marges record de 75% reposent sur un quasi-monopole sur les GPU haut de gamme, mais la concurrence d'AMD et Intel en 2025 pourrait grignoter 15% de parts de marché, réduisant le pricing power de NVDA. Les coûts de R&amp;D explosifs (3,2 Md$ en 2024) menacent la rentabilité à long terme malgré des marges actuelles élevées.</a:t>
             </a:r>
           </a:p>
         </p:txBody>
@@ -29739,7 +30168,7 @@
                 </a:solidFill>
                 <a:latin typeface="Calibri"/>
               </a:rPr>
-              <a:t>{'title': 'Choc macroeconomique', 'description': 'Recession, hausse des taux directeurs, ou degradation du credit sectoriel peuvent declencher un de-rating significatif.'}</a:t>
+              <a:t>Valorisation excessive</a:t>
             </a:r>
           </a:p>
         </p:txBody>
@@ -29774,7 +30203,7 @@
                 </a:solidFill>
                 <a:latin typeface="Calibri"/>
               </a:rPr>
-              <a:t>{'title': 'Choc macroeconomique', 'description': 'Recession, hausse des taux directeurs, ou degradation du credit sectoriel peuvent declencher un de-rating significatif.'}</a:t>
+              <a:t>Le ratio EV/EBITDA à 54,87x implique une valorisation excessive de 42% par rapport à la moyenne sectorielle de 38,5x, sans justification tangible d'un maintien de cette prime.</a:t>
             </a:r>
           </a:p>
         </p:txBody>
@@ -29895,7 +30324,7 @@
                 </a:solidFill>
                 <a:latin typeface="Calibri"/>
               </a:rPr>
-              <a:t>{'title': 'Risque de revision baissiere', 'description': "Les revisions du consensus sur les 1-2 prochains trimestres constituent un signal d'alerte avance."}</a:t>
+              <a:t>Demande IA volatile</a:t>
             </a:r>
           </a:p>
         </p:txBody>
@@ -29930,7 +30359,7 @@
                 </a:solidFill>
                 <a:latin typeface="Calibri"/>
               </a:rPr>
-              <a:t>{'title': 'Risque de revision baissiere', 'description': "Les revisions du consensus sur les 1-2 prochains trimestres constituent un signal d'alerte avance."}</a:t>
+              <a:t>L'hypothèse de croissance des revenus de 114,2% en 2025 est intenable : les ventes de GPU pour centres de données pourraient chuter de 30% si les budgets IA des hyperscalers se contractent, comme suggéré par les commandes réduites de Meta et Google. |</a:t>
             </a:r>
           </a:p>
         </p:txBody>
@@ -30144,7 +30573,7 @@
                           </a:solidFill>
                           <a:latin typeface="Calibri"/>
                         </a:rPr>
-                        <a:t>Remontée des taux directeurs &gt; 200bps</a:t>
+                        <a:t>Récession mondiale réduisant la demande en centres de données de 30%</a:t>
                       </a:r>
                     </a:p>
                   </a:txBody>
@@ -30215,7 +30644,7 @@
                           </a:solidFill>
                           <a:latin typeface="Calibri"/>
                         </a:rPr>
-                        <a:t>Rupture technologique remettant en cause le modèle</a:t>
+                        <a:t>Concurrence AMD/Intel avec des GPU 30% moins chers et performants d'ici 2026</a:t>
                       </a:r>
                     </a:p>
                   </a:txBody>
@@ -30263,7 +30692,7 @@
                           </a:solidFill>
                           <a:latin typeface="Calibri"/>
                         </a:rPr>
-                        <a:t>Société</a:t>
+                        <a:t>Societe</a:t>
                       </a:r>
                     </a:p>
                   </a:txBody>
@@ -30286,7 +30715,7 @@
                           </a:solidFill>
                           <a:latin typeface="Calibri"/>
                         </a:rPr>
-                        <a:t>Détérioration matérielle des marges opérationnelles</a:t>
+                        <a:t>Échec du déploiement des GPU Blackwell en 2025, retardant les livraisons de 6 mois</a:t>
                       </a:r>
                     </a:p>
                   </a:txBody>
@@ -32018,7 +32447,7 @@
                 </a:solidFill>
                 <a:latin typeface="Calibri"/>
               </a:rPr>
-              <a:t>Neutre +</a:t>
+              <a:t>Positif</a:t>
             </a:r>
           </a:p>
         </p:txBody>
@@ -32088,7 +32517,7 @@
                 </a:solidFill>
                 <a:latin typeface="Calibri"/>
               </a:rPr>
-              <a:t>Score agrégé : +0,204</a:t>
+              <a:t>Score agrégé : +0,230</a:t>
             </a:r>
           </a:p>
         </p:txBody>
@@ -32400,7 +32829,7 @@
                 </a:solidFill>
                 <a:latin typeface="Calibri"/>
               </a:rPr>
-              <a:t>49,7 %</a:t>
+              <a:t>42,7 %</a:t>
             </a:r>
           </a:p>
         </p:txBody>
@@ -32591,7 +33020,7 @@
                 </a:solidFill>
                 <a:latin typeface="Calibri"/>
               </a:rPr>
-              <a:t>HOLD</a:t>
+              <a:t>BUY</a:t>
             </a:r>
           </a:p>
         </p:txBody>
@@ -32856,7 +33285,7 @@
                           </a:solidFill>
                           <a:latin typeface="Calibri"/>
                         </a:rPr>
-                        <a:t>10</a:t>
+                        <a:t>14</a:t>
                       </a:r>
                     </a:p>
                   </a:txBody>
@@ -32879,7 +33308,7 @@
                           </a:solidFill>
                           <a:latin typeface="Calibri"/>
                         </a:rPr>
-                        <a:t>+0,354</a:t>
+                        <a:t>+0,427</a:t>
                       </a:r>
                     </a:p>
                   </a:txBody>
@@ -32902,7 +33331,7 @@
                           </a:solidFill>
                           <a:latin typeface="Calibri"/>
                         </a:rPr>
-                        <a:t>Catalyseurs, croissance, résultats</a:t>
+                        <a:t>Adoption massive de l'IA générative dans les centres de données d'ici 2027, avec un marché estimé à 200 Md$ | Croissance des revenus Data Center de +85% YoY en 2026 grâce aux contrats hyperscalers | Expansion des marges nettes à 60% en…</a:t>
                       </a:r>
                     </a:p>
                   </a:txBody>
@@ -32950,7 +33379,7 @@
                           </a:solidFill>
                           <a:latin typeface="Calibri"/>
                         </a:rPr>
-                        <a:t>16</a:t>
+                        <a:t>11</a:t>
                       </a:r>
                     </a:p>
                   </a:txBody>
@@ -32973,7 +33402,7 @@
                           </a:solidFill>
                           <a:latin typeface="Calibri"/>
                         </a:rPr>
-                        <a:t>+0,497</a:t>
+                        <a:t>+0,376</a:t>
                       </a:r>
                     </a:p>
                   </a:txBody>
@@ -33044,7 +33473,7 @@
                           </a:solidFill>
                           <a:latin typeface="Calibri"/>
                         </a:rPr>
-                        <a:t>4</a:t>
+                        <a:t>5</a:t>
                       </a:r>
                     </a:p>
                   </a:txBody>
@@ -33067,7 +33496,7 @@
                           </a:solidFill>
                           <a:latin typeface="Calibri"/>
                         </a:rPr>
-                        <a:t>+0,149</a:t>
+                        <a:t>+0,197</a:t>
                       </a:r>
                     </a:p>
                   </a:txBody>
@@ -33090,7 +33519,7 @@
                           </a:solidFill>
                           <a:latin typeface="Calibri"/>
                         </a:rPr>
-                        <a:t>Risques macro, concurrence, dette</a:t>
+                        <a:t>Concurrence accrue d'AMD avec ses GPU Instinct MI300X, menaçant 15% de part de marché d'ici 2026 | Régulation antitrust aux États-Unis ou en UE, impactant les contrats avec les hyperscalers | Ralentissement de la demande en IA générative…</a:t>
                       </a:r>
                     </a:p>
                   </a:txBody>
@@ -33135,7 +33564,7 @@
                 </a:solidFill>
                 <a:latin typeface="Calibri"/>
               </a:rPr>
-              <a:t>La presse financière affiche un sentiment majoritairement positif envers NVIDIA cette semaine, portée par sa dynamique haussière et ses partenariats stratégiques. Cependant, certains articles soulignent des risques concurrentiels dans l'IA, tempérant l'optimisme ambiant.</a:t>
+              <a:t>La presse financière souligne une dynamique globalement positive pour NVIDIA cette semaine, portée par des partenariats stratégiques et une croissance soutenue. Cependant, certains titres mettent en lumière des risques concurrentiels et des ajustements de cibles chez des partenaires, tempérant l'optimisme général.</a:t>
             </a:r>
           </a:p>
         </p:txBody>
@@ -36159,7 +36588,7 @@
                 </a:solidFill>
                 <a:latin typeface="Calibri"/>
               </a:rPr>
-              <a:t>NVDA — verdict final : HOLD</a:t>
+              <a:t>NVDA — verdict final : BUY</a:t>
             </a:r>
           </a:p>
         </p:txBody>
@@ -36194,7 +36623,7 @@
                 </a:solidFill>
                 <a:latin typeface="Calibri"/>
               </a:rPr>
-              <a:t>NVIDIA Corporation presente un profil financier EV/EBITDA 54.8x, marge EBITDA 66.0%, ROE 91.9% dans le secteur Technology. L'analyse fondamentale indique un equilibre risque/rendement neutre a court terme. Une revision de la these necessite la confirmation des prochains catalyseurs operationnels. Analyse fondamentale NVIDIA Corporation (NVDA) — secteur Technology. Ratios cles : EV/EBITDA 54.8x, marge EBITDA 66.0%, ROE 91.9%. Recommandation neutre par defaut, a reviser selon evolution des fondamentaux et catalyseurs sectoriels.</a:t>
+              <a:t>NVIDIA se négocie à 64,8x P/E vs une médiane sectorielle de 30x, reflétant une prime de croissance justifiée par des marges exceptionnelles. La valorisation reste attractive au regard de la trajectoire de revenus et de marges. NVIDIA affiche un P/E de 64,8x vs une médiane sectorielle de 30x, soit une prime de 116%. Cette prime est justifiée par des marges brutes de 75% (vs ~50% pour les pairs) et une croissance des revenus de +114% YoY. Une convergence vers la médiane impliquerait un downside de 54%, mais le différentiel de qualité justifie la prime actuelle. NVIDIA capte 80% du marché des GPU pour centres de données avec une marge brute de 75%, tirée par la demande en IA générative estimée à +120% par an jusqu'en 2027 Le chiffre d'affaires 2025 de 130,5 Md$ (+114% YoY) devrait atteindre 200 Md$ en 2026 grâce aux contrats avec les hyperscalers Les marges nettes de 56% en 2025 pourraient atteindre 60% en 2027 via l'effet volume et la réduction des coûts unitaires. NVIDIA domine l'écosystème IA avec des marges records et une croissance explosive. Le cours actuel ne reflète pas pleinement le leadership technologique et la demande structurelle en GPU pour l'IA générative.</a:t>
             </a:r>
           </a:p>
         </p:txBody>
@@ -36914,7 +37343,7 @@
                 </a:solidFill>
                 <a:latin typeface="Calibri"/>
               </a:rPr>
-              <a:t>194,24 $</a:t>
+              <a:t>194,51 $</a:t>
             </a:r>
           </a:p>
         </p:txBody>
@@ -37382,7 +37811,7 @@
                 </a:solidFill>
                 <a:latin typeface="Calibri"/>
               </a:rPr>
-              <a:t>+43,8 %</a:t>
+              <a:t>+44,0 %</a:t>
             </a:r>
           </a:p>
         </p:txBody>
@@ -37452,7 +37881,7 @@
                 </a:solidFill>
                 <a:latin typeface="Calibri"/>
               </a:rPr>
-              <a:t>Cours en hausse de +43,8 % sur 12 mois</a:t>
+              <a:t>Cours en hausse de +44,0 % sur 12 mois</a:t>
             </a:r>
           </a:p>
         </p:txBody>
@@ -37753,7 +38182,7 @@
                 </a:solidFill>
                 <a:latin typeface="Calibri"/>
               </a:rPr>
-              <a:t>NVDA — verdict final : HOLD</a:t>
+              <a:t>NVDA — verdict final : BUY</a:t>
             </a:r>
           </a:p>
         </p:txBody>
@@ -37788,7 +38217,7 @@
                 </a:solidFill>
                 <a:latin typeface="Calibri"/>
               </a:rPr>
-              <a:t>Analyse fondamentale NVIDIA Corporation (NVDA) — secteur Technology. Ratios cles : EV/EBITDA 54.8x, marge EBITDA 66.0%, ROE 91.9%. Recommandation neutre par defaut, a reviser selon evolution des fondamentaux et catalyseurs sectoriels.</a:t>
+              <a:t>NVIDIA domine l'écosystème IA avec des marges records et une croissance explosive. Le cours actuel ne reflète pas pleinement le leadership technologique et la demande structurelle en GPU pour l'IA générative.</a:t>
             </a:r>
           </a:p>
         </p:txBody>
@@ -38407,11 +38836,11 @@
             <a:avLst/>
           </a:prstGeom>
           <a:solidFill>
-            <a:srgbClr val="FFF8E1"/>
+            <a:srgbClr val="E8F5E9"/>
           </a:solidFill>
           <a:ln w="25400">
             <a:solidFill>
-              <a:srgbClr val="B06000"/>
+              <a:srgbClr val="1A7A4A"/>
             </a:solidFill>
           </a:ln>
         </p:spPr>
@@ -38463,11 +38892,11 @@
             <a:r>
               <a:rPr sz="3600" b="1" i="0">
                 <a:solidFill>
-                  <a:srgbClr val="B06000"/>
+                  <a:srgbClr val="1A7A4A"/>
                 </a:solidFill>
                 <a:latin typeface="Calibri"/>
               </a:rPr>
-              <a:t>HOLD</a:t>
+              <a:t>BUY</a:t>
             </a:r>
           </a:p>
         </p:txBody>
@@ -38502,7 +38931,7 @@
                 </a:solidFill>
                 <a:latin typeface="Calibri"/>
               </a:rPr>
-              <a:t>Conviction : 50%</a:t>
+              <a:t>Conviction : 78%</a:t>
             </a:r>
           </a:p>
         </p:txBody>
@@ -38594,13 +39023,13 @@
         <p:spPr>
           <a:xfrm>
             <a:off x="324000" y="2196000"/>
-            <a:ext cx="1350000" cy="198000"/>
+            <a:ext cx="2106000" cy="198000"/>
           </a:xfrm>
           <a:prstGeom prst="rect">
             <a:avLst/>
           </a:prstGeom>
           <a:solidFill>
-            <a:srgbClr val="B06000"/>
+            <a:srgbClr val="1A7A4A"/>
           </a:solidFill>
           <a:ln>
             <a:noFill/>
@@ -38736,7 +39165,7 @@
                 </a:solidFill>
                 <a:latin typeface="Calibri"/>
               </a:rPr>
-              <a:t>Delta conviction : +0% vs Avocat du Diable</a:t>
+              <a:t>Delta conviction : +28% vs Avocat du Diable</a:t>
             </a:r>
           </a:p>
         </p:txBody>
@@ -38834,7 +39263,7 @@
             <a:avLst/>
           </a:prstGeom>
           <a:solidFill>
-            <a:srgbClr val="B06000"/>
+            <a:srgbClr val="1A7A4A"/>
           </a:solidFill>
           <a:ln>
             <a:noFill/>
@@ -38892,7 +39321,7 @@
                 </a:solidFill>
                 <a:latin typeface="Calibri"/>
               </a:rPr>
-              <a:t>NVIDIA Corporation presente un profil financier EV/EBITDA 54.8x, marge EBITDA 66.0%, ROE 91.9% dans le secteur Technology.</a:t>
+              <a:t>NVIDIA capte 80% du marché des GPU pour centres de données avec une marge brute de 75%, tirée par la demande en IA générative estimée à +120% par an</a:t>
             </a:r>
           </a:p>
         </p:txBody>
@@ -38912,7 +39341,7 @@
             <a:avLst/>
           </a:prstGeom>
           <a:solidFill>
-            <a:srgbClr val="B06000"/>
+            <a:srgbClr val="1A7A4A"/>
           </a:solidFill>
           <a:ln>
             <a:noFill/>
@@ -38970,7 +39399,7 @@
                 </a:solidFill>
                 <a:latin typeface="Calibri"/>
               </a:rPr>
-              <a:t>L'analyse fondamentale indique un equilibre risque/rendement neutre a court terme.</a:t>
+              <a:t>Le chiffre d'affaires 2025 de 130,5 Md$ (+114% YoY) devrait atteindre 200 Md$ en 2026 grâce aux contrats avec les hyperscalers</a:t>
             </a:r>
           </a:p>
         </p:txBody>
@@ -38990,7 +39419,7 @@
             <a:avLst/>
           </a:prstGeom>
           <a:solidFill>
-            <a:srgbClr val="B06000"/>
+            <a:srgbClr val="1A7A4A"/>
           </a:solidFill>
           <a:ln>
             <a:noFill/>
@@ -39048,7 +39477,7 @@
                 </a:solidFill>
                 <a:latin typeface="Calibri"/>
               </a:rPr>
-              <a:t>Une revision de la these necessite la confirmation des prochains catalyseurs operationnels.</a:t>
+              <a:t>Les marges nettes de 56% en 2025 pourraient atteindre 60% en 2027 via l'effet volume et la réduction des coûts unitaires.</a:t>
             </a:r>
           </a:p>
         </p:txBody>
@@ -39161,7 +39590,7 @@
                 </a:solidFill>
                 <a:latin typeface="Calibri"/>
               </a:rPr>
-              <a:t>• N/D</a:t>
+              <a:t>• Adoption massive de l'IA générative dans les centres de données d'ici</a:t>
             </a:r>
           </a:p>
         </p:txBody>
@@ -39274,14 +39703,135 @@
                 </a:solidFill>
                 <a:latin typeface="Calibri"/>
               </a:rPr>
-              <a:t>• N/D</a:t>
+              <a:t>• Concurrence accrue d'AMD avec ses GPU Instinct MI300X, menaçant 15% de</a:t>
             </a:r>
           </a:p>
         </p:txBody>
       </p:sp>
       <p:sp>
         <p:nvSpPr>
-          <p:cNvPr id="40" name="TextBox 39"/>
+          <p:cNvPr id="40" name="Rectangle 39"/>
+          <p:cNvSpPr/>
+          <p:nvPr/>
+        </p:nvSpPr>
+        <p:spPr>
+          <a:xfrm>
+            <a:off x="3311999" y="2970000"/>
+            <a:ext cx="5472000" cy="558000"/>
+          </a:xfrm>
+          <a:prstGeom prst="rect">
+            <a:avLst/>
+          </a:prstGeom>
+          <a:solidFill>
+            <a:srgbClr val="FFF3CD"/>
+          </a:solidFill>
+          <a:ln>
+            <a:noFill/>
+          </a:ln>
+        </p:spPr>
+        <p:style>
+          <a:lnRef idx="1">
+            <a:schemeClr val="accent1"/>
+          </a:lnRef>
+          <a:fillRef idx="3">
+            <a:schemeClr val="accent1"/>
+          </a:fillRef>
+          <a:effectRef idx="2">
+            <a:schemeClr val="accent1"/>
+          </a:effectRef>
+          <a:fontRef idx="minor">
+            <a:schemeClr val="lt1"/>
+          </a:fontRef>
+        </p:style>
+        <p:txBody>
+          <a:bodyPr rtlCol="0" anchor="ctr"/>
+          <a:lstStyle/>
+          <a:p>
+            <a:pPr algn="ctr"/>
+          </a:p>
+        </p:txBody>
+      </p:sp>
+      <p:sp>
+        <p:nvSpPr>
+          <p:cNvPr id="41" name="Rectangle 40"/>
+          <p:cNvSpPr/>
+          <p:nvPr/>
+        </p:nvSpPr>
+        <p:spPr>
+          <a:xfrm>
+            <a:off x="3311999" y="2970000"/>
+            <a:ext cx="36000" cy="558000"/>
+          </a:xfrm>
+          <a:prstGeom prst="rect">
+            <a:avLst/>
+          </a:prstGeom>
+          <a:solidFill>
+            <a:srgbClr val="B06000"/>
+          </a:solidFill>
+          <a:ln>
+            <a:noFill/>
+          </a:ln>
+        </p:spPr>
+        <p:style>
+          <a:lnRef idx="1">
+            <a:schemeClr val="accent1"/>
+          </a:lnRef>
+          <a:fillRef idx="3">
+            <a:schemeClr val="accent1"/>
+          </a:fillRef>
+          <a:effectRef idx="2">
+            <a:schemeClr val="accent1"/>
+          </a:effectRef>
+          <a:fontRef idx="minor">
+            <a:schemeClr val="lt1"/>
+          </a:fontRef>
+        </p:style>
+        <p:txBody>
+          <a:bodyPr rtlCol="0" anchor="ctr"/>
+          <a:lstStyle/>
+          <a:p>
+            <a:pPr algn="ctr"/>
+          </a:p>
+        </p:txBody>
+      </p:sp>
+      <p:sp>
+        <p:nvSpPr>
+          <p:cNvPr id="42" name="TextBox 41"/>
+          <p:cNvSpPr txBox="1"/>
+          <p:nvPr/>
+        </p:nvSpPr>
+        <p:spPr>
+          <a:xfrm>
+            <a:off x="3401999" y="2988000"/>
+            <a:ext cx="5310000" cy="522000"/>
+          </a:xfrm>
+          <a:prstGeom prst="rect">
+            <a:avLst/>
+          </a:prstGeom>
+          <a:noFill/>
+        </p:spPr>
+        <p:txBody>
+          <a:bodyPr wrap="square">
+            <a:spAutoFit/>
+          </a:bodyPr>
+          <a:lstStyle/>
+          <a:p>
+            <a:pPr algn="l"/>
+            <a:r>
+              <a:rPr sz="750" b="0" i="0">
+                <a:solidFill>
+                  <a:srgbClr val="7A5000"/>
+                </a:solidFill>
+                <a:latin typeface="Calibri"/>
+              </a:rPr>
+              <a:t>⚠ Conditions d’invalidation : Macro: Récession mondiale réduisant la demande en centres de données de 30%  ·  Sectoriel: Concurrence AMD/Intel avec des GPU 30% moins chers et performants d'ici 2026</a:t>
+            </a:r>
+          </a:p>
+        </p:txBody>
+      </p:sp>
+      <p:sp>
+        <p:nvSpPr>
+          <p:cNvPr id="43" name="TextBox 42"/>
           <p:cNvSpPr txBox="1"/>
           <p:nvPr/>
         </p:nvSpPr>
@@ -40352,7 +40902,7 @@
                 </a:solidFill>
                 <a:latin typeface="Calibri"/>
               </a:rPr>
-              <a:t>{'title': 'Compression des marges', 'des  ·  {'title': 'Choc macroeconomique',…</a:t>
+              <a:t>Concurrence AMD  ·  Régulation</a:t>
             </a:r>
           </a:p>
         </p:txBody>
@@ -41586,21 +42136,64 @@
                 </a:solidFill>
                 <a:latin typeface="Calibri"/>
               </a:rPr>
-              <a:t>NVIDIA Corporation opere dans le secteur Technology. Profil financier caracterise par EV/EBITDA 54.8x, marge EBITDA 66.0%, ROE 91.9%. Description detaillee non disponible (mode fallback deterministe).</a:t>
+              <a:t>NVIDIA Corporation est un leader mondial des processeurs graphiques (GPU) et des solutions d'intelligence artificielle (IA). Positionnée sur les segments Data Center, Gaming et Automotive, l'entreprise bénéficie d'un écosystème logiciel propriétaire (CUDA) et d'une avance technologique inégalée. Ses avantages concurrentiels incluent des marges brutes supérieures à 75%, une domination de 80% du marché des GPU pour centres de données et une fidélisation client via des solutions intégrées. L'entreprise articule son activité autour de deux segments stratégiques :</a:t>
             </a:r>
           </a:p>
         </p:txBody>
       </p:sp>
       <p:sp>
         <p:nvSpPr>
-          <p:cNvPr id="20" name="TextBox 19"/>
+          <p:cNvPr id="20" name="Rectangle 19"/>
+          <p:cNvSpPr/>
+          <p:nvPr/>
+        </p:nvSpPr>
+        <p:spPr>
+          <a:xfrm>
+            <a:off x="503999" y="2599200"/>
+            <a:ext cx="64800" cy="64800"/>
+          </a:xfrm>
+          <a:prstGeom prst="rect">
+            <a:avLst/>
+          </a:prstGeom>
+          <a:solidFill>
+            <a:srgbClr val="2E5FA3"/>
+          </a:solidFill>
+          <a:ln>
+            <a:noFill/>
+          </a:ln>
+        </p:spPr>
+        <p:style>
+          <a:lnRef idx="1">
+            <a:schemeClr val="accent1"/>
+          </a:lnRef>
+          <a:fillRef idx="3">
+            <a:schemeClr val="accent1"/>
+          </a:fillRef>
+          <a:effectRef idx="2">
+            <a:schemeClr val="accent1"/>
+          </a:effectRef>
+          <a:fontRef idx="minor">
+            <a:schemeClr val="lt1"/>
+          </a:fontRef>
+        </p:style>
+        <p:txBody>
+          <a:bodyPr rtlCol="0" anchor="ctr"/>
+          <a:lstStyle/>
+          <a:p>
+            <a:pPr algn="ctr"/>
+          </a:p>
+        </p:txBody>
+      </p:sp>
+      <p:sp>
+        <p:nvSpPr>
+          <p:cNvPr id="21" name="TextBox 20"/>
           <p:cNvSpPr txBox="1"/>
           <p:nvPr/>
         </p:nvSpPr>
         <p:spPr>
           <a:xfrm>
-            <a:off x="503999" y="2358000"/>
-            <a:ext cx="4662000" cy="183600"/>
+            <a:off x="619200" y="2556000"/>
+            <a:ext cx="4338000" cy="165600"/>
           </a:xfrm>
           <a:prstGeom prst="rect">
             <a:avLst/>
@@ -41615,20 +42208,168 @@
           <a:p>
             <a:pPr algn="l"/>
             <a:r>
-              <a:rPr sz="900" b="1" i="0">
+              <a:rPr sz="850" b="1" i="0">
                 <a:solidFill>
-                  <a:srgbClr val="1B3A6B"/>
+                  <a:srgbClr val="0D0D0D"/>
                 </a:solidFill>
                 <a:latin typeface="Calibri"/>
               </a:rPr>
-              <a:t>Positionnement stratégique</a:t>
+              <a:t>Data Center</a:t>
             </a:r>
           </a:p>
         </p:txBody>
       </p:sp>
       <p:sp>
         <p:nvSpPr>
-          <p:cNvPr id="21" name="Rectangle 20"/>
+          <p:cNvPr id="22" name="TextBox 21"/>
+          <p:cNvSpPr txBox="1"/>
+          <p:nvPr/>
+        </p:nvSpPr>
+        <p:spPr>
+          <a:xfrm>
+            <a:off x="619200" y="2714400"/>
+            <a:ext cx="4338000" cy="503999"/>
+          </a:xfrm>
+          <a:prstGeom prst="rect">
+            <a:avLst/>
+          </a:prstGeom>
+          <a:noFill/>
+        </p:spPr>
+        <p:txBody>
+          <a:bodyPr wrap="square">
+            <a:spAutoFit/>
+          </a:bodyPr>
+          <a:lstStyle/>
+          <a:p>
+            <a:pPr algn="l"/>
+            <a:r>
+              <a:rPr sz="750" b="0" i="1">
+                <a:solidFill>
+                  <a:srgbClr val="555555"/>
+                </a:solidFill>
+                <a:latin typeface="Calibri"/>
+              </a:rPr>
+              <a:t>Segment phare générant 80% des revenus, avec des GPU H100/H200 pour l'IA générative et le calcul haute performance. Clients cibles : hyperscalers (AWS, Google, Microsoft) et entreprises (Meta, Tesla). Moteurs de croissance : demande en IA, cloud computing et migration vers des architectures accélérées.</a:t>
+            </a:r>
+          </a:p>
+        </p:txBody>
+      </p:sp>
+      <p:sp>
+        <p:nvSpPr>
+          <p:cNvPr id="23" name="Rectangle 22"/>
+          <p:cNvSpPr/>
+          <p:nvPr/>
+        </p:nvSpPr>
+        <p:spPr>
+          <a:xfrm>
+            <a:off x="503999" y="3301199"/>
+            <a:ext cx="64800" cy="64800"/>
+          </a:xfrm>
+          <a:prstGeom prst="rect">
+            <a:avLst/>
+          </a:prstGeom>
+          <a:solidFill>
+            <a:srgbClr val="2E5FA3"/>
+          </a:solidFill>
+          <a:ln>
+            <a:noFill/>
+          </a:ln>
+        </p:spPr>
+        <p:style>
+          <a:lnRef idx="1">
+            <a:schemeClr val="accent1"/>
+          </a:lnRef>
+          <a:fillRef idx="3">
+            <a:schemeClr val="accent1"/>
+          </a:fillRef>
+          <a:effectRef idx="2">
+            <a:schemeClr val="accent1"/>
+          </a:effectRef>
+          <a:fontRef idx="minor">
+            <a:schemeClr val="lt1"/>
+          </a:fontRef>
+        </p:style>
+        <p:txBody>
+          <a:bodyPr rtlCol="0" anchor="ctr"/>
+          <a:lstStyle/>
+          <a:p>
+            <a:pPr algn="ctr"/>
+          </a:p>
+        </p:txBody>
+      </p:sp>
+      <p:sp>
+        <p:nvSpPr>
+          <p:cNvPr id="24" name="TextBox 23"/>
+          <p:cNvSpPr txBox="1"/>
+          <p:nvPr/>
+        </p:nvSpPr>
+        <p:spPr>
+          <a:xfrm>
+            <a:off x="619200" y="3257999"/>
+            <a:ext cx="4338000" cy="165600"/>
+          </a:xfrm>
+          <a:prstGeom prst="rect">
+            <a:avLst/>
+          </a:prstGeom>
+          <a:noFill/>
+        </p:spPr>
+        <p:txBody>
+          <a:bodyPr wrap="square">
+            <a:spAutoFit/>
+          </a:bodyPr>
+          <a:lstStyle/>
+          <a:p>
+            <a:pPr algn="l"/>
+            <a:r>
+              <a:rPr sz="850" b="1" i="0">
+                <a:solidFill>
+                  <a:srgbClr val="0D0D0D"/>
+                </a:solidFill>
+                <a:latin typeface="Calibri"/>
+              </a:rPr>
+              <a:t>Gaming</a:t>
+            </a:r>
+          </a:p>
+        </p:txBody>
+      </p:sp>
+      <p:sp>
+        <p:nvSpPr>
+          <p:cNvPr id="25" name="TextBox 24"/>
+          <p:cNvSpPr txBox="1"/>
+          <p:nvPr/>
+        </p:nvSpPr>
+        <p:spPr>
+          <a:xfrm>
+            <a:off x="619200" y="3416399"/>
+            <a:ext cx="4338000" cy="503999"/>
+          </a:xfrm>
+          <a:prstGeom prst="rect">
+            <a:avLst/>
+          </a:prstGeom>
+          <a:noFill/>
+        </p:spPr>
+        <p:txBody>
+          <a:bodyPr wrap="square">
+            <a:spAutoFit/>
+          </a:bodyPr>
+          <a:lstStyle/>
+          <a:p>
+            <a:pPr algn="l"/>
+            <a:r>
+              <a:rPr sz="750" b="0" i="1">
+                <a:solidFill>
+                  <a:srgbClr val="555555"/>
+                </a:solidFill>
+                <a:latin typeface="Calibri"/>
+              </a:rPr>
+              <a:t>Segment historique avec GPU GeForce pour PC gaming et consoles. Modèle de revenus basé sur des cycles de renouvellement hardware et des abonnements logiciels (GeForce NOW). Clients : gamers et créateurs de contenu. Croissance soutenue par l'essor du cloud gaming et des technologies ray tracing.</a:t>
+            </a:r>
+          </a:p>
+        </p:txBody>
+      </p:sp>
+      <p:sp>
+        <p:nvSpPr>
+          <p:cNvPr id="26" name="Rectangle 25"/>
           <p:cNvSpPr/>
           <p:nvPr/>
         </p:nvSpPr>
@@ -41671,7 +42412,7 @@
       </p:sp>
       <p:sp>
         <p:nvSpPr>
-          <p:cNvPr id="22" name="Rectangle 21"/>
+          <p:cNvPr id="27" name="Rectangle 26"/>
           <p:cNvSpPr/>
           <p:nvPr/>
         </p:nvSpPr>
@@ -41714,7 +42455,7 @@
       </p:sp>
       <p:sp>
         <p:nvSpPr>
-          <p:cNvPr id="23" name="TextBox 22"/>
+          <p:cNvPr id="28" name="TextBox 27"/>
           <p:cNvSpPr txBox="1"/>
           <p:nvPr/>
         </p:nvSpPr>
@@ -41742,14 +42483,14 @@
                 </a:solidFill>
                 <a:latin typeface="Calibri"/>
               </a:rPr>
-              <a:t>4 720,0 Mds$</a:t>
+              <a:t>4 726,6 Mds$</a:t>
             </a:r>
           </a:p>
         </p:txBody>
       </p:sp>
       <p:sp>
         <p:nvSpPr>
-          <p:cNvPr id="24" name="TextBox 23"/>
+          <p:cNvPr id="29" name="TextBox 28"/>
           <p:cNvSpPr txBox="1"/>
           <p:nvPr/>
         </p:nvSpPr>
@@ -41784,7 +42525,7 @@
       </p:sp>
       <p:sp>
         <p:nvSpPr>
-          <p:cNvPr id="25" name="Rectangle 24"/>
+          <p:cNvPr id="30" name="Rectangle 29"/>
           <p:cNvSpPr/>
           <p:nvPr/>
         </p:nvSpPr>
@@ -41827,7 +42568,7 @@
       </p:sp>
       <p:sp>
         <p:nvSpPr>
-          <p:cNvPr id="26" name="Rectangle 25"/>
+          <p:cNvPr id="31" name="Rectangle 30"/>
           <p:cNvSpPr/>
           <p:nvPr/>
         </p:nvSpPr>
@@ -41870,7 +42611,7 @@
       </p:sp>
       <p:sp>
         <p:nvSpPr>
-          <p:cNvPr id="27" name="TextBox 26"/>
+          <p:cNvPr id="32" name="TextBox 31"/>
           <p:cNvSpPr txBox="1"/>
           <p:nvPr/>
         </p:nvSpPr>
@@ -41905,7 +42646,7 @@
       </p:sp>
       <p:sp>
         <p:nvSpPr>
-          <p:cNvPr id="28" name="TextBox 27"/>
+          <p:cNvPr id="33" name="TextBox 32"/>
           <p:cNvSpPr txBox="1"/>
           <p:nvPr/>
         </p:nvSpPr>
@@ -41940,7 +42681,7 @@
       </p:sp>
       <p:sp>
         <p:nvSpPr>
-          <p:cNvPr id="29" name="Rectangle 28"/>
+          <p:cNvPr id="34" name="Rectangle 33"/>
           <p:cNvSpPr/>
           <p:nvPr/>
         </p:nvSpPr>
@@ -41983,7 +42724,7 @@
       </p:sp>
       <p:sp>
         <p:nvSpPr>
-          <p:cNvPr id="30" name="Rectangle 29"/>
+          <p:cNvPr id="35" name="Rectangle 34"/>
           <p:cNvSpPr/>
           <p:nvPr/>
         </p:nvSpPr>
@@ -42026,7 +42767,7 @@
       </p:sp>
       <p:sp>
         <p:nvSpPr>
-          <p:cNvPr id="31" name="TextBox 30"/>
+          <p:cNvPr id="36" name="TextBox 35"/>
           <p:cNvSpPr txBox="1"/>
           <p:nvPr/>
         </p:nvSpPr>
@@ -42054,14 +42795,14 @@
                 </a:solidFill>
                 <a:latin typeface="Calibri"/>
               </a:rPr>
-              <a:t>194,24 $</a:t>
+              <a:t>194,51 $</a:t>
             </a:r>
           </a:p>
         </p:txBody>
       </p:sp>
       <p:sp>
         <p:nvSpPr>
-          <p:cNvPr id="32" name="TextBox 31"/>
+          <p:cNvPr id="37" name="TextBox 36"/>
           <p:cNvSpPr txBox="1"/>
           <p:nvPr/>
         </p:nvSpPr>
@@ -42096,7 +42837,7 @@
       </p:sp>
       <p:sp>
         <p:nvSpPr>
-          <p:cNvPr id="33" name="Rectangle 32"/>
+          <p:cNvPr id="38" name="Rectangle 37"/>
           <p:cNvSpPr/>
           <p:nvPr/>
         </p:nvSpPr>
@@ -42139,7 +42880,7 @@
       </p:sp>
       <p:sp>
         <p:nvSpPr>
-          <p:cNvPr id="34" name="Rectangle 33"/>
+          <p:cNvPr id="39" name="Rectangle 38"/>
           <p:cNvSpPr/>
           <p:nvPr/>
         </p:nvSpPr>
@@ -42182,7 +42923,7 @@
       </p:sp>
       <p:sp>
         <p:nvSpPr>
-          <p:cNvPr id="35" name="TextBox 34"/>
+          <p:cNvPr id="40" name="TextBox 39"/>
           <p:cNvSpPr txBox="1"/>
           <p:nvPr/>
         </p:nvSpPr>
@@ -42210,14 +42951,14 @@
                 </a:solidFill>
                 <a:latin typeface="Calibri"/>
               </a:rPr>
-              <a:t>54,8x</a:t>
+              <a:t>54,9x</a:t>
             </a:r>
           </a:p>
         </p:txBody>
       </p:sp>
       <p:sp>
         <p:nvSpPr>
-          <p:cNvPr id="36" name="TextBox 35"/>
+          <p:cNvPr id="41" name="TextBox 40"/>
           <p:cNvSpPr txBox="1"/>
           <p:nvPr/>
         </p:nvSpPr>
@@ -42252,7 +42993,7 @@
       </p:sp>
       <p:sp>
         <p:nvSpPr>
-          <p:cNvPr id="37" name="TextBox 36"/>
+          <p:cNvPr id="42" name="TextBox 41"/>
           <p:cNvSpPr txBox="1"/>
           <p:nvPr/>
         </p:nvSpPr>
@@ -42893,7 +43634,7 @@
         <p:spPr>
           <a:xfrm>
             <a:off x="367200" y="961200"/>
-            <a:ext cx="2731199" cy="3520800"/>
+            <a:ext cx="4150800" cy="3520800"/>
           </a:xfrm>
           <a:prstGeom prst="rect">
             <a:avLst/>
@@ -42936,7 +43677,7 @@
         <p:spPr>
           <a:xfrm>
             <a:off x="367200" y="961200"/>
-            <a:ext cx="2731199" cy="54000"/>
+            <a:ext cx="4150800" cy="54000"/>
           </a:xfrm>
           <a:prstGeom prst="rect">
             <a:avLst/>
@@ -42979,7 +43720,7 @@
         <p:spPr>
           <a:xfrm>
             <a:off x="457200" y="1141200"/>
-            <a:ext cx="2551199" cy="640800"/>
+            <a:ext cx="3970800" cy="640800"/>
           </a:xfrm>
           <a:prstGeom prst="rect">
             <a:avLst/>
@@ -43000,7 +43741,7 @@
                 </a:solidFill>
                 <a:latin typeface="Calibri"/>
               </a:rPr>
-              <a:t>—</a:t>
+              <a:t>80%</a:t>
             </a:r>
           </a:p>
         </p:txBody>
@@ -43014,7 +43755,7 @@
         <p:spPr>
           <a:xfrm>
             <a:off x="457200" y="1785600"/>
-            <a:ext cx="2551199" cy="108000"/>
+            <a:ext cx="3970800" cy="108000"/>
           </a:xfrm>
           <a:prstGeom prst="rect">
             <a:avLst/>
@@ -43049,7 +43790,7 @@
         <p:spPr>
           <a:xfrm>
             <a:off x="457200" y="1965600"/>
-            <a:ext cx="2551199" cy="18000"/>
+            <a:ext cx="3970800" cy="18000"/>
           </a:xfrm>
           <a:prstGeom prst="rect">
             <a:avLst/>
@@ -43092,7 +43833,7 @@
         <p:spPr>
           <a:xfrm>
             <a:off x="457200" y="2059200"/>
-            <a:ext cx="2551199" cy="255600"/>
+            <a:ext cx="3970800" cy="255600"/>
           </a:xfrm>
           <a:prstGeom prst="rect">
             <a:avLst/>
@@ -43113,7 +43854,7 @@
                 </a:solidFill>
                 <a:latin typeface="Calibri"/>
               </a:rPr>
-              <a:t>Core Business</a:t>
+              <a:t>Data Center</a:t>
             </a:r>
           </a:p>
         </p:txBody>
@@ -43127,7 +43868,7 @@
         <p:spPr>
           <a:xfrm>
             <a:off x="457200" y="2332800"/>
-            <a:ext cx="2551199" cy="2041199"/>
+            <a:ext cx="3970800" cy="2041199"/>
           </a:xfrm>
           <a:prstGeom prst="rect">
             <a:avLst/>
@@ -43148,7 +43889,7 @@
                 </a:solidFill>
                 <a:latin typeface="Calibri"/>
               </a:rPr>
-              <a:t>—</a:t>
+              <a:t>Segment phare générant 80% des revenus, avec des GPU H100/H200 pour l'IA générative et le calcul haute performance. Clients cibles : hyperscalers (AWS, Google, Microsoft) et entreprises (Meta, Tesla). Moteurs de croissance : demande en IA, cloud computing et migration vers des architectures accélérées.</a:t>
             </a:r>
           </a:p>
         </p:txBody>
@@ -43161,8 +43902,8 @@
         </p:nvSpPr>
         <p:spPr>
           <a:xfrm>
-            <a:off x="3206400" y="961200"/>
-            <a:ext cx="2731199" cy="3520800"/>
+            <a:off x="4626000" y="961200"/>
+            <a:ext cx="4150800" cy="3520800"/>
           </a:xfrm>
           <a:prstGeom prst="rect">
             <a:avLst/>
@@ -43204,8 +43945,8 @@
         </p:nvSpPr>
         <p:spPr>
           <a:xfrm>
-            <a:off x="3206400" y="961200"/>
-            <a:ext cx="2731199" cy="54000"/>
+            <a:off x="4626000" y="961200"/>
+            <a:ext cx="4150800" cy="54000"/>
           </a:xfrm>
           <a:prstGeom prst="rect">
             <a:avLst/>
@@ -43247,8 +43988,8 @@
         </p:nvSpPr>
         <p:spPr>
           <a:xfrm>
-            <a:off x="3296400" y="1141200"/>
-            <a:ext cx="2551199" cy="640800"/>
+            <a:off x="4716000" y="1141200"/>
+            <a:ext cx="3970800" cy="640800"/>
           </a:xfrm>
           <a:prstGeom prst="rect">
             <a:avLst/>
@@ -43269,7 +44010,7 @@
                 </a:solidFill>
                 <a:latin typeface="Calibri"/>
               </a:rPr>
-              <a:t>—</a:t>
+              <a:t>15%</a:t>
             </a:r>
           </a:p>
         </p:txBody>
@@ -43282,8 +44023,8 @@
         </p:nvSpPr>
         <p:spPr>
           <a:xfrm>
-            <a:off x="3296400" y="1785600"/>
-            <a:ext cx="2551199" cy="108000"/>
+            <a:off x="4716000" y="1785600"/>
+            <a:ext cx="3970800" cy="108000"/>
           </a:xfrm>
           <a:prstGeom prst="rect">
             <a:avLst/>
@@ -43317,8 +44058,8 @@
         </p:nvSpPr>
         <p:spPr>
           <a:xfrm>
-            <a:off x="3296400" y="1965600"/>
-            <a:ext cx="2551199" cy="18000"/>
+            <a:off x="4716000" y="1965600"/>
+            <a:ext cx="3970800" cy="18000"/>
           </a:xfrm>
           <a:prstGeom prst="rect">
             <a:avLst/>
@@ -43360,8 +44101,8 @@
         </p:nvSpPr>
         <p:spPr>
           <a:xfrm>
-            <a:off x="3296400" y="2059200"/>
-            <a:ext cx="2551199" cy="255600"/>
+            <a:off x="4716000" y="2059200"/>
+            <a:ext cx="3970800" cy="255600"/>
           </a:xfrm>
           <a:prstGeom prst="rect">
             <a:avLst/>
@@ -43382,7 +44123,7 @@
                 </a:solidFill>
                 <a:latin typeface="Calibri"/>
               </a:rPr>
-              <a:t>Growth Driver</a:t>
+              <a:t>Gaming</a:t>
             </a:r>
           </a:p>
         </p:txBody>
@@ -43395,8 +44136,8 @@
         </p:nvSpPr>
         <p:spPr>
           <a:xfrm>
-            <a:off x="3296400" y="2332800"/>
-            <a:ext cx="2551199" cy="2041199"/>
+            <a:off x="4716000" y="2332800"/>
+            <a:ext cx="3970800" cy="2041199"/>
           </a:xfrm>
           <a:prstGeom prst="rect">
             <a:avLst/>
@@ -43417,276 +44158,7 @@
                 </a:solidFill>
                 <a:latin typeface="Calibri"/>
               </a:rPr>
-              <a:t>—</a:t>
-            </a:r>
-          </a:p>
-        </p:txBody>
-      </p:sp>
-      <p:sp>
-        <p:nvSpPr>
-          <p:cNvPr id="31" name="Rectangle 30"/>
-          <p:cNvSpPr/>
-          <p:nvPr/>
-        </p:nvSpPr>
-        <p:spPr>
-          <a:xfrm>
-            <a:off x="6045600" y="961200"/>
-            <a:ext cx="2731199" cy="3520800"/>
-          </a:xfrm>
-          <a:prstGeom prst="rect">
-            <a:avLst/>
-          </a:prstGeom>
-          <a:solidFill>
-            <a:srgbClr val="F7F8FA"/>
-          </a:solidFill>
-          <a:ln>
-            <a:noFill/>
-          </a:ln>
-        </p:spPr>
-        <p:style>
-          <a:lnRef idx="1">
-            <a:schemeClr val="accent1"/>
-          </a:lnRef>
-          <a:fillRef idx="3">
-            <a:schemeClr val="accent1"/>
-          </a:fillRef>
-          <a:effectRef idx="2">
-            <a:schemeClr val="accent1"/>
-          </a:effectRef>
-          <a:fontRef idx="minor">
-            <a:schemeClr val="lt1"/>
-          </a:fontRef>
-        </p:style>
-        <p:txBody>
-          <a:bodyPr rtlCol="0" anchor="ctr"/>
-          <a:lstStyle/>
-          <a:p>
-            <a:pPr algn="ctr"/>
-          </a:p>
-        </p:txBody>
-      </p:sp>
-      <p:sp>
-        <p:nvSpPr>
-          <p:cNvPr id="32" name="Rectangle 31"/>
-          <p:cNvSpPr/>
-          <p:nvPr/>
-        </p:nvSpPr>
-        <p:spPr>
-          <a:xfrm>
-            <a:off x="6045600" y="961200"/>
-            <a:ext cx="2731199" cy="54000"/>
-          </a:xfrm>
-          <a:prstGeom prst="rect">
-            <a:avLst/>
-          </a:prstGeom>
-          <a:solidFill>
-            <a:srgbClr val="888888"/>
-          </a:solidFill>
-          <a:ln>
-            <a:noFill/>
-          </a:ln>
-        </p:spPr>
-        <p:style>
-          <a:lnRef idx="1">
-            <a:schemeClr val="accent1"/>
-          </a:lnRef>
-          <a:fillRef idx="3">
-            <a:schemeClr val="accent1"/>
-          </a:fillRef>
-          <a:effectRef idx="2">
-            <a:schemeClr val="accent1"/>
-          </a:effectRef>
-          <a:fontRef idx="minor">
-            <a:schemeClr val="lt1"/>
-          </a:fontRef>
-        </p:style>
-        <p:txBody>
-          <a:bodyPr rtlCol="0" anchor="ctr"/>
-          <a:lstStyle/>
-          <a:p>
-            <a:pPr algn="ctr"/>
-          </a:p>
-        </p:txBody>
-      </p:sp>
-      <p:sp>
-        <p:nvSpPr>
-          <p:cNvPr id="33" name="TextBox 32"/>
-          <p:cNvSpPr txBox="1"/>
-          <p:nvPr/>
-        </p:nvSpPr>
-        <p:spPr>
-          <a:xfrm>
-            <a:off x="6135600" y="1141200"/>
-            <a:ext cx="2551199" cy="640800"/>
-          </a:xfrm>
-          <a:prstGeom prst="rect">
-            <a:avLst/>
-          </a:prstGeom>
-          <a:noFill/>
-        </p:spPr>
-        <p:txBody>
-          <a:bodyPr wrap="square">
-            <a:spAutoFit/>
-          </a:bodyPr>
-          <a:lstStyle/>
-          <a:p>
-            <a:pPr algn="l"/>
-            <a:r>
-              <a:rPr sz="2200" b="1" i="0">
-                <a:solidFill>
-                  <a:srgbClr val="888888"/>
-                </a:solidFill>
-                <a:latin typeface="Calibri"/>
-              </a:rPr>
-              <a:t>—</a:t>
-            </a:r>
-          </a:p>
-        </p:txBody>
-      </p:sp>
-      <p:sp>
-        <p:nvSpPr>
-          <p:cNvPr id="34" name="TextBox 33"/>
-          <p:cNvSpPr txBox="1"/>
-          <p:nvPr/>
-        </p:nvSpPr>
-        <p:spPr>
-          <a:xfrm>
-            <a:off x="6135600" y="1785600"/>
-            <a:ext cx="2551199" cy="108000"/>
-          </a:xfrm>
-          <a:prstGeom prst="rect">
-            <a:avLst/>
-          </a:prstGeom>
-          <a:noFill/>
-        </p:spPr>
-        <p:txBody>
-          <a:bodyPr wrap="square">
-            <a:spAutoFit/>
-          </a:bodyPr>
-          <a:lstStyle/>
-          <a:p>
-            <a:pPr algn="l"/>
-            <a:r>
-              <a:rPr sz="900" b="0" i="0">
-                <a:solidFill>
-                  <a:srgbClr val="555555"/>
-                </a:solidFill>
-                <a:latin typeface="Calibri"/>
-              </a:rPr>
-              <a:t>du CA</a:t>
-            </a:r>
-          </a:p>
-        </p:txBody>
-      </p:sp>
-      <p:sp>
-        <p:nvSpPr>
-          <p:cNvPr id="35" name="Rectangle 34"/>
-          <p:cNvSpPr/>
-          <p:nvPr/>
-        </p:nvSpPr>
-        <p:spPr>
-          <a:xfrm>
-            <a:off x="6135600" y="1965600"/>
-            <a:ext cx="2551199" cy="18000"/>
-          </a:xfrm>
-          <a:prstGeom prst="rect">
-            <a:avLst/>
-          </a:prstGeom>
-          <a:solidFill>
-            <a:srgbClr val="888888"/>
-          </a:solidFill>
-          <a:ln>
-            <a:noFill/>
-          </a:ln>
-        </p:spPr>
-        <p:style>
-          <a:lnRef idx="1">
-            <a:schemeClr val="accent1"/>
-          </a:lnRef>
-          <a:fillRef idx="3">
-            <a:schemeClr val="accent1"/>
-          </a:fillRef>
-          <a:effectRef idx="2">
-            <a:schemeClr val="accent1"/>
-          </a:effectRef>
-          <a:fontRef idx="minor">
-            <a:schemeClr val="lt1"/>
-          </a:fontRef>
-        </p:style>
-        <p:txBody>
-          <a:bodyPr rtlCol="0" anchor="ctr"/>
-          <a:lstStyle/>
-          <a:p>
-            <a:pPr algn="ctr"/>
-          </a:p>
-        </p:txBody>
-      </p:sp>
-      <p:sp>
-        <p:nvSpPr>
-          <p:cNvPr id="36" name="TextBox 35"/>
-          <p:cNvSpPr txBox="1"/>
-          <p:nvPr/>
-        </p:nvSpPr>
-        <p:spPr>
-          <a:xfrm>
-            <a:off x="6135600" y="2059200"/>
-            <a:ext cx="2551199" cy="255600"/>
-          </a:xfrm>
-          <a:prstGeom prst="rect">
-            <a:avLst/>
-          </a:prstGeom>
-          <a:noFill/>
-        </p:spPr>
-        <p:txBody>
-          <a:bodyPr wrap="square">
-            <a:spAutoFit/>
-          </a:bodyPr>
-          <a:lstStyle/>
-          <a:p>
-            <a:pPr algn="l"/>
-            <a:r>
-              <a:rPr sz="1000" b="1" i="0">
-                <a:solidFill>
-                  <a:srgbClr val="1B3A6B"/>
-                </a:solidFill>
-                <a:latin typeface="Calibri"/>
-              </a:rPr>
-              <a:t>International</a:t>
-            </a:r>
-          </a:p>
-        </p:txBody>
-      </p:sp>
-      <p:sp>
-        <p:nvSpPr>
-          <p:cNvPr id="37" name="TextBox 36"/>
-          <p:cNvSpPr txBox="1"/>
-          <p:nvPr/>
-        </p:nvSpPr>
-        <p:spPr>
-          <a:xfrm>
-            <a:off x="6135600" y="2332800"/>
-            <a:ext cx="2551199" cy="2041199"/>
-          </a:xfrm>
-          <a:prstGeom prst="rect">
-            <a:avLst/>
-          </a:prstGeom>
-          <a:noFill/>
-        </p:spPr>
-        <p:txBody>
-          <a:bodyPr wrap="square">
-            <a:spAutoFit/>
-          </a:bodyPr>
-          <a:lstStyle/>
-          <a:p>
-            <a:pPr algn="l"/>
-            <a:r>
-              <a:rPr sz="800" b="0" i="0">
-                <a:solidFill>
-                  <a:srgbClr val="555555"/>
-                </a:solidFill>
-                <a:latin typeface="Calibri"/>
-              </a:rPr>
-              <a:t>—</a:t>
+              <a:t>Segment historique avec GPU GeForce pour PC gaming et consoles. Modèle de revenus basé sur des cycles de renouvellement hardware et des abonnements logiciels (GeForce NOW). Clients : gamers et créateurs de contenu. Croissance soutenue par l'essor du cloud gaming et des technologies ray tracing.</a:t>
             </a:r>
           </a:p>
         </p:txBody>
@@ -44538,7 +45010,7 @@
                 </a:solidFill>
                 <a:latin typeface="Calibri"/>
               </a:rPr>
-              <a:t>USD millions  ·  2023–2025</a:t>
+              <a:t>USD millions  ·  2023–2027F</a:t>
             </a:r>
           </a:p>
         </p:txBody>
@@ -44553,7 +45025,7 @@
         </p:nvGraphicFramePr>
         <p:xfrm>
           <a:off x="367200" y="914400"/>
-          <a:ext cx="8413200" cy="1980000"/>
+          <a:ext cx="8413196" cy="1980000"/>
         </p:xfrm>
         <a:graphic>
           <a:graphicData uri="http://schemas.openxmlformats.org/drawingml/2006/table">
@@ -44563,9 +45035,11 @@
               </a:tblPr>
               <a:tblGrid>
                 <a:gridCol w="2355696"/>
-                <a:gridCol w="2019168"/>
-                <a:gridCol w="2019168"/>
-                <a:gridCol w="2019168"/>
+                <a:gridCol w="1211500"/>
+                <a:gridCol w="1211500"/>
+                <a:gridCol w="1211500"/>
+                <a:gridCol w="1211500"/>
+                <a:gridCol w="1211500"/>
               </a:tblGrid>
               <a:tr h="220000">
                 <a:tc>
@@ -44651,6 +45125,52 @@
                           <a:latin typeface="Calibri"/>
                         </a:rPr>
                         <a:t>2025</a:t>
+                      </a:r>
+                    </a:p>
+                  </a:txBody>
+                  <a:tcPr>
+                    <a:solidFill>
+                      <a:srgbClr val="1B3A6B"/>
+                    </a:solidFill>
+                  </a:tcPr>
+                </a:tc>
+                <a:tc>
+                  <a:txBody>
+                    <a:bodyPr/>
+                    <a:lstStyle/>
+                    <a:p>
+                      <a:pPr algn="ctr"/>
+                      <a:r>
+                        <a:rPr sz="800" b="1" i="0">
+                          <a:solidFill>
+                            <a:srgbClr val="FFFFFF"/>
+                          </a:solidFill>
+                          <a:latin typeface="Calibri"/>
+                        </a:rPr>
+                        <a:t>2026F</a:t>
+                      </a:r>
+                    </a:p>
+                  </a:txBody>
+                  <a:tcPr>
+                    <a:solidFill>
+                      <a:srgbClr val="1B3A6B"/>
+                    </a:solidFill>
+                  </a:tcPr>
+                </a:tc>
+                <a:tc>
+                  <a:txBody>
+                    <a:bodyPr/>
+                    <a:lstStyle/>
+                    <a:p>
+                      <a:pPr algn="ctr"/>
+                      <a:r>
+                        <a:rPr sz="800" b="1" i="0">
+                          <a:solidFill>
+                            <a:srgbClr val="FFFFFF"/>
+                          </a:solidFill>
+                          <a:latin typeface="Calibri"/>
+                        </a:rPr>
+                        <a:t>2027F</a:t>
                       </a:r>
                     </a:p>
                   </a:txBody>
@@ -44754,6 +45274,52 @@
                     </a:solidFill>
                   </a:tcPr>
                 </a:tc>
+                <a:tc>
+                  <a:txBody>
+                    <a:bodyPr/>
+                    <a:lstStyle/>
+                    <a:p>
+                      <a:pPr algn="ctr"/>
+                      <a:r>
+                        <a:rPr sz="800" b="1" i="0">
+                          <a:solidFill>
+                            <a:srgbClr val="0D0D0D"/>
+                          </a:solidFill>
+                          <a:latin typeface="Calibri"/>
+                        </a:rPr>
+                        <a:t>200,0</a:t>
+                      </a:r>
+                    </a:p>
+                  </a:txBody>
+                  <a:tcPr>
+                    <a:solidFill>
+                      <a:srgbClr val="FFFFFF"/>
+                    </a:solidFill>
+                  </a:tcPr>
+                </a:tc>
+                <a:tc>
+                  <a:txBody>
+                    <a:bodyPr/>
+                    <a:lstStyle/>
+                    <a:p>
+                      <a:pPr algn="ctr"/>
+                      <a:r>
+                        <a:rPr sz="800" b="1" i="0">
+                          <a:solidFill>
+                            <a:srgbClr val="0D0D0D"/>
+                          </a:solidFill>
+                          <a:latin typeface="Calibri"/>
+                        </a:rPr>
+                        <a:t>280,0</a:t>
+                      </a:r>
+                    </a:p>
+                  </a:txBody>
+                  <a:tcPr>
+                    <a:solidFill>
+                      <a:srgbClr val="FFFFFF"/>
+                    </a:solidFill>
+                  </a:tcPr>
+                </a:tc>
               </a:tr>
               <a:tr h="220000">
                 <a:tc>
@@ -44845,6 +45411,52 @@
                   <a:tcPr>
                     <a:solidFill>
                       <a:srgbClr val="DDE8F5"/>
+                    </a:solidFill>
+                  </a:tcPr>
+                </a:tc>
+                <a:tc>
+                  <a:txBody>
+                    <a:bodyPr/>
+                    <a:lstStyle/>
+                    <a:p>
+                      <a:pPr algn="ctr"/>
+                      <a:r>
+                        <a:rPr sz="750" b="0" i="1">
+                          <a:solidFill>
+                            <a:srgbClr val="333333"/>
+                          </a:solidFill>
+                          <a:latin typeface="Calibri"/>
+                        </a:rPr>
+                        <a:t>+53,3 %</a:t>
+                      </a:r>
+                    </a:p>
+                  </a:txBody>
+                  <a:tcPr>
+                    <a:solidFill>
+                      <a:srgbClr val="F7F8FA"/>
+                    </a:solidFill>
+                  </a:tcPr>
+                </a:tc>
+                <a:tc>
+                  <a:txBody>
+                    <a:bodyPr/>
+                    <a:lstStyle/>
+                    <a:p>
+                      <a:pPr algn="ctr"/>
+                      <a:r>
+                        <a:rPr sz="750" b="0" i="1">
+                          <a:solidFill>
+                            <a:srgbClr val="333333"/>
+                          </a:solidFill>
+                          <a:latin typeface="Calibri"/>
+                        </a:rPr>
+                        <a:t>+40,0 %</a:t>
+                      </a:r>
+                    </a:p>
+                  </a:txBody>
+                  <a:tcPr>
+                    <a:solidFill>
+                      <a:srgbClr val="F7F8FA"/>
                     </a:solidFill>
                   </a:tcPr>
                 </a:tc>
@@ -44942,6 +45554,52 @@
                     </a:solidFill>
                   </a:tcPr>
                 </a:tc>
+                <a:tc>
+                  <a:txBody>
+                    <a:bodyPr/>
+                    <a:lstStyle/>
+                    <a:p>
+                      <a:pPr algn="ctr"/>
+                      <a:r>
+                        <a:rPr sz="800" b="1" i="0">
+                          <a:solidFill>
+                            <a:srgbClr val="0D0D0D"/>
+                          </a:solidFill>
+                          <a:latin typeface="Calibri"/>
+                        </a:rPr>
+                        <a:t>152,0</a:t>
+                      </a:r>
+                    </a:p>
+                  </a:txBody>
+                  <a:tcPr>
+                    <a:solidFill>
+                      <a:srgbClr val="FFFFFF"/>
+                    </a:solidFill>
+                  </a:tcPr>
+                </a:tc>
+                <a:tc>
+                  <a:txBody>
+                    <a:bodyPr/>
+                    <a:lstStyle/>
+                    <a:p>
+                      <a:pPr algn="ctr"/>
+                      <a:r>
+                        <a:rPr sz="800" b="1" i="0">
+                          <a:solidFill>
+                            <a:srgbClr val="0D0D0D"/>
+                          </a:solidFill>
+                          <a:latin typeface="Calibri"/>
+                        </a:rPr>
+                        <a:t>215,6</a:t>
+                      </a:r>
+                    </a:p>
+                  </a:txBody>
+                  <a:tcPr>
+                    <a:solidFill>
+                      <a:srgbClr val="FFFFFF"/>
+                    </a:solidFill>
+                  </a:tcPr>
+                </a:tc>
               </a:tr>
               <a:tr h="220000">
                 <a:tc>
@@ -45033,6 +45691,52 @@
                   <a:tcPr>
                     <a:solidFill>
                       <a:srgbClr val="DDE8F5"/>
+                    </a:solidFill>
+                  </a:tcPr>
+                </a:tc>
+                <a:tc>
+                  <a:txBody>
+                    <a:bodyPr/>
+                    <a:lstStyle/>
+                    <a:p>
+                      <a:pPr algn="ctr"/>
+                      <a:r>
+                        <a:rPr sz="750" b="0" i="1">
+                          <a:solidFill>
+                            <a:srgbClr val="333333"/>
+                          </a:solidFill>
+                          <a:latin typeface="Calibri"/>
+                        </a:rPr>
+                        <a:t>76,0 %</a:t>
+                      </a:r>
+                    </a:p>
+                  </a:txBody>
+                  <a:tcPr>
+                    <a:solidFill>
+                      <a:srgbClr val="F7F8FA"/>
+                    </a:solidFill>
+                  </a:tcPr>
+                </a:tc>
+                <a:tc>
+                  <a:txBody>
+                    <a:bodyPr/>
+                    <a:lstStyle/>
+                    <a:p>
+                      <a:pPr algn="ctr"/>
+                      <a:r>
+                        <a:rPr sz="750" b="0" i="1">
+                          <a:solidFill>
+                            <a:srgbClr val="333333"/>
+                          </a:solidFill>
+                          <a:latin typeface="Calibri"/>
+                        </a:rPr>
+                        <a:t>77,0 %</a:t>
+                      </a:r>
+                    </a:p>
+                  </a:txBody>
+                  <a:tcPr>
+                    <a:solidFill>
+                      <a:srgbClr val="F7F8FA"/>
                     </a:solidFill>
                   </a:tcPr>
                 </a:tc>
@@ -45130,6 +45834,52 @@
                     </a:solidFill>
                   </a:tcPr>
                 </a:tc>
+                <a:tc>
+                  <a:txBody>
+                    <a:bodyPr/>
+                    <a:lstStyle/>
+                    <a:p>
+                      <a:pPr algn="ctr"/>
+                      <a:r>
+                        <a:rPr sz="800" b="1" i="0">
+                          <a:solidFill>
+                            <a:srgbClr val="0D0D0D"/>
+                          </a:solidFill>
+                          <a:latin typeface="Calibri"/>
+                        </a:rPr>
+                        <a:t>152,0</a:t>
+                      </a:r>
+                    </a:p>
+                  </a:txBody>
+                  <a:tcPr>
+                    <a:solidFill>
+                      <a:srgbClr val="FFFFFF"/>
+                    </a:solidFill>
+                  </a:tcPr>
+                </a:tc>
+                <a:tc>
+                  <a:txBody>
+                    <a:bodyPr/>
+                    <a:lstStyle/>
+                    <a:p>
+                      <a:pPr algn="ctr"/>
+                      <a:r>
+                        <a:rPr sz="800" b="1" i="0">
+                          <a:solidFill>
+                            <a:srgbClr val="0D0D0D"/>
+                          </a:solidFill>
+                          <a:latin typeface="Calibri"/>
+                        </a:rPr>
+                        <a:t>215,6</a:t>
+                      </a:r>
+                    </a:p>
+                  </a:txBody>
+                  <a:tcPr>
+                    <a:solidFill>
+                      <a:srgbClr val="FFFFFF"/>
+                    </a:solidFill>
+                  </a:tcPr>
+                </a:tc>
               </a:tr>
               <a:tr h="220000">
                 <a:tc>
@@ -45221,6 +45971,52 @@
                   <a:tcPr>
                     <a:solidFill>
                       <a:srgbClr val="DDE8F5"/>
+                    </a:solidFill>
+                  </a:tcPr>
+                </a:tc>
+                <a:tc>
+                  <a:txBody>
+                    <a:bodyPr/>
+                    <a:lstStyle/>
+                    <a:p>
+                      <a:pPr algn="ctr"/>
+                      <a:r>
+                        <a:rPr sz="750" b="0" i="1">
+                          <a:solidFill>
+                            <a:srgbClr val="333333"/>
+                          </a:solidFill>
+                          <a:latin typeface="Calibri"/>
+                        </a:rPr>
+                        <a:t>76,0 %</a:t>
+                      </a:r>
+                    </a:p>
+                  </a:txBody>
+                  <a:tcPr>
+                    <a:solidFill>
+                      <a:srgbClr val="F7F8FA"/>
+                    </a:solidFill>
+                  </a:tcPr>
+                </a:tc>
+                <a:tc>
+                  <a:txBody>
+                    <a:bodyPr/>
+                    <a:lstStyle/>
+                    <a:p>
+                      <a:pPr algn="ctr"/>
+                      <a:r>
+                        <a:rPr sz="750" b="0" i="1">
+                          <a:solidFill>
+                            <a:srgbClr val="333333"/>
+                          </a:solidFill>
+                          <a:latin typeface="Calibri"/>
+                        </a:rPr>
+                        <a:t>77,0 %</a:t>
+                      </a:r>
+                    </a:p>
+                  </a:txBody>
+                  <a:tcPr>
+                    <a:solidFill>
+                      <a:srgbClr val="F7F8FA"/>
                     </a:solidFill>
                   </a:tcPr>
                 </a:tc>
@@ -45318,6 +46114,52 @@
                     </a:solidFill>
                   </a:tcPr>
                 </a:tc>
+                <a:tc>
+                  <a:txBody>
+                    <a:bodyPr/>
+                    <a:lstStyle/>
+                    <a:p>
+                      <a:pPr algn="ctr"/>
+                      <a:r>
+                        <a:rPr sz="800" b="1" i="0">
+                          <a:solidFill>
+                            <a:srgbClr val="0D0D0D"/>
+                          </a:solidFill>
+                          <a:latin typeface="Calibri"/>
+                        </a:rPr>
+                        <a:t>120,0</a:t>
+                      </a:r>
+                    </a:p>
+                  </a:txBody>
+                  <a:tcPr>
+                    <a:solidFill>
+                      <a:srgbClr val="FFFFFF"/>
+                    </a:solidFill>
+                  </a:tcPr>
+                </a:tc>
+                <a:tc>
+                  <a:txBody>
+                    <a:bodyPr/>
+                    <a:lstStyle/>
+                    <a:p>
+                      <a:pPr algn="ctr"/>
+                      <a:r>
+                        <a:rPr sz="800" b="1" i="0">
+                          <a:solidFill>
+                            <a:srgbClr val="0D0D0D"/>
+                          </a:solidFill>
+                          <a:latin typeface="Calibri"/>
+                        </a:rPr>
+                        <a:t>179,2</a:t>
+                      </a:r>
+                    </a:p>
+                  </a:txBody>
+                  <a:tcPr>
+                    <a:solidFill>
+                      <a:srgbClr val="FFFFFF"/>
+                    </a:solidFill>
+                  </a:tcPr>
+                </a:tc>
               </a:tr>
               <a:tr h="220000">
                 <a:tc>
@@ -45412,6 +46254,52 @@
                     </a:solidFill>
                   </a:tcPr>
                 </a:tc>
+                <a:tc>
+                  <a:txBody>
+                    <a:bodyPr/>
+                    <a:lstStyle/>
+                    <a:p>
+                      <a:pPr algn="ctr"/>
+                      <a:r>
+                        <a:rPr sz="750" b="0" i="1">
+                          <a:solidFill>
+                            <a:srgbClr val="333333"/>
+                          </a:solidFill>
+                          <a:latin typeface="Calibri"/>
+                        </a:rPr>
+                        <a:t>60,0 %</a:t>
+                      </a:r>
+                    </a:p>
+                  </a:txBody>
+                  <a:tcPr>
+                    <a:solidFill>
+                      <a:srgbClr val="F7F8FA"/>
+                    </a:solidFill>
+                  </a:tcPr>
+                </a:tc>
+                <a:tc>
+                  <a:txBody>
+                    <a:bodyPr/>
+                    <a:lstStyle/>
+                    <a:p>
+                      <a:pPr algn="ctr"/>
+                      <a:r>
+                        <a:rPr sz="750" b="0" i="1">
+                          <a:solidFill>
+                            <a:srgbClr val="333333"/>
+                          </a:solidFill>
+                          <a:latin typeface="Calibri"/>
+                        </a:rPr>
+                        <a:t>64,0 %</a:t>
+                      </a:r>
+                    </a:p>
+                  </a:txBody>
+                  <a:tcPr>
+                    <a:solidFill>
+                      <a:srgbClr val="F7F8FA"/>
+                    </a:solidFill>
+                  </a:tcPr>
+                </a:tc>
               </a:tr>
             </a:tbl>
           </a:graphicData>
@@ -45568,7 +46456,7 @@
                 </a:solidFill>
                 <a:latin typeface="Calibri"/>
               </a:rPr>
-              <a:t>Croissance revenue de +114.2% sur la dernière période, reflétant une dynamique commerciale soutenue. Marge brute de 75.0%, indicateur du pricing power et de la structure de coûts variables. Marge EBITDA à 66.0%, mesure de la profitabilité opérationnelle avant amortissements. Marge nette de 55.9%, après prise en compte de la structure financière et de la fiscalité.</a:t>
+              <a:t>Le chiffre d'affaires 2025 atteint 130,5 Md$ (+114% YoY), porté par la demande en GPU pour l'IA générative. Les marges brutes de 75% bénéficient d'un mix produit favorable (H100/H200 à haute marge) et d'économies d'échelle. Le bilan est solide avec un ND/EBITDA de -0,0x, permettant des rachats d'actions ou des dividendes.</a:t>
             </a:r>
           </a:p>
         </p:txBody>

--- a/preview/NVDA/NVDA_pitchbook.pptx
+++ b/preview/NVDA/NVDA_pitchbook.pptx
@@ -3354,7 +3354,7 @@
             <a:avLst/>
           </a:prstGeom>
           <a:solidFill>
-            <a:srgbClr val="1A7A4A"/>
+            <a:srgbClr val="B06000"/>
           </a:solidFill>
           <a:ln>
             <a:noFill/>
@@ -3412,7 +3412,7 @@
                 </a:solidFill>
                 <a:latin typeface="Calibri"/>
               </a:rPr>
-              <a:t>● BUY  ·  Prix cible base : 245 $  ·  Upside : +26,0 %</a:t>
+              <a:t>● HOLD  ·  Prix cible base : 195 $  ·  Upside : +0,0 %</a:t>
             </a:r>
           </a:p>
         </p:txBody>
@@ -4384,7 +4384,7 @@
                           </a:solidFill>
                           <a:latin typeface="Calibri"/>
                         </a:rPr>
-                        <a:t>64,8x</a:t>
+                        <a:t>65,0x</a:t>
                       </a:r>
                     </a:p>
                   </a:txBody>
@@ -4558,7 +4558,7 @@
                           </a:solidFill>
                           <a:latin typeface="Calibri"/>
                         </a:rPr>
-                        <a:t>54,9x</a:t>
+                        <a:t>55,0x</a:t>
                       </a:r>
                     </a:p>
                   </a:txBody>
@@ -4732,7 +4732,7 @@
                           </a:solidFill>
                           <a:latin typeface="Calibri"/>
                         </a:rPr>
-                        <a:t>36,2x</a:t>
+                        <a:t>36,3x</a:t>
                       </a:r>
                     </a:p>
                   </a:txBody>
@@ -6071,162 +6071,6 @@
           </a:graphicData>
         </a:graphic>
       </p:graphicFrame>
-      <p:sp>
-        <p:nvSpPr>
-          <p:cNvPr id="18" name="Rectangle 17"/>
-          <p:cNvSpPr/>
-          <p:nvPr/>
-        </p:nvSpPr>
-        <p:spPr>
-          <a:xfrm>
-            <a:off x="367200" y="3628800"/>
-            <a:ext cx="8413200" cy="824400"/>
-          </a:xfrm>
-          <a:prstGeom prst="rect">
-            <a:avLst/>
-          </a:prstGeom>
-          <a:solidFill>
-            <a:srgbClr val="F5F7FA"/>
-          </a:solidFill>
-          <a:ln>
-            <a:noFill/>
-          </a:ln>
-        </p:spPr>
-        <p:style>
-          <a:lnRef idx="1">
-            <a:schemeClr val="accent1"/>
-          </a:lnRef>
-          <a:fillRef idx="3">
-            <a:schemeClr val="accent1"/>
-          </a:fillRef>
-          <a:effectRef idx="2">
-            <a:schemeClr val="accent1"/>
-          </a:effectRef>
-          <a:fontRef idx="minor">
-            <a:schemeClr val="lt1"/>
-          </a:fontRef>
-        </p:style>
-        <p:txBody>
-          <a:bodyPr rtlCol="0" anchor="ctr"/>
-          <a:lstStyle/>
-          <a:p>
-            <a:pPr algn="ctr"/>
-          </a:p>
-        </p:txBody>
-      </p:sp>
-      <p:sp>
-        <p:nvSpPr>
-          <p:cNvPr id="19" name="Rectangle 18"/>
-          <p:cNvSpPr/>
-          <p:nvPr/>
-        </p:nvSpPr>
-        <p:spPr>
-          <a:xfrm>
-            <a:off x="367200" y="3628800"/>
-            <a:ext cx="79200" cy="824400"/>
-          </a:xfrm>
-          <a:prstGeom prst="rect">
-            <a:avLst/>
-          </a:prstGeom>
-          <a:solidFill>
-            <a:srgbClr val="2E5FA3"/>
-          </a:solidFill>
-          <a:ln>
-            <a:noFill/>
-          </a:ln>
-        </p:spPr>
-        <p:style>
-          <a:lnRef idx="1">
-            <a:schemeClr val="accent1"/>
-          </a:lnRef>
-          <a:fillRef idx="3">
-            <a:schemeClr val="accent1"/>
-          </a:fillRef>
-          <a:effectRef idx="2">
-            <a:schemeClr val="accent1"/>
-          </a:effectRef>
-          <a:fontRef idx="minor">
-            <a:schemeClr val="lt1"/>
-          </a:fontRef>
-        </p:style>
-        <p:txBody>
-          <a:bodyPr rtlCol="0" anchor="ctr"/>
-          <a:lstStyle/>
-          <a:p>
-            <a:pPr algn="ctr"/>
-          </a:p>
-        </p:txBody>
-      </p:sp>
-      <p:sp>
-        <p:nvSpPr>
-          <p:cNvPr id="20" name="TextBox 19"/>
-          <p:cNvSpPr txBox="1"/>
-          <p:nvPr/>
-        </p:nvSpPr>
-        <p:spPr>
-          <a:xfrm>
-            <a:off x="475200" y="3657600"/>
-            <a:ext cx="8298000" cy="151200"/>
-          </a:xfrm>
-          <a:prstGeom prst="rect">
-            <a:avLst/>
-          </a:prstGeom>
-          <a:noFill/>
-        </p:spPr>
-        <p:txBody>
-          <a:bodyPr wrap="none">
-            <a:spAutoFit/>
-          </a:bodyPr>
-          <a:lstStyle/>
-          <a:p>
-            <a:pPr algn="l"/>
-            <a:r>
-              <a:rPr sz="950" b="1" i="0">
-                <a:solidFill>
-                  <a:srgbClr val="1B3A6B"/>
-                </a:solidFill>
-                <a:latin typeface="Calibri"/>
-              </a:rPr>
-              <a:t>NVDA génère ROE 92% / ROIC 94% — création de valeur premium</a:t>
-            </a:r>
-          </a:p>
-        </p:txBody>
-      </p:sp>
-      <p:sp>
-        <p:nvSpPr>
-          <p:cNvPr id="21" name="TextBox 20"/>
-          <p:cNvSpPr txBox="1"/>
-          <p:nvPr/>
-        </p:nvSpPr>
-        <p:spPr>
-          <a:xfrm>
-            <a:off x="475200" y="3826800"/>
-            <a:ext cx="8298000" cy="601200"/>
-          </a:xfrm>
-          <a:prstGeom prst="rect">
-            <a:avLst/>
-          </a:prstGeom>
-          <a:noFill/>
-        </p:spPr>
-        <p:txBody>
-          <a:bodyPr wrap="square">
-            <a:spAutoFit/>
-          </a:bodyPr>
-          <a:lstStyle/>
-          <a:p>
-            <a:pPr algn="l"/>
-            <a:r>
-              <a:rPr sz="850" b="0" i="0">
-                <a:solidFill>
-                  <a:srgbClr val="555555"/>
-                </a:solidFill>
-                <a:latin typeface="Calibri"/>
-              </a:rPr>
-              <a:t>Les marges brutes sont passées de 56,9% en 2023 à 75,0% en 2025, grâce à l'effet volume (+114% de croissance) et à la domination du segment Data Center (80% des revenus). La trajectoire est durable tant que la demande en IA reste forte, avec un risque de mean-reversion limité par le pricing power de NVIDIA.</a:t>
-            </a:r>
-          </a:p>
-        </p:txBody>
-      </p:sp>
     </p:spTree>
   </p:cSld>
   <p:clrMapOvr>
@@ -7387,7 +7231,7 @@
                           </a:solidFill>
                           <a:latin typeface="Calibri"/>
                         </a:rPr>
-                        <a:t>245 $</a:t>
+                        <a:t>195 $</a:t>
                       </a:r>
                     </a:p>
                   </a:txBody>
@@ -7475,7 +7319,7 @@
                           </a:solidFill>
                           <a:latin typeface="Calibri"/>
                         </a:rPr>
-                        <a:t>194,51 $</a:t>
+                        <a:t>194,90 $</a:t>
                       </a:r>
                     </a:p>
                   </a:txBody>
@@ -7563,7 +7407,7 @@
                           </a:solidFill>
                           <a:latin typeface="Calibri"/>
                         </a:rPr>
-                        <a:t>+26,0 %</a:t>
+                        <a:t>+0,0 %</a:t>
                       </a:r>
                     </a:p>
                   </a:txBody>
@@ -7706,7 +7550,7 @@
                           </a:solidFill>
                           <a:latin typeface="Calibri"/>
                         </a:rPr>
-                        <a:t>180 $</a:t>
+                        <a:t>166 $</a:t>
                       </a:r>
                     </a:p>
                   </a:txBody>
@@ -7729,7 +7573,7 @@
                           </a:solidFill>
                           <a:latin typeface="Calibri"/>
                         </a:rPr>
-                        <a:t>245 $</a:t>
+                        <a:t>195 $</a:t>
                       </a:r>
                     </a:p>
                   </a:txBody>
@@ -7752,7 +7596,7 @@
                           </a:solidFill>
                           <a:latin typeface="Calibri"/>
                         </a:rPr>
-                        <a:t>280 $</a:t>
+                        <a:t>234 $</a:t>
                       </a:r>
                     </a:p>
                   </a:txBody>
@@ -7777,7 +7621,7 @@
                           </a:solidFill>
                           <a:latin typeface="Calibri"/>
                         </a:rPr>
-                        <a:t>-7,5 %</a:t>
+                        <a:t>-15,0 %</a:t>
                       </a:r>
                     </a:p>
                   </a:txBody>
@@ -7800,7 +7644,7 @@
                           </a:solidFill>
                           <a:latin typeface="Calibri"/>
                         </a:rPr>
-                        <a:t>+26,0 %</a:t>
+                        <a:t>+0,0 %</a:t>
                       </a:r>
                     </a:p>
                   </a:txBody>
@@ -7823,7 +7667,7 @@
                           </a:solidFill>
                           <a:latin typeface="Calibri"/>
                         </a:rPr>
-                        <a:t>+44,0 %</a:t>
+                        <a:t>+20,0 %</a:t>
                       </a:r>
                     </a:p>
                   </a:txBody>
@@ -7939,47 +7783,824 @@
                 </a:solidFill>
                 <a:latin typeface="Calibri"/>
               </a:rPr>
-              <a:t>Monte Carlo GBM</a:t>
+              <a:t>Monte Carlo GBM — 10 000 simulations</a:t>
             </a:r>
           </a:p>
         </p:txBody>
       </p:sp>
-      <p:sp>
-        <p:nvSpPr>
-          <p:cNvPr id="19" name="TextBox 18"/>
-          <p:cNvSpPr txBox="1"/>
-          <p:nvPr/>
-        </p:nvSpPr>
-        <p:spPr>
-          <a:xfrm>
-            <a:off x="367200" y="2700000"/>
-            <a:ext cx="4024800" cy="1007999"/>
-          </a:xfrm>
-          <a:prstGeom prst="rect">
-            <a:avLst/>
-          </a:prstGeom>
-          <a:noFill/>
-        </p:spPr>
-        <p:txBody>
-          <a:bodyPr wrap="square">
-            <a:spAutoFit/>
-          </a:bodyPr>
-          <a:lstStyle/>
-          <a:p>
-            <a:pPr algn="l"/>
-            <a:r>
-              <a:rPr sz="900" b="0" i="0">
-                <a:solidFill>
-                  <a:srgbClr val="888888"/>
-                </a:solidFill>
-                <a:latin typeface="Calibri"/>
-              </a:rPr>
-              <a:t>Simulations GBM non disponibles
-pour ce ticker.</a:t>
-            </a:r>
-          </a:p>
-        </p:txBody>
-      </p:sp>
+      <p:graphicFrame>
+        <p:nvGraphicFramePr>
+          <p:cNvPr id="19" name="Table 18"/>
+          <p:cNvGraphicFramePr>
+            <a:graphicFrameLocks noGrp="1"/>
+          </p:cNvGraphicFramePr>
+          <p:nvPr/>
+        </p:nvGraphicFramePr>
+        <p:xfrm>
+          <a:off x="367200" y="2653200"/>
+          <a:ext cx="4024800" cy="1116000"/>
+        </p:xfrm>
+        <a:graphic>
+          <a:graphicData uri="http://schemas.openxmlformats.org/drawingml/2006/table">
+            <a:tbl>
+              <a:tblPr firstRow="1" bandRow="1">
+                <a:tableStyleId>{5C22544A-7EE6-4342-B048-85BDC9FD1C3A}</a:tableStyleId>
+              </a:tblPr>
+              <a:tblGrid>
+                <a:gridCol w="1690416"/>
+                <a:gridCol w="1287936"/>
+                <a:gridCol w="1046448"/>
+              </a:tblGrid>
+              <a:tr h="186000">
+                <a:tc>
+                  <a:txBody>
+                    <a:bodyPr/>
+                    <a:lstStyle/>
+                    <a:p>
+                      <a:pPr algn="l"/>
+                      <a:r>
+                        <a:rPr sz="800" b="1" i="0">
+                          <a:solidFill>
+                            <a:srgbClr val="FFFFFF"/>
+                          </a:solidFill>
+                          <a:latin typeface="Calibri"/>
+                        </a:rPr>
+                        <a:t>Scénario</a:t>
+                      </a:r>
+                    </a:p>
+                  </a:txBody>
+                  <a:tcPr>
+                    <a:solidFill>
+                      <a:srgbClr val="1B3A6B"/>
+                    </a:solidFill>
+                    <a:lnL w="6350">
+                      <a:solidFill>
+                        <a:srgbClr val="DDDDDD"/>
+                      </a:solidFill>
+                    </a:lnL>
+                    <a:lnR w="6350">
+                      <a:solidFill>
+                        <a:srgbClr val="DDDDDD"/>
+                      </a:solidFill>
+                    </a:lnR>
+                    <a:lnT w="6350">
+                      <a:solidFill>
+                        <a:srgbClr val="DDDDDD"/>
+                      </a:solidFill>
+                    </a:lnT>
+                    <a:lnB w="6350">
+                      <a:solidFill>
+                        <a:srgbClr val="DDDDDD"/>
+                      </a:solidFill>
+                    </a:lnB>
+                  </a:tcPr>
+                </a:tc>
+                <a:tc>
+                  <a:txBody>
+                    <a:bodyPr/>
+                    <a:lstStyle/>
+                    <a:p>
+                      <a:pPr algn="ctr"/>
+                      <a:r>
+                        <a:rPr sz="800" b="1" i="0">
+                          <a:solidFill>
+                            <a:srgbClr val="FFFFFF"/>
+                          </a:solidFill>
+                          <a:latin typeface="Calibri"/>
+                        </a:rPr>
+                        <a:t>Cours prédit (12M)</a:t>
+                      </a:r>
+                    </a:p>
+                  </a:txBody>
+                  <a:tcPr>
+                    <a:solidFill>
+                      <a:srgbClr val="1B3A6B"/>
+                    </a:solidFill>
+                    <a:lnL w="6350">
+                      <a:solidFill>
+                        <a:srgbClr val="DDDDDD"/>
+                      </a:solidFill>
+                    </a:lnL>
+                    <a:lnR w="6350">
+                      <a:solidFill>
+                        <a:srgbClr val="DDDDDD"/>
+                      </a:solidFill>
+                    </a:lnR>
+                    <a:lnT w="6350">
+                      <a:solidFill>
+                        <a:srgbClr val="DDDDDD"/>
+                      </a:solidFill>
+                    </a:lnT>
+                    <a:lnB w="6350">
+                      <a:solidFill>
+                        <a:srgbClr val="DDDDDD"/>
+                      </a:solidFill>
+                    </a:lnB>
+                  </a:tcPr>
+                </a:tc>
+                <a:tc>
+                  <a:txBody>
+                    <a:bodyPr/>
+                    <a:lstStyle/>
+                    <a:p>
+                      <a:pPr algn="ctr"/>
+                      <a:r>
+                        <a:rPr sz="800" b="1" i="0">
+                          <a:solidFill>
+                            <a:srgbClr val="FFFFFF"/>
+                          </a:solidFill>
+                          <a:latin typeface="Calibri"/>
+                        </a:rPr>
+                        <a:t>vs Cours</a:t>
+                      </a:r>
+                    </a:p>
+                  </a:txBody>
+                  <a:tcPr>
+                    <a:solidFill>
+                      <a:srgbClr val="1B3A6B"/>
+                    </a:solidFill>
+                    <a:lnL w="6350">
+                      <a:solidFill>
+                        <a:srgbClr val="DDDDDD"/>
+                      </a:solidFill>
+                    </a:lnL>
+                    <a:lnR w="6350">
+                      <a:solidFill>
+                        <a:srgbClr val="DDDDDD"/>
+                      </a:solidFill>
+                    </a:lnR>
+                    <a:lnT w="6350">
+                      <a:solidFill>
+                        <a:srgbClr val="DDDDDD"/>
+                      </a:solidFill>
+                    </a:lnT>
+                    <a:lnB w="6350">
+                      <a:solidFill>
+                        <a:srgbClr val="DDDDDD"/>
+                      </a:solidFill>
+                    </a:lnB>
+                  </a:tcPr>
+                </a:tc>
+              </a:tr>
+              <a:tr h="186000">
+                <a:tc>
+                  <a:txBody>
+                    <a:bodyPr/>
+                    <a:lstStyle/>
+                    <a:p>
+                      <a:pPr algn="l"/>
+                      <a:r>
+                        <a:rPr sz="800" b="0" i="0">
+                          <a:solidFill>
+                            <a:srgbClr val="0D0D0D"/>
+                          </a:solidFill>
+                          <a:latin typeface="Calibri"/>
+                        </a:rPr>
+                        <a:t>Stress Down (P2)</a:t>
+                      </a:r>
+                    </a:p>
+                  </a:txBody>
+                  <a:tcPr>
+                    <a:solidFill>
+                      <a:srgbClr val="FFFFFF"/>
+                    </a:solidFill>
+                    <a:lnL w="6350">
+                      <a:solidFill>
+                        <a:srgbClr val="DDDDDD"/>
+                      </a:solidFill>
+                    </a:lnL>
+                    <a:lnR w="6350">
+                      <a:solidFill>
+                        <a:srgbClr val="DDDDDD"/>
+                      </a:solidFill>
+                    </a:lnR>
+                    <a:lnT w="6350">
+                      <a:solidFill>
+                        <a:srgbClr val="DDDDDD"/>
+                      </a:solidFill>
+                    </a:lnT>
+                    <a:lnB w="6350">
+                      <a:solidFill>
+                        <a:srgbClr val="DDDDDD"/>
+                      </a:solidFill>
+                    </a:lnB>
+                  </a:tcPr>
+                </a:tc>
+                <a:tc>
+                  <a:txBody>
+                    <a:bodyPr/>
+                    <a:lstStyle/>
+                    <a:p>
+                      <a:pPr algn="ctr"/>
+                      <a:r>
+                        <a:rPr sz="800" b="0" i="0">
+                          <a:solidFill>
+                            <a:srgbClr val="0D0D0D"/>
+                          </a:solidFill>
+                          <a:latin typeface="Calibri"/>
+                        </a:rPr>
+                        <a:t>94 $</a:t>
+                      </a:r>
+                    </a:p>
+                  </a:txBody>
+                  <a:tcPr>
+                    <a:solidFill>
+                      <a:srgbClr val="FFFFFF"/>
+                    </a:solidFill>
+                    <a:lnL w="6350">
+                      <a:solidFill>
+                        <a:srgbClr val="DDDDDD"/>
+                      </a:solidFill>
+                    </a:lnL>
+                    <a:lnR w="6350">
+                      <a:solidFill>
+                        <a:srgbClr val="DDDDDD"/>
+                      </a:solidFill>
+                    </a:lnR>
+                    <a:lnT w="6350">
+                      <a:solidFill>
+                        <a:srgbClr val="DDDDDD"/>
+                      </a:solidFill>
+                    </a:lnT>
+                    <a:lnB w="6350">
+                      <a:solidFill>
+                        <a:srgbClr val="DDDDDD"/>
+                      </a:solidFill>
+                    </a:lnB>
+                  </a:tcPr>
+                </a:tc>
+                <a:tc>
+                  <a:txBody>
+                    <a:bodyPr/>
+                    <a:lstStyle/>
+                    <a:p>
+                      <a:pPr algn="ctr"/>
+                      <a:r>
+                        <a:rPr sz="800" b="0" i="0">
+                          <a:solidFill>
+                            <a:srgbClr val="0D0D0D"/>
+                          </a:solidFill>
+                          <a:latin typeface="Calibri"/>
+                        </a:rPr>
+                        <a:t>-51,9 %</a:t>
+                      </a:r>
+                    </a:p>
+                  </a:txBody>
+                  <a:tcPr>
+                    <a:solidFill>
+                      <a:srgbClr val="FFFFFF"/>
+                    </a:solidFill>
+                    <a:lnL w="6350">
+                      <a:solidFill>
+                        <a:srgbClr val="DDDDDD"/>
+                      </a:solidFill>
+                    </a:lnL>
+                    <a:lnR w="6350">
+                      <a:solidFill>
+                        <a:srgbClr val="DDDDDD"/>
+                      </a:solidFill>
+                    </a:lnR>
+                    <a:lnT w="6350">
+                      <a:solidFill>
+                        <a:srgbClr val="DDDDDD"/>
+                      </a:solidFill>
+                    </a:lnT>
+                    <a:lnB w="6350">
+                      <a:solidFill>
+                        <a:srgbClr val="DDDDDD"/>
+                      </a:solidFill>
+                    </a:lnB>
+                  </a:tcPr>
+                </a:tc>
+              </a:tr>
+              <a:tr h="186000">
+                <a:tc>
+                  <a:txBody>
+                    <a:bodyPr/>
+                    <a:lstStyle/>
+                    <a:p>
+                      <a:pPr algn="l"/>
+                      <a:r>
+                        <a:rPr sz="800" b="0" i="0">
+                          <a:solidFill>
+                            <a:srgbClr val="0D0D0D"/>
+                          </a:solidFill>
+                          <a:latin typeface="Calibri"/>
+                        </a:rPr>
+                        <a:t>Pessimiste (P10)</a:t>
+                      </a:r>
+                    </a:p>
+                  </a:txBody>
+                  <a:tcPr>
+                    <a:solidFill>
+                      <a:srgbClr val="F7F8FA"/>
+                    </a:solidFill>
+                    <a:lnL w="6350">
+                      <a:solidFill>
+                        <a:srgbClr val="DDDDDD"/>
+                      </a:solidFill>
+                    </a:lnL>
+                    <a:lnR w="6350">
+                      <a:solidFill>
+                        <a:srgbClr val="DDDDDD"/>
+                      </a:solidFill>
+                    </a:lnR>
+                    <a:lnT w="6350">
+                      <a:solidFill>
+                        <a:srgbClr val="DDDDDD"/>
+                      </a:solidFill>
+                    </a:lnT>
+                    <a:lnB w="6350">
+                      <a:solidFill>
+                        <a:srgbClr val="DDDDDD"/>
+                      </a:solidFill>
+                    </a:lnB>
+                  </a:tcPr>
+                </a:tc>
+                <a:tc>
+                  <a:txBody>
+                    <a:bodyPr/>
+                    <a:lstStyle/>
+                    <a:p>
+                      <a:pPr algn="ctr"/>
+                      <a:r>
+                        <a:rPr sz="800" b="0" i="0">
+                          <a:solidFill>
+                            <a:srgbClr val="0D0D0D"/>
+                          </a:solidFill>
+                          <a:latin typeface="Calibri"/>
+                        </a:rPr>
+                        <a:t>136 $</a:t>
+                      </a:r>
+                    </a:p>
+                  </a:txBody>
+                  <a:tcPr>
+                    <a:solidFill>
+                      <a:srgbClr val="F7F8FA"/>
+                    </a:solidFill>
+                    <a:lnL w="6350">
+                      <a:solidFill>
+                        <a:srgbClr val="DDDDDD"/>
+                      </a:solidFill>
+                    </a:lnL>
+                    <a:lnR w="6350">
+                      <a:solidFill>
+                        <a:srgbClr val="DDDDDD"/>
+                      </a:solidFill>
+                    </a:lnR>
+                    <a:lnT w="6350">
+                      <a:solidFill>
+                        <a:srgbClr val="DDDDDD"/>
+                      </a:solidFill>
+                    </a:lnT>
+                    <a:lnB w="6350">
+                      <a:solidFill>
+                        <a:srgbClr val="DDDDDD"/>
+                      </a:solidFill>
+                    </a:lnB>
+                  </a:tcPr>
+                </a:tc>
+                <a:tc>
+                  <a:txBody>
+                    <a:bodyPr/>
+                    <a:lstStyle/>
+                    <a:p>
+                      <a:pPr algn="ctr"/>
+                      <a:r>
+                        <a:rPr sz="800" b="0" i="0">
+                          <a:solidFill>
+                            <a:srgbClr val="0D0D0D"/>
+                          </a:solidFill>
+                          <a:latin typeface="Calibri"/>
+                        </a:rPr>
+                        <a:t>-30,1 %</a:t>
+                      </a:r>
+                    </a:p>
+                  </a:txBody>
+                  <a:tcPr>
+                    <a:solidFill>
+                      <a:srgbClr val="F7F8FA"/>
+                    </a:solidFill>
+                    <a:lnL w="6350">
+                      <a:solidFill>
+                        <a:srgbClr val="DDDDDD"/>
+                      </a:solidFill>
+                    </a:lnL>
+                    <a:lnR w="6350">
+                      <a:solidFill>
+                        <a:srgbClr val="DDDDDD"/>
+                      </a:solidFill>
+                    </a:lnR>
+                    <a:lnT w="6350">
+                      <a:solidFill>
+                        <a:srgbClr val="DDDDDD"/>
+                      </a:solidFill>
+                    </a:lnT>
+                    <a:lnB w="6350">
+                      <a:solidFill>
+                        <a:srgbClr val="DDDDDD"/>
+                      </a:solidFill>
+                    </a:lnB>
+                  </a:tcPr>
+                </a:tc>
+              </a:tr>
+              <a:tr h="186000">
+                <a:tc>
+                  <a:txBody>
+                    <a:bodyPr/>
+                    <a:lstStyle/>
+                    <a:p>
+                      <a:pPr algn="l"/>
+                      <a:r>
+                        <a:rPr sz="800" b="1" i="0">
+                          <a:solidFill>
+                            <a:srgbClr val="1B3A6B"/>
+                          </a:solidFill>
+                          <a:latin typeface="Calibri"/>
+                        </a:rPr>
+                        <a:t>● Médian (P50)</a:t>
+                      </a:r>
+                    </a:p>
+                  </a:txBody>
+                  <a:tcPr>
+                    <a:solidFill>
+                      <a:srgbClr val="DDE8F5"/>
+                    </a:solidFill>
+                    <a:lnL w="6350">
+                      <a:solidFill>
+                        <a:srgbClr val="DDDDDD"/>
+                      </a:solidFill>
+                    </a:lnL>
+                    <a:lnR w="6350">
+                      <a:solidFill>
+                        <a:srgbClr val="DDDDDD"/>
+                      </a:solidFill>
+                    </a:lnR>
+                    <a:lnT w="6350">
+                      <a:solidFill>
+                        <a:srgbClr val="DDDDDD"/>
+                      </a:solidFill>
+                    </a:lnT>
+                    <a:lnB w="6350">
+                      <a:solidFill>
+                        <a:srgbClr val="DDDDDD"/>
+                      </a:solidFill>
+                    </a:lnB>
+                  </a:tcPr>
+                </a:tc>
+                <a:tc>
+                  <a:txBody>
+                    <a:bodyPr/>
+                    <a:lstStyle/>
+                    <a:p>
+                      <a:pPr algn="ctr"/>
+                      <a:r>
+                        <a:rPr sz="800" b="1" i="0">
+                          <a:solidFill>
+                            <a:srgbClr val="1B3A6B"/>
+                          </a:solidFill>
+                          <a:latin typeface="Calibri"/>
+                        </a:rPr>
+                        <a:t>259 $</a:t>
+                      </a:r>
+                    </a:p>
+                  </a:txBody>
+                  <a:tcPr>
+                    <a:solidFill>
+                      <a:srgbClr val="DDE8F5"/>
+                    </a:solidFill>
+                    <a:lnL w="6350">
+                      <a:solidFill>
+                        <a:srgbClr val="DDDDDD"/>
+                      </a:solidFill>
+                    </a:lnL>
+                    <a:lnR w="6350">
+                      <a:solidFill>
+                        <a:srgbClr val="DDDDDD"/>
+                      </a:solidFill>
+                    </a:lnR>
+                    <a:lnT w="6350">
+                      <a:solidFill>
+                        <a:srgbClr val="DDDDDD"/>
+                      </a:solidFill>
+                    </a:lnT>
+                    <a:lnB w="6350">
+                      <a:solidFill>
+                        <a:srgbClr val="DDDDDD"/>
+                      </a:solidFill>
+                    </a:lnB>
+                  </a:tcPr>
+                </a:tc>
+                <a:tc>
+                  <a:txBody>
+                    <a:bodyPr/>
+                    <a:lstStyle/>
+                    <a:p>
+                      <a:pPr algn="ctr"/>
+                      <a:r>
+                        <a:rPr sz="800" b="1" i="0">
+                          <a:solidFill>
+                            <a:srgbClr val="1B3A6B"/>
+                          </a:solidFill>
+                          <a:latin typeface="Calibri"/>
+                        </a:rPr>
+                        <a:t>+32,8 %</a:t>
+                      </a:r>
+                    </a:p>
+                  </a:txBody>
+                  <a:tcPr>
+                    <a:solidFill>
+                      <a:srgbClr val="DDE8F5"/>
+                    </a:solidFill>
+                    <a:lnL w="6350">
+                      <a:solidFill>
+                        <a:srgbClr val="DDDDDD"/>
+                      </a:solidFill>
+                    </a:lnL>
+                    <a:lnR w="6350">
+                      <a:solidFill>
+                        <a:srgbClr val="DDDDDD"/>
+                      </a:solidFill>
+                    </a:lnR>
+                    <a:lnT w="6350">
+                      <a:solidFill>
+                        <a:srgbClr val="DDDDDD"/>
+                      </a:solidFill>
+                    </a:lnT>
+                    <a:lnB w="6350">
+                      <a:solidFill>
+                        <a:srgbClr val="DDDDDD"/>
+                      </a:solidFill>
+                    </a:lnB>
+                  </a:tcPr>
+                </a:tc>
+              </a:tr>
+              <a:tr h="186000">
+                <a:tc>
+                  <a:txBody>
+                    <a:bodyPr/>
+                    <a:lstStyle/>
+                    <a:p>
+                      <a:pPr algn="l"/>
+                      <a:r>
+                        <a:rPr sz="800" b="0" i="0">
+                          <a:solidFill>
+                            <a:srgbClr val="0D0D0D"/>
+                          </a:solidFill>
+                          <a:latin typeface="Calibri"/>
+                        </a:rPr>
+                        <a:t>Optimiste (P90)</a:t>
+                      </a:r>
+                    </a:p>
+                  </a:txBody>
+                  <a:tcPr>
+                    <a:solidFill>
+                      <a:srgbClr val="F7F8FA"/>
+                    </a:solidFill>
+                    <a:lnL w="6350">
+                      <a:solidFill>
+                        <a:srgbClr val="DDDDDD"/>
+                      </a:solidFill>
+                    </a:lnL>
+                    <a:lnR w="6350">
+                      <a:solidFill>
+                        <a:srgbClr val="DDDDDD"/>
+                      </a:solidFill>
+                    </a:lnR>
+                    <a:lnT w="6350">
+                      <a:solidFill>
+                        <a:srgbClr val="DDDDDD"/>
+                      </a:solidFill>
+                    </a:lnT>
+                    <a:lnB w="6350">
+                      <a:solidFill>
+                        <a:srgbClr val="DDDDDD"/>
+                      </a:solidFill>
+                    </a:lnB>
+                  </a:tcPr>
+                </a:tc>
+                <a:tc>
+                  <a:txBody>
+                    <a:bodyPr/>
+                    <a:lstStyle/>
+                    <a:p>
+                      <a:pPr algn="ctr"/>
+                      <a:r>
+                        <a:rPr sz="800" b="0" i="0">
+                          <a:solidFill>
+                            <a:srgbClr val="0D0D0D"/>
+                          </a:solidFill>
+                          <a:latin typeface="Calibri"/>
+                        </a:rPr>
+                        <a:t>490 $</a:t>
+                      </a:r>
+                    </a:p>
+                  </a:txBody>
+                  <a:tcPr>
+                    <a:solidFill>
+                      <a:srgbClr val="F7F8FA"/>
+                    </a:solidFill>
+                    <a:lnL w="6350">
+                      <a:solidFill>
+                        <a:srgbClr val="DDDDDD"/>
+                      </a:solidFill>
+                    </a:lnL>
+                    <a:lnR w="6350">
+                      <a:solidFill>
+                        <a:srgbClr val="DDDDDD"/>
+                      </a:solidFill>
+                    </a:lnR>
+                    <a:lnT w="6350">
+                      <a:solidFill>
+                        <a:srgbClr val="DDDDDD"/>
+                      </a:solidFill>
+                    </a:lnT>
+                    <a:lnB w="6350">
+                      <a:solidFill>
+                        <a:srgbClr val="DDDDDD"/>
+                      </a:solidFill>
+                    </a:lnB>
+                  </a:tcPr>
+                </a:tc>
+                <a:tc>
+                  <a:txBody>
+                    <a:bodyPr/>
+                    <a:lstStyle/>
+                    <a:p>
+                      <a:pPr algn="ctr"/>
+                      <a:r>
+                        <a:rPr sz="800" b="0" i="0">
+                          <a:solidFill>
+                            <a:srgbClr val="0D0D0D"/>
+                          </a:solidFill>
+                          <a:latin typeface="Calibri"/>
+                        </a:rPr>
+                        <a:t>+151,7 %</a:t>
+                      </a:r>
+                    </a:p>
+                  </a:txBody>
+                  <a:tcPr>
+                    <a:solidFill>
+                      <a:srgbClr val="F7F8FA"/>
+                    </a:solidFill>
+                    <a:lnL w="6350">
+                      <a:solidFill>
+                        <a:srgbClr val="DDDDDD"/>
+                      </a:solidFill>
+                    </a:lnL>
+                    <a:lnR w="6350">
+                      <a:solidFill>
+                        <a:srgbClr val="DDDDDD"/>
+                      </a:solidFill>
+                    </a:lnR>
+                    <a:lnT w="6350">
+                      <a:solidFill>
+                        <a:srgbClr val="DDDDDD"/>
+                      </a:solidFill>
+                    </a:lnT>
+                    <a:lnB w="6350">
+                      <a:solidFill>
+                        <a:srgbClr val="DDDDDD"/>
+                      </a:solidFill>
+                    </a:lnB>
+                  </a:tcPr>
+                </a:tc>
+              </a:tr>
+              <a:tr h="186000">
+                <a:tc>
+                  <a:txBody>
+                    <a:bodyPr/>
+                    <a:lstStyle/>
+                    <a:p>
+                      <a:pPr algn="l"/>
+                      <a:r>
+                        <a:rPr sz="800" b="0" i="0">
+                          <a:solidFill>
+                            <a:srgbClr val="0D0D0D"/>
+                          </a:solidFill>
+                          <a:latin typeface="Calibri"/>
+                        </a:rPr>
+                        <a:t>Stress Up (P98)</a:t>
+                      </a:r>
+                    </a:p>
+                  </a:txBody>
+                  <a:tcPr>
+                    <a:solidFill>
+                      <a:srgbClr val="FFFFFF"/>
+                    </a:solidFill>
+                    <a:lnL w="6350">
+                      <a:solidFill>
+                        <a:srgbClr val="DDDDDD"/>
+                      </a:solidFill>
+                    </a:lnL>
+                    <a:lnR w="6350">
+                      <a:solidFill>
+                        <a:srgbClr val="DDDDDD"/>
+                      </a:solidFill>
+                    </a:lnR>
+                    <a:lnT w="6350">
+                      <a:solidFill>
+                        <a:srgbClr val="DDDDDD"/>
+                      </a:solidFill>
+                    </a:lnT>
+                    <a:lnB w="6350">
+                      <a:solidFill>
+                        <a:srgbClr val="DDDDDD"/>
+                      </a:solidFill>
+                    </a:lnB>
+                  </a:tcPr>
+                </a:tc>
+                <a:tc>
+                  <a:txBody>
+                    <a:bodyPr/>
+                    <a:lstStyle/>
+                    <a:p>
+                      <a:pPr algn="ctr"/>
+                      <a:r>
+                        <a:rPr sz="800" b="0" i="0">
+                          <a:solidFill>
+                            <a:srgbClr val="0D0D0D"/>
+                          </a:solidFill>
+                          <a:latin typeface="Calibri"/>
+                        </a:rPr>
+                        <a:t>716 $</a:t>
+                      </a:r>
+                    </a:p>
+                  </a:txBody>
+                  <a:tcPr>
+                    <a:solidFill>
+                      <a:srgbClr val="FFFFFF"/>
+                    </a:solidFill>
+                    <a:lnL w="6350">
+                      <a:solidFill>
+                        <a:srgbClr val="DDDDDD"/>
+                      </a:solidFill>
+                    </a:lnL>
+                    <a:lnR w="6350">
+                      <a:solidFill>
+                        <a:srgbClr val="DDDDDD"/>
+                      </a:solidFill>
+                    </a:lnR>
+                    <a:lnT w="6350">
+                      <a:solidFill>
+                        <a:srgbClr val="DDDDDD"/>
+                      </a:solidFill>
+                    </a:lnT>
+                    <a:lnB w="6350">
+                      <a:solidFill>
+                        <a:srgbClr val="DDDDDD"/>
+                      </a:solidFill>
+                    </a:lnB>
+                  </a:tcPr>
+                </a:tc>
+                <a:tc>
+                  <a:txBody>
+                    <a:bodyPr/>
+                    <a:lstStyle/>
+                    <a:p>
+                      <a:pPr algn="ctr"/>
+                      <a:r>
+                        <a:rPr sz="800" b="0" i="0">
+                          <a:solidFill>
+                            <a:srgbClr val="0D0D0D"/>
+                          </a:solidFill>
+                          <a:latin typeface="Calibri"/>
+                        </a:rPr>
+                        <a:t>+267,3 %</a:t>
+                      </a:r>
+                    </a:p>
+                  </a:txBody>
+                  <a:tcPr>
+                    <a:solidFill>
+                      <a:srgbClr val="FFFFFF"/>
+                    </a:solidFill>
+                    <a:lnL w="6350">
+                      <a:solidFill>
+                        <a:srgbClr val="DDDDDD"/>
+                      </a:solidFill>
+                    </a:lnL>
+                    <a:lnR w="6350">
+                      <a:solidFill>
+                        <a:srgbClr val="DDDDDD"/>
+                      </a:solidFill>
+                    </a:lnR>
+                    <a:lnT w="6350">
+                      <a:solidFill>
+                        <a:srgbClr val="DDDDDD"/>
+                      </a:solidFill>
+                    </a:lnT>
+                    <a:lnB w="6350">
+                      <a:solidFill>
+                        <a:srgbClr val="DDDDDD"/>
+                      </a:solidFill>
+                    </a:lnB>
+                  </a:tcPr>
+                </a:tc>
+              </a:tr>
+            </a:tbl>
+          </a:graphicData>
+        </a:graphic>
+      </p:graphicFrame>
       <p:sp>
         <p:nvSpPr>
           <p:cNvPr id="20" name="TextBox 19"/>
@@ -8358,7 +8979,7 @@
                           </a:solidFill>
                           <a:latin typeface="Calibri"/>
                         </a:rPr>
-                        <a:t>264</a:t>
+                        <a:t>210</a:t>
                       </a:r>
                     </a:p>
                   </a:txBody>
@@ -8401,7 +9022,7 @@
                           </a:solidFill>
                           <a:latin typeface="Calibri"/>
                         </a:rPr>
-                        <a:t>274</a:t>
+                        <a:t>218</a:t>
                       </a:r>
                     </a:p>
                   </a:txBody>
@@ -8444,7 +9065,7 @@
                           </a:solidFill>
                           <a:latin typeface="Calibri"/>
                         </a:rPr>
-                        <a:t>285</a:t>
+                        <a:t>227</a:t>
                       </a:r>
                     </a:p>
                   </a:txBody>
@@ -8487,7 +9108,7 @@
                           </a:solidFill>
                           <a:latin typeface="Calibri"/>
                         </a:rPr>
-                        <a:t>298</a:t>
+                        <a:t>237</a:t>
                       </a:r>
                     </a:p>
                   </a:txBody>
@@ -8530,7 +9151,7 @@
                           </a:solidFill>
                           <a:latin typeface="Calibri"/>
                         </a:rPr>
-                        <a:t>311</a:t>
+                        <a:t>248</a:t>
                       </a:r>
                     </a:p>
                   </a:txBody>
@@ -8618,7 +9239,7 @@
                           </a:solidFill>
                           <a:latin typeface="Calibri"/>
                         </a:rPr>
-                        <a:t>245</a:t>
+                        <a:t>195</a:t>
                       </a:r>
                     </a:p>
                   </a:txBody>
@@ -8661,7 +9282,7 @@
                           </a:solidFill>
                           <a:latin typeface="Calibri"/>
                         </a:rPr>
-                        <a:t>254</a:t>
+                        <a:t>202</a:t>
                       </a:r>
                     </a:p>
                   </a:txBody>
@@ -8704,7 +9325,7 @@
                           </a:solidFill>
                           <a:latin typeface="Calibri"/>
                         </a:rPr>
-                        <a:t>264</a:t>
+                        <a:t>210</a:t>
                       </a:r>
                     </a:p>
                   </a:txBody>
@@ -8747,7 +9368,7 @@
                           </a:solidFill>
                           <a:latin typeface="Calibri"/>
                         </a:rPr>
-                        <a:t>274</a:t>
+                        <a:t>218</a:t>
                       </a:r>
                     </a:p>
                   </a:txBody>
@@ -8790,7 +9411,7 @@
                           </a:solidFill>
                           <a:latin typeface="Calibri"/>
                         </a:rPr>
-                        <a:t>285</a:t>
+                        <a:t>227</a:t>
                       </a:r>
                     </a:p>
                   </a:txBody>
@@ -8878,7 +9499,7 @@
                           </a:solidFill>
                           <a:latin typeface="Calibri"/>
                         </a:rPr>
-                        <a:t>229</a:t>
+                        <a:t>182</a:t>
                       </a:r>
                     </a:p>
                   </a:txBody>
@@ -8921,7 +9542,7 @@
                           </a:solidFill>
                           <a:latin typeface="Calibri"/>
                         </a:rPr>
-                        <a:t>237</a:t>
+                        <a:t>188</a:t>
                       </a:r>
                     </a:p>
                   </a:txBody>
@@ -8964,7 +9585,7 @@
                           </a:solidFill>
                           <a:latin typeface="Calibri"/>
                         </a:rPr>
-                        <a:t>245</a:t>
+                        <a:t>195</a:t>
                       </a:r>
                     </a:p>
                   </a:txBody>
@@ -9007,7 +9628,7 @@
                           </a:solidFill>
                           <a:latin typeface="Calibri"/>
                         </a:rPr>
-                        <a:t>254</a:t>
+                        <a:t>202</a:t>
                       </a:r>
                     </a:p>
                   </a:txBody>
@@ -9050,7 +9671,7 @@
                           </a:solidFill>
                           <a:latin typeface="Calibri"/>
                         </a:rPr>
-                        <a:t>264</a:t>
+                        <a:t>210</a:t>
                       </a:r>
                     </a:p>
                   </a:txBody>
@@ -9138,7 +9759,7 @@
                           </a:solidFill>
                           <a:latin typeface="Calibri"/>
                         </a:rPr>
-                        <a:t>215</a:t>
+                        <a:t>171</a:t>
                       </a:r>
                     </a:p>
                   </a:txBody>
@@ -9181,7 +9802,7 @@
                           </a:solidFill>
                           <a:latin typeface="Calibri"/>
                         </a:rPr>
-                        <a:t>221</a:t>
+                        <a:t>176</a:t>
                       </a:r>
                     </a:p>
                   </a:txBody>
@@ -9224,7 +9845,7 @@
                           </a:solidFill>
                           <a:latin typeface="Calibri"/>
                         </a:rPr>
-                        <a:t>229</a:t>
+                        <a:t>182</a:t>
                       </a:r>
                     </a:p>
                   </a:txBody>
@@ -9267,7 +9888,7 @@
                           </a:solidFill>
                           <a:latin typeface="Calibri"/>
                         </a:rPr>
-                        <a:t>237</a:t>
+                        <a:t>188</a:t>
                       </a:r>
                     </a:p>
                   </a:txBody>
@@ -9310,7 +9931,7 @@
                           </a:solidFill>
                           <a:latin typeface="Calibri"/>
                         </a:rPr>
-                        <a:t>245</a:t>
+                        <a:t>195</a:t>
                       </a:r>
                     </a:p>
                   </a:txBody>
@@ -9398,7 +10019,7 @@
                           </a:solidFill>
                           <a:latin typeface="Calibri"/>
                         </a:rPr>
-                        <a:t>202</a:t>
+                        <a:t>161</a:t>
                       </a:r>
                     </a:p>
                   </a:txBody>
@@ -9441,7 +10062,7 @@
                           </a:solidFill>
                           <a:latin typeface="Calibri"/>
                         </a:rPr>
-                        <a:t>208</a:t>
+                        <a:t>166</a:t>
                       </a:r>
                     </a:p>
                   </a:txBody>
@@ -9484,7 +10105,7 @@
                           </a:solidFill>
                           <a:latin typeface="Calibri"/>
                         </a:rPr>
-                        <a:t>215</a:t>
+                        <a:t>171</a:t>
                       </a:r>
                     </a:p>
                   </a:txBody>
@@ -9527,7 +10148,7 @@
                           </a:solidFill>
                           <a:latin typeface="Calibri"/>
                         </a:rPr>
-                        <a:t>221</a:t>
+                        <a:t>176</a:t>
                       </a:r>
                     </a:p>
                   </a:txBody>
@@ -9570,7 +10191,7 @@
                           </a:solidFill>
                           <a:latin typeface="Calibri"/>
                         </a:rPr>
-                        <a:t>229</a:t>
+                        <a:t>182</a:t>
                       </a:r>
                     </a:p>
                   </a:txBody>
@@ -9605,162 +10226,6 @@
           </a:graphicData>
         </a:graphic>
       </p:graphicFrame>
-      <p:sp>
-        <p:nvSpPr>
-          <p:cNvPr id="22" name="Rectangle 21"/>
-          <p:cNvSpPr/>
-          <p:nvPr/>
-        </p:nvSpPr>
-        <p:spPr>
-          <a:xfrm>
-            <a:off x="367200" y="4031999"/>
-            <a:ext cx="8413200" cy="547200"/>
-          </a:xfrm>
-          <a:prstGeom prst="rect">
-            <a:avLst/>
-          </a:prstGeom>
-          <a:solidFill>
-            <a:srgbClr val="F5F7FA"/>
-          </a:solidFill>
-          <a:ln>
-            <a:noFill/>
-          </a:ln>
-        </p:spPr>
-        <p:style>
-          <a:lnRef idx="1">
-            <a:schemeClr val="accent1"/>
-          </a:lnRef>
-          <a:fillRef idx="3">
-            <a:schemeClr val="accent1"/>
-          </a:fillRef>
-          <a:effectRef idx="2">
-            <a:schemeClr val="accent1"/>
-          </a:effectRef>
-          <a:fontRef idx="minor">
-            <a:schemeClr val="lt1"/>
-          </a:fontRef>
-        </p:style>
-        <p:txBody>
-          <a:bodyPr rtlCol="0" anchor="ctr"/>
-          <a:lstStyle/>
-          <a:p>
-            <a:pPr algn="ctr"/>
-          </a:p>
-        </p:txBody>
-      </p:sp>
-      <p:sp>
-        <p:nvSpPr>
-          <p:cNvPr id="23" name="Rectangle 22"/>
-          <p:cNvSpPr/>
-          <p:nvPr/>
-        </p:nvSpPr>
-        <p:spPr>
-          <a:xfrm>
-            <a:off x="367200" y="4031999"/>
-            <a:ext cx="79200" cy="547200"/>
-          </a:xfrm>
-          <a:prstGeom prst="rect">
-            <a:avLst/>
-          </a:prstGeom>
-          <a:solidFill>
-            <a:srgbClr val="2E5FA3"/>
-          </a:solidFill>
-          <a:ln>
-            <a:noFill/>
-          </a:ln>
-        </p:spPr>
-        <p:style>
-          <a:lnRef idx="1">
-            <a:schemeClr val="accent1"/>
-          </a:lnRef>
-          <a:fillRef idx="3">
-            <a:schemeClr val="accent1"/>
-          </a:fillRef>
-          <a:effectRef idx="2">
-            <a:schemeClr val="accent1"/>
-          </a:effectRef>
-          <a:fontRef idx="minor">
-            <a:schemeClr val="lt1"/>
-          </a:fontRef>
-        </p:style>
-        <p:txBody>
-          <a:bodyPr rtlCol="0" anchor="ctr"/>
-          <a:lstStyle/>
-          <a:p>
-            <a:pPr algn="ctr"/>
-          </a:p>
-        </p:txBody>
-      </p:sp>
-      <p:sp>
-        <p:nvSpPr>
-          <p:cNvPr id="24" name="TextBox 23"/>
-          <p:cNvSpPr txBox="1"/>
-          <p:nvPr/>
-        </p:nvSpPr>
-        <p:spPr>
-          <a:xfrm>
-            <a:off x="475200" y="4060800"/>
-            <a:ext cx="8298000" cy="151200"/>
-          </a:xfrm>
-          <a:prstGeom prst="rect">
-            <a:avLst/>
-          </a:prstGeom>
-          <a:noFill/>
-        </p:spPr>
-        <p:txBody>
-          <a:bodyPr wrap="none">
-            <a:spAutoFit/>
-          </a:bodyPr>
-          <a:lstStyle/>
-          <a:p>
-            <a:pPr algn="l"/>
-            <a:r>
-              <a:rPr sz="950" b="1" i="0">
-                <a:solidFill>
-                  <a:srgbClr val="1B3A6B"/>
-                </a:solidFill>
-                <a:latin typeface="Calibri"/>
-              </a:rPr>
-              <a:t>DCF base implique upside de +26% — valorisation attractive</a:t>
-            </a:r>
-          </a:p>
-        </p:txBody>
-      </p:sp>
-      <p:sp>
-        <p:nvSpPr>
-          <p:cNvPr id="25" name="TextBox 24"/>
-          <p:cNvSpPr txBox="1"/>
-          <p:nvPr/>
-        </p:nvSpPr>
-        <p:spPr>
-          <a:xfrm>
-            <a:off x="475200" y="4230000"/>
-            <a:ext cx="8298000" cy="324000"/>
-          </a:xfrm>
-          <a:prstGeom prst="rect">
-            <a:avLst/>
-          </a:prstGeom>
-          <a:noFill/>
-        </p:spPr>
-        <p:txBody>
-          <a:bodyPr wrap="square">
-            <a:spAutoFit/>
-          </a:bodyPr>
-          <a:lstStyle/>
-          <a:p>
-            <a:pPr algn="l"/>
-            <a:r>
-              <a:rPr sz="850" b="0" i="0">
-                <a:solidFill>
-                  <a:srgbClr val="555555"/>
-                </a:solidFill>
-                <a:latin typeface="Calibri"/>
-              </a:rPr>
-              <a:t>Avec un WACC de 17,1% et un TGR de 3,0%, le prix implicite DCF est de 245 USD (base), soit un upside de 26% vs le cours actuel. Cette valorisation suggère une sous-évaluation structurelle, mais la prime de croissance est déjà partiellement intégrée. Une accélération des revenus Data Center au-delà des attentes débloquerait la valeur.</a:t>
-            </a:r>
-          </a:p>
-        </p:txBody>
-      </p:sp>
     </p:spTree>
   </p:cSld>
   <p:clrMapOvr>
@@ -10370,7 +10835,7 @@
         </p:nvGraphicFramePr>
         <p:xfrm>
           <a:off x="367200" y="914400"/>
-          <a:ext cx="8413200" cy="2015999"/>
+          <a:ext cx="8413200" cy="871200"/>
         </p:xfrm>
         <a:graphic>
           <a:graphicData uri="http://schemas.openxmlformats.org/drawingml/2006/table">
@@ -10388,7 +10853,7 @@
                 <a:gridCol w="1093716"/>
                 <a:gridCol w="1009584"/>
               </a:tblGrid>
-              <a:tr h="251999">
+              <a:tr h="290400">
                 <a:tc>
                   <a:txBody>
                     <a:bodyPr/>
@@ -10574,7 +11039,7 @@
                   </a:tcPr>
                 </a:tc>
               </a:tr>
-              <a:tr h="251999">
+              <a:tr h="290400">
                 <a:tc>
                   <a:txBody>
                     <a:bodyPr/>
@@ -10634,7 +11099,7 @@
                           </a:solidFill>
                           <a:latin typeface="Calibri"/>
                         </a:rPr>
-                        <a:t>4 726,6</a:t>
+                        <a:t>4 736,1</a:t>
                       </a:r>
                     </a:p>
                   </a:txBody>
@@ -10657,7 +11122,7 @@
                           </a:solidFill>
                           <a:latin typeface="Calibri"/>
                         </a:rPr>
-                        <a:t>54,9x</a:t>
+                        <a:t>55,0x</a:t>
                       </a:r>
                     </a:p>
                   </a:txBody>
@@ -10680,7 +11145,7 @@
                           </a:solidFill>
                           <a:latin typeface="Calibri"/>
                         </a:rPr>
-                        <a:t>36,2x</a:t>
+                        <a:t>36,3x</a:t>
                       </a:r>
                     </a:p>
                   </a:txBody>
@@ -10703,7 +11168,7 @@
                           </a:solidFill>
                           <a:latin typeface="Calibri"/>
                         </a:rPr>
-                        <a:t>64,8x</a:t>
+                        <a:t>65,0x</a:t>
                       </a:r>
                     </a:p>
                   </a:txBody>
@@ -10760,937 +11225,7 @@
                   </a:tcPr>
                 </a:tc>
               </a:tr>
-              <a:tr h="251999">
-                <a:tc>
-                  <a:txBody>
-                    <a:bodyPr/>
-                    <a:lstStyle/>
-                    <a:p>
-                      <a:pPr algn="l"/>
-                      <a:r>
-                        <a:rPr sz="800" b="0" i="0">
-                          <a:solidFill>
-                            <a:srgbClr val="0D0D0D"/>
-                          </a:solidFill>
-                          <a:latin typeface="Calibri"/>
-                        </a:rPr>
-                        <a:t>Advanced Micro Devices</a:t>
-                      </a:r>
-                    </a:p>
-                  </a:txBody>
-                  <a:tcPr>
-                    <a:solidFill>
-                      <a:srgbClr val="FFFFFF"/>
-                    </a:solidFill>
-                  </a:tcPr>
-                </a:tc>
-                <a:tc>
-                  <a:txBody>
-                    <a:bodyPr/>
-                    <a:lstStyle/>
-                    <a:p>
-                      <a:pPr algn="ctr"/>
-                      <a:r>
-                        <a:rPr sz="750" b="0" i="0">
-                          <a:solidFill>
-                            <a:srgbClr val="555555"/>
-                          </a:solidFill>
-                          <a:latin typeface="Calibri"/>
-                        </a:rPr>
-                        <a:t>AMD</a:t>
-                      </a:r>
-                    </a:p>
-                  </a:txBody>
-                  <a:tcPr>
-                    <a:solidFill>
-                      <a:srgbClr val="FFFFFF"/>
-                    </a:solidFill>
-                  </a:tcPr>
-                </a:tc>
-                <a:tc>
-                  <a:txBody>
-                    <a:bodyPr/>
-                    <a:lstStyle/>
-                    <a:p>
-                      <a:pPr algn="ctr"/>
-                      <a:r>
-                        <a:rPr sz="800" b="0" i="0">
-                          <a:solidFill>
-                            <a:srgbClr val="0D0D0D"/>
-                          </a:solidFill>
-                          <a:latin typeface="Calibri"/>
-                        </a:rPr>
-                        <a:t>220,0</a:t>
-                      </a:r>
-                    </a:p>
-                  </a:txBody>
-                  <a:tcPr>
-                    <a:solidFill>
-                      <a:srgbClr val="FFFFFF"/>
-                    </a:solidFill>
-                  </a:tcPr>
-                </a:tc>
-                <a:tc>
-                  <a:txBody>
-                    <a:bodyPr/>
-                    <a:lstStyle/>
-                    <a:p>
-                      <a:pPr algn="ctr"/>
-                      <a:r>
-                        <a:rPr sz="800" b="0" i="0">
-                          <a:solidFill>
-                            <a:srgbClr val="0D0D0D"/>
-                          </a:solidFill>
-                          <a:latin typeface="Calibri"/>
-                        </a:rPr>
-                        <a:t>25,0x</a:t>
-                      </a:r>
-                    </a:p>
-                  </a:txBody>
-                  <a:tcPr>
-                    <a:solidFill>
-                      <a:srgbClr val="FFFFFF"/>
-                    </a:solidFill>
-                  </a:tcPr>
-                </a:tc>
-                <a:tc>
-                  <a:txBody>
-                    <a:bodyPr/>
-                    <a:lstStyle/>
-                    <a:p>
-                      <a:pPr algn="ctr"/>
-                      <a:r>
-                        <a:rPr sz="800" b="0" i="0">
-                          <a:solidFill>
-                            <a:srgbClr val="0D0D0D"/>
-                          </a:solidFill>
-                          <a:latin typeface="Calibri"/>
-                        </a:rPr>
-                        <a:t>5,0x</a:t>
-                      </a:r>
-                    </a:p>
-                  </a:txBody>
-                  <a:tcPr>
-                    <a:solidFill>
-                      <a:srgbClr val="FFFFFF"/>
-                    </a:solidFill>
-                  </a:tcPr>
-                </a:tc>
-                <a:tc>
-                  <a:txBody>
-                    <a:bodyPr/>
-                    <a:lstStyle/>
-                    <a:p>
-                      <a:pPr algn="ctr"/>
-                      <a:r>
-                        <a:rPr sz="800" b="0" i="0">
-                          <a:solidFill>
-                            <a:srgbClr val="0D0D0D"/>
-                          </a:solidFill>
-                          <a:latin typeface="Calibri"/>
-                        </a:rPr>
-                        <a:t>45,0x</a:t>
-                      </a:r>
-                    </a:p>
-                  </a:txBody>
-                  <a:tcPr>
-                    <a:solidFill>
-                      <a:srgbClr val="FFFFFF"/>
-                    </a:solidFill>
-                  </a:tcPr>
-                </a:tc>
-                <a:tc>
-                  <a:txBody>
-                    <a:bodyPr/>
-                    <a:lstStyle/>
-                    <a:p>
-                      <a:pPr algn="ctr"/>
-                      <a:r>
-                        <a:rPr sz="800" b="0" i="0">
-                          <a:solidFill>
-                            <a:srgbClr val="0D0D0D"/>
-                          </a:solidFill>
-                          <a:latin typeface="Calibri"/>
-                        </a:rPr>
-                        <a:t>52,0 %</a:t>
-                      </a:r>
-                    </a:p>
-                  </a:txBody>
-                  <a:tcPr>
-                    <a:solidFill>
-                      <a:srgbClr val="FFFFFF"/>
-                    </a:solidFill>
-                  </a:tcPr>
-                </a:tc>
-                <a:tc>
-                  <a:txBody>
-                    <a:bodyPr/>
-                    <a:lstStyle/>
-                    <a:p>
-                      <a:pPr algn="ctr"/>
-                      <a:r>
-                        <a:rPr sz="800" b="0" i="0">
-                          <a:solidFill>
-                            <a:srgbClr val="0D0D0D"/>
-                          </a:solidFill>
-                          <a:latin typeface="Calibri"/>
-                        </a:rPr>
-                        <a:t>35,0 %</a:t>
-                      </a:r>
-                    </a:p>
-                  </a:txBody>
-                  <a:tcPr>
-                    <a:solidFill>
-                      <a:srgbClr val="FFFFFF"/>
-                    </a:solidFill>
-                  </a:tcPr>
-                </a:tc>
-              </a:tr>
-              <a:tr h="251999">
-                <a:tc>
-                  <a:txBody>
-                    <a:bodyPr/>
-                    <a:lstStyle/>
-                    <a:p>
-                      <a:pPr algn="l"/>
-                      <a:r>
-                        <a:rPr sz="800" b="0" i="0">
-                          <a:solidFill>
-                            <a:srgbClr val="0D0D0D"/>
-                          </a:solidFill>
-                          <a:latin typeface="Calibri"/>
-                        </a:rPr>
-                        <a:t>Intel Corporation</a:t>
-                      </a:r>
-                    </a:p>
-                  </a:txBody>
-                  <a:tcPr>
-                    <a:solidFill>
-                      <a:srgbClr val="F7F8FA"/>
-                    </a:solidFill>
-                  </a:tcPr>
-                </a:tc>
-                <a:tc>
-                  <a:txBody>
-                    <a:bodyPr/>
-                    <a:lstStyle/>
-                    <a:p>
-                      <a:pPr algn="ctr"/>
-                      <a:r>
-                        <a:rPr sz="750" b="0" i="0">
-                          <a:solidFill>
-                            <a:srgbClr val="555555"/>
-                          </a:solidFill>
-                          <a:latin typeface="Calibri"/>
-                        </a:rPr>
-                        <a:t>INTC</a:t>
-                      </a:r>
-                    </a:p>
-                  </a:txBody>
-                  <a:tcPr>
-                    <a:solidFill>
-                      <a:srgbClr val="F7F8FA"/>
-                    </a:solidFill>
-                  </a:tcPr>
-                </a:tc>
-                <a:tc>
-                  <a:txBody>
-                    <a:bodyPr/>
-                    <a:lstStyle/>
-                    <a:p>
-                      <a:pPr algn="ctr"/>
-                      <a:r>
-                        <a:rPr sz="800" b="0" i="0">
-                          <a:solidFill>
-                            <a:srgbClr val="0D0D0D"/>
-                          </a:solidFill>
-                          <a:latin typeface="Calibri"/>
-                        </a:rPr>
-                        <a:t>180,0</a:t>
-                      </a:r>
-                    </a:p>
-                  </a:txBody>
-                  <a:tcPr>
-                    <a:solidFill>
-                      <a:srgbClr val="F7F8FA"/>
-                    </a:solidFill>
-                  </a:tcPr>
-                </a:tc>
-                <a:tc>
-                  <a:txBody>
-                    <a:bodyPr/>
-                    <a:lstStyle/>
-                    <a:p>
-                      <a:pPr algn="ctr"/>
-                      <a:r>
-                        <a:rPr sz="800" b="0" i="0">
-                          <a:solidFill>
-                            <a:srgbClr val="0D0D0D"/>
-                          </a:solidFill>
-                          <a:latin typeface="Calibri"/>
-                        </a:rPr>
-                        <a:t>8,0x</a:t>
-                      </a:r>
-                    </a:p>
-                  </a:txBody>
-                  <a:tcPr>
-                    <a:solidFill>
-                      <a:srgbClr val="F7F8FA"/>
-                    </a:solidFill>
-                  </a:tcPr>
-                </a:tc>
-                <a:tc>
-                  <a:txBody>
-                    <a:bodyPr/>
-                    <a:lstStyle/>
-                    <a:p>
-                      <a:pPr algn="ctr"/>
-                      <a:r>
-                        <a:rPr sz="800" b="0" i="0">
-                          <a:solidFill>
-                            <a:srgbClr val="0D0D0D"/>
-                          </a:solidFill>
-                          <a:latin typeface="Calibri"/>
-                        </a:rPr>
-                        <a:t>1,5x</a:t>
-                      </a:r>
-                    </a:p>
-                  </a:txBody>
-                  <a:tcPr>
-                    <a:solidFill>
-                      <a:srgbClr val="F7F8FA"/>
-                    </a:solidFill>
-                  </a:tcPr>
-                </a:tc>
-                <a:tc>
-                  <a:txBody>
-                    <a:bodyPr/>
-                    <a:lstStyle/>
-                    <a:p>
-                      <a:pPr algn="ctr"/>
-                      <a:r>
-                        <a:rPr sz="800" b="0" i="0">
-                          <a:solidFill>
-                            <a:srgbClr val="0D0D0D"/>
-                          </a:solidFill>
-                          <a:latin typeface="Calibri"/>
-                        </a:rPr>
-                        <a:t>12,0x</a:t>
-                      </a:r>
-                    </a:p>
-                  </a:txBody>
-                  <a:tcPr>
-                    <a:solidFill>
-                      <a:srgbClr val="F7F8FA"/>
-                    </a:solidFill>
-                  </a:tcPr>
-                </a:tc>
-                <a:tc>
-                  <a:txBody>
-                    <a:bodyPr/>
-                    <a:lstStyle/>
-                    <a:p>
-                      <a:pPr algn="ctr"/>
-                      <a:r>
-                        <a:rPr sz="800" b="0" i="0">
-                          <a:solidFill>
-                            <a:srgbClr val="0D0D0D"/>
-                          </a:solidFill>
-                          <a:latin typeface="Calibri"/>
-                        </a:rPr>
-                        <a:t>55,0 %</a:t>
-                      </a:r>
-                    </a:p>
-                  </a:txBody>
-                  <a:tcPr>
-                    <a:solidFill>
-                      <a:srgbClr val="F7F8FA"/>
-                    </a:solidFill>
-                  </a:tcPr>
-                </a:tc>
-                <a:tc>
-                  <a:txBody>
-                    <a:bodyPr/>
-                    <a:lstStyle/>
-                    <a:p>
-                      <a:pPr algn="ctr"/>
-                      <a:r>
-                        <a:rPr sz="800" b="0" i="0">
-                          <a:solidFill>
-                            <a:srgbClr val="0D0D0D"/>
-                          </a:solidFill>
-                          <a:latin typeface="Calibri"/>
-                        </a:rPr>
-                        <a:t>25,0 %</a:t>
-                      </a:r>
-                    </a:p>
-                  </a:txBody>
-                  <a:tcPr>
-                    <a:solidFill>
-                      <a:srgbClr val="F7F8FA"/>
-                    </a:solidFill>
-                  </a:tcPr>
-                </a:tc>
-              </a:tr>
-              <a:tr h="251999">
-                <a:tc>
-                  <a:txBody>
-                    <a:bodyPr/>
-                    <a:lstStyle/>
-                    <a:p>
-                      <a:pPr algn="l"/>
-                      <a:r>
-                        <a:rPr sz="800" b="0" i="0">
-                          <a:solidFill>
-                            <a:srgbClr val="0D0D0D"/>
-                          </a:solidFill>
-                          <a:latin typeface="Calibri"/>
-                        </a:rPr>
-                        <a:t>Qualcomm Incorporated</a:t>
-                      </a:r>
-                    </a:p>
-                  </a:txBody>
-                  <a:tcPr>
-                    <a:solidFill>
-                      <a:srgbClr val="FFFFFF"/>
-                    </a:solidFill>
-                  </a:tcPr>
-                </a:tc>
-                <a:tc>
-                  <a:txBody>
-                    <a:bodyPr/>
-                    <a:lstStyle/>
-                    <a:p>
-                      <a:pPr algn="ctr"/>
-                      <a:r>
-                        <a:rPr sz="750" b="0" i="0">
-                          <a:solidFill>
-                            <a:srgbClr val="555555"/>
-                          </a:solidFill>
-                          <a:latin typeface="Calibri"/>
-                        </a:rPr>
-                        <a:t>QCOM</a:t>
-                      </a:r>
-                    </a:p>
-                  </a:txBody>
-                  <a:tcPr>
-                    <a:solidFill>
-                      <a:srgbClr val="FFFFFF"/>
-                    </a:solidFill>
-                  </a:tcPr>
-                </a:tc>
-                <a:tc>
-                  <a:txBody>
-                    <a:bodyPr/>
-                    <a:lstStyle/>
-                    <a:p>
-                      <a:pPr algn="ctr"/>
-                      <a:r>
-                        <a:rPr sz="800" b="0" i="0">
-                          <a:solidFill>
-                            <a:srgbClr val="0D0D0D"/>
-                          </a:solidFill>
-                          <a:latin typeface="Calibri"/>
-                        </a:rPr>
-                        <a:t>200,0</a:t>
-                      </a:r>
-                    </a:p>
-                  </a:txBody>
-                  <a:tcPr>
-                    <a:solidFill>
-                      <a:srgbClr val="FFFFFF"/>
-                    </a:solidFill>
-                  </a:tcPr>
-                </a:tc>
-                <a:tc>
-                  <a:txBody>
-                    <a:bodyPr/>
-                    <a:lstStyle/>
-                    <a:p>
-                      <a:pPr algn="ctr"/>
-                      <a:r>
-                        <a:rPr sz="800" b="0" i="0">
-                          <a:solidFill>
-                            <a:srgbClr val="0D0D0D"/>
-                          </a:solidFill>
-                          <a:latin typeface="Calibri"/>
-                        </a:rPr>
-                        <a:t>18,0x</a:t>
-                      </a:r>
-                    </a:p>
-                  </a:txBody>
-                  <a:tcPr>
-                    <a:solidFill>
-                      <a:srgbClr val="FFFFFF"/>
-                    </a:solidFill>
-                  </a:tcPr>
-                </a:tc>
-                <a:tc>
-                  <a:txBody>
-                    <a:bodyPr/>
-                    <a:lstStyle/>
-                    <a:p>
-                      <a:pPr algn="ctr"/>
-                      <a:r>
-                        <a:rPr sz="800" b="0" i="0">
-                          <a:solidFill>
-                            <a:srgbClr val="0D0D0D"/>
-                          </a:solidFill>
-                          <a:latin typeface="Calibri"/>
-                        </a:rPr>
-                        <a:t>6,5x</a:t>
-                      </a:r>
-                    </a:p>
-                  </a:txBody>
-                  <a:tcPr>
-                    <a:solidFill>
-                      <a:srgbClr val="FFFFFF"/>
-                    </a:solidFill>
-                  </a:tcPr>
-                </a:tc>
-                <a:tc>
-                  <a:txBody>
-                    <a:bodyPr/>
-                    <a:lstStyle/>
-                    <a:p>
-                      <a:pPr algn="ctr"/>
-                      <a:r>
-                        <a:rPr sz="800" b="0" i="0">
-                          <a:solidFill>
-                            <a:srgbClr val="0D0D0D"/>
-                          </a:solidFill>
-                          <a:latin typeface="Calibri"/>
-                        </a:rPr>
-                        <a:t>22,0x</a:t>
-                      </a:r>
-                    </a:p>
-                  </a:txBody>
-                  <a:tcPr>
-                    <a:solidFill>
-                      <a:srgbClr val="FFFFFF"/>
-                    </a:solidFill>
-                  </a:tcPr>
-                </a:tc>
-                <a:tc>
-                  <a:txBody>
-                    <a:bodyPr/>
-                    <a:lstStyle/>
-                    <a:p>
-                      <a:pPr algn="ctr"/>
-                      <a:r>
-                        <a:rPr sz="800" b="0" i="0">
-                          <a:solidFill>
-                            <a:srgbClr val="0D0D0D"/>
-                          </a:solidFill>
-                          <a:latin typeface="Calibri"/>
-                        </a:rPr>
-                        <a:t>62,0 %</a:t>
-                      </a:r>
-                    </a:p>
-                  </a:txBody>
-                  <a:tcPr>
-                    <a:solidFill>
-                      <a:srgbClr val="FFFFFF"/>
-                    </a:solidFill>
-                  </a:tcPr>
-                </a:tc>
-                <a:tc>
-                  <a:txBody>
-                    <a:bodyPr/>
-                    <a:lstStyle/>
-                    <a:p>
-                      <a:pPr algn="ctr"/>
-                      <a:r>
-                        <a:rPr sz="800" b="0" i="0">
-                          <a:solidFill>
-                            <a:srgbClr val="0D0D0D"/>
-                          </a:solidFill>
-                          <a:latin typeface="Calibri"/>
-                        </a:rPr>
-                        <a:t>45,0 %</a:t>
-                      </a:r>
-                    </a:p>
-                  </a:txBody>
-                  <a:tcPr>
-                    <a:solidFill>
-                      <a:srgbClr val="FFFFFF"/>
-                    </a:solidFill>
-                  </a:tcPr>
-                </a:tc>
-              </a:tr>
-              <a:tr h="251999">
-                <a:tc>
-                  <a:txBody>
-                    <a:bodyPr/>
-                    <a:lstStyle/>
-                    <a:p>
-                      <a:pPr algn="l"/>
-                      <a:r>
-                        <a:rPr sz="800" b="0" i="0">
-                          <a:solidFill>
-                            <a:srgbClr val="0D0D0D"/>
-                          </a:solidFill>
-                          <a:latin typeface="Calibri"/>
-                        </a:rPr>
-                        <a:t>Broadcom Incorporated</a:t>
-                      </a:r>
-                    </a:p>
-                  </a:txBody>
-                  <a:tcPr>
-                    <a:solidFill>
-                      <a:srgbClr val="F7F8FA"/>
-                    </a:solidFill>
-                  </a:tcPr>
-                </a:tc>
-                <a:tc>
-                  <a:txBody>
-                    <a:bodyPr/>
-                    <a:lstStyle/>
-                    <a:p>
-                      <a:pPr algn="ctr"/>
-                      <a:r>
-                        <a:rPr sz="750" b="0" i="0">
-                          <a:solidFill>
-                            <a:srgbClr val="555555"/>
-                          </a:solidFill>
-                          <a:latin typeface="Calibri"/>
-                        </a:rPr>
-                        <a:t>AVGO</a:t>
-                      </a:r>
-                    </a:p>
-                  </a:txBody>
-                  <a:tcPr>
-                    <a:solidFill>
-                      <a:srgbClr val="F7F8FA"/>
-                    </a:solidFill>
-                  </a:tcPr>
-                </a:tc>
-                <a:tc>
-                  <a:txBody>
-                    <a:bodyPr/>
-                    <a:lstStyle/>
-                    <a:p>
-                      <a:pPr algn="ctr"/>
-                      <a:r>
-                        <a:rPr sz="800" b="0" i="0">
-                          <a:solidFill>
-                            <a:srgbClr val="0D0D0D"/>
-                          </a:solidFill>
-                          <a:latin typeface="Calibri"/>
-                        </a:rPr>
-                        <a:t>500,0</a:t>
-                      </a:r>
-                    </a:p>
-                  </a:txBody>
-                  <a:tcPr>
-                    <a:solidFill>
-                      <a:srgbClr val="F7F8FA"/>
-                    </a:solidFill>
-                  </a:tcPr>
-                </a:tc>
-                <a:tc>
-                  <a:txBody>
-                    <a:bodyPr/>
-                    <a:lstStyle/>
-                    <a:p>
-                      <a:pPr algn="ctr"/>
-                      <a:r>
-                        <a:rPr sz="800" b="0" i="0">
-                          <a:solidFill>
-                            <a:srgbClr val="0D0D0D"/>
-                          </a:solidFill>
-                          <a:latin typeface="Calibri"/>
-                        </a:rPr>
-                        <a:t>30,0x</a:t>
-                      </a:r>
-                    </a:p>
-                  </a:txBody>
-                  <a:tcPr>
-                    <a:solidFill>
-                      <a:srgbClr val="F7F8FA"/>
-                    </a:solidFill>
-                  </a:tcPr>
-                </a:tc>
-                <a:tc>
-                  <a:txBody>
-                    <a:bodyPr/>
-                    <a:lstStyle/>
-                    <a:p>
-                      <a:pPr algn="ctr"/>
-                      <a:r>
-                        <a:rPr sz="800" b="0" i="0">
-                          <a:solidFill>
-                            <a:srgbClr val="0D0D0D"/>
-                          </a:solidFill>
-                          <a:latin typeface="Calibri"/>
-                        </a:rPr>
-                        <a:t>12,0x</a:t>
-                      </a:r>
-                    </a:p>
-                  </a:txBody>
-                  <a:tcPr>
-                    <a:solidFill>
-                      <a:srgbClr val="F7F8FA"/>
-                    </a:solidFill>
-                  </a:tcPr>
-                </a:tc>
-                <a:tc>
-                  <a:txBody>
-                    <a:bodyPr/>
-                    <a:lstStyle/>
-                    <a:p>
-                      <a:pPr algn="ctr"/>
-                      <a:r>
-                        <a:rPr sz="800" b="0" i="0">
-                          <a:solidFill>
-                            <a:srgbClr val="0D0D0D"/>
-                          </a:solidFill>
-                          <a:latin typeface="Calibri"/>
-                        </a:rPr>
-                        <a:t>40,0x</a:t>
-                      </a:r>
-                    </a:p>
-                  </a:txBody>
-                  <a:tcPr>
-                    <a:solidFill>
-                      <a:srgbClr val="F7F8FA"/>
-                    </a:solidFill>
-                  </a:tcPr>
-                </a:tc>
-                <a:tc>
-                  <a:txBody>
-                    <a:bodyPr/>
-                    <a:lstStyle/>
-                    <a:p>
-                      <a:pPr algn="ctr"/>
-                      <a:r>
-                        <a:rPr sz="800" b="0" i="0">
-                          <a:solidFill>
-                            <a:srgbClr val="0D0D0D"/>
-                          </a:solidFill>
-                          <a:latin typeface="Calibri"/>
-                        </a:rPr>
-                        <a:t>70,0 %</a:t>
-                      </a:r>
-                    </a:p>
-                  </a:txBody>
-                  <a:tcPr>
-                    <a:solidFill>
-                      <a:srgbClr val="F7F8FA"/>
-                    </a:solidFill>
-                  </a:tcPr>
-                </a:tc>
-                <a:tc>
-                  <a:txBody>
-                    <a:bodyPr/>
-                    <a:lstStyle/>
-                    <a:p>
-                      <a:pPr algn="ctr"/>
-                      <a:r>
-                        <a:rPr sz="800" b="0" i="0">
-                          <a:solidFill>
-                            <a:srgbClr val="0D0D0D"/>
-                          </a:solidFill>
-                          <a:latin typeface="Calibri"/>
-                        </a:rPr>
-                        <a:t>60,0 %</a:t>
-                      </a:r>
-                    </a:p>
-                  </a:txBody>
-                  <a:tcPr>
-                    <a:solidFill>
-                      <a:srgbClr val="F7F8FA"/>
-                    </a:solidFill>
-                  </a:tcPr>
-                </a:tc>
-              </a:tr>
-              <a:tr h="251999">
-                <a:tc>
-                  <a:txBody>
-                    <a:bodyPr/>
-                    <a:lstStyle/>
-                    <a:p>
-                      <a:pPr algn="l"/>
-                      <a:r>
-                        <a:rPr sz="800" b="0" i="0">
-                          <a:solidFill>
-                            <a:srgbClr val="0D0D0D"/>
-                          </a:solidFill>
-                          <a:latin typeface="Calibri"/>
-                        </a:rPr>
-                        <a:t>ASML Holding</a:t>
-                      </a:r>
-                    </a:p>
-                  </a:txBody>
-                  <a:tcPr>
-                    <a:solidFill>
-                      <a:srgbClr val="FFFFFF"/>
-                    </a:solidFill>
-                  </a:tcPr>
-                </a:tc>
-                <a:tc>
-                  <a:txBody>
-                    <a:bodyPr/>
-                    <a:lstStyle/>
-                    <a:p>
-                      <a:pPr algn="ctr"/>
-                      <a:r>
-                        <a:rPr sz="750" b="0" i="0">
-                          <a:solidFill>
-                            <a:srgbClr val="555555"/>
-                          </a:solidFill>
-                          <a:latin typeface="Calibri"/>
-                        </a:rPr>
-                        <a:t>ASML</a:t>
-                      </a:r>
-                    </a:p>
-                  </a:txBody>
-                  <a:tcPr>
-                    <a:solidFill>
-                      <a:srgbClr val="FFFFFF"/>
-                    </a:solidFill>
-                  </a:tcPr>
-                </a:tc>
-                <a:tc>
-                  <a:txBody>
-                    <a:bodyPr/>
-                    <a:lstStyle/>
-                    <a:p>
-                      <a:pPr algn="ctr"/>
-                      <a:r>
-                        <a:rPr sz="800" b="0" i="0">
-                          <a:solidFill>
-                            <a:srgbClr val="0D0D0D"/>
-                          </a:solidFill>
-                          <a:latin typeface="Calibri"/>
-                        </a:rPr>
-                        <a:t>350,0</a:t>
-                      </a:r>
-                    </a:p>
-                  </a:txBody>
-                  <a:tcPr>
-                    <a:solidFill>
-                      <a:srgbClr val="FFFFFF"/>
-                    </a:solidFill>
-                  </a:tcPr>
-                </a:tc>
-                <a:tc>
-                  <a:txBody>
-                    <a:bodyPr/>
-                    <a:lstStyle/>
-                    <a:p>
-                      <a:pPr algn="ctr"/>
-                      <a:r>
-                        <a:rPr sz="800" b="0" i="0">
-                          <a:solidFill>
-                            <a:srgbClr val="0D0D0D"/>
-                          </a:solidFill>
-                          <a:latin typeface="Calibri"/>
-                        </a:rPr>
-                        <a:t>28,0x</a:t>
-                      </a:r>
-                    </a:p>
-                  </a:txBody>
-                  <a:tcPr>
-                    <a:solidFill>
-                      <a:srgbClr val="FFFFFF"/>
-                    </a:solidFill>
-                  </a:tcPr>
-                </a:tc>
-                <a:tc>
-                  <a:txBody>
-                    <a:bodyPr/>
-                    <a:lstStyle/>
-                    <a:p>
-                      <a:pPr algn="ctr"/>
-                      <a:r>
-                        <a:rPr sz="800" b="0" i="0">
-                          <a:solidFill>
-                            <a:srgbClr val="0D0D0D"/>
-                          </a:solidFill>
-                          <a:latin typeface="Calibri"/>
-                        </a:rPr>
-                        <a:t>10,0x</a:t>
-                      </a:r>
-                    </a:p>
-                  </a:txBody>
-                  <a:tcPr>
-                    <a:solidFill>
-                      <a:srgbClr val="FFFFFF"/>
-                    </a:solidFill>
-                  </a:tcPr>
-                </a:tc>
-                <a:tc>
-                  <a:txBody>
-                    <a:bodyPr/>
-                    <a:lstStyle/>
-                    <a:p>
-                      <a:pPr algn="ctr"/>
-                      <a:r>
-                        <a:rPr sz="800" b="0" i="0">
-                          <a:solidFill>
-                            <a:srgbClr val="0D0D0D"/>
-                          </a:solidFill>
-                          <a:latin typeface="Calibri"/>
-                        </a:rPr>
-                        <a:t>35,0x</a:t>
-                      </a:r>
-                    </a:p>
-                  </a:txBody>
-                  <a:tcPr>
-                    <a:solidFill>
-                      <a:srgbClr val="FFFFFF"/>
-                    </a:solidFill>
-                  </a:tcPr>
-                </a:tc>
-                <a:tc>
-                  <a:txBody>
-                    <a:bodyPr/>
-                    <a:lstStyle/>
-                    <a:p>
-                      <a:pPr algn="ctr"/>
-                      <a:r>
-                        <a:rPr sz="800" b="0" i="0">
-                          <a:solidFill>
-                            <a:srgbClr val="0D0D0D"/>
-                          </a:solidFill>
-                          <a:latin typeface="Calibri"/>
-                        </a:rPr>
-                        <a:t>50,0 %</a:t>
-                      </a:r>
-                    </a:p>
-                  </a:txBody>
-                  <a:tcPr>
-                    <a:solidFill>
-                      <a:srgbClr val="FFFFFF"/>
-                    </a:solidFill>
-                  </a:tcPr>
-                </a:tc>
-                <a:tc>
-                  <a:txBody>
-                    <a:bodyPr/>
-                    <a:lstStyle/>
-                    <a:p>
-                      <a:pPr algn="ctr"/>
-                      <a:r>
-                        <a:rPr sz="800" b="0" i="0">
-                          <a:solidFill>
-                            <a:srgbClr val="0D0D0D"/>
-                          </a:solidFill>
-                          <a:latin typeface="Calibri"/>
-                        </a:rPr>
-                        <a:t>40,0 %</a:t>
-                      </a:r>
-                    </a:p>
-                  </a:txBody>
-                  <a:tcPr>
-                    <a:solidFill>
-                      <a:srgbClr val="FFFFFF"/>
-                    </a:solidFill>
-                  </a:tcPr>
-                </a:tc>
-              </a:tr>
-              <a:tr h="252006">
+              <a:tr h="290400">
                 <a:tc>
                   <a:txBody>
                     <a:bodyPr/>
@@ -11773,7 +11308,7 @@
                           </a:solidFill>
                           <a:latin typeface="Calibri"/>
                         </a:rPr>
-                        <a:t>25,0x</a:t>
+                        <a:t>—</a:t>
                       </a:r>
                     </a:p>
                   </a:txBody>
@@ -11796,7 +11331,7 @@
                           </a:solidFill>
                           <a:latin typeface="Calibri"/>
                         </a:rPr>
-                        <a:t>6,5x</a:t>
+                        <a:t>—</a:t>
                       </a:r>
                     </a:p>
                   </a:txBody>
@@ -11819,7 +11354,7 @@
                           </a:solidFill>
                           <a:latin typeface="Calibri"/>
                         </a:rPr>
-                        <a:t>35,0x</a:t>
+                        <a:t>—</a:t>
                       </a:r>
                     </a:p>
                   </a:txBody>
@@ -11842,7 +11377,7 @@
                           </a:solidFill>
                           <a:latin typeface="Calibri"/>
                         </a:rPr>
-                        <a:t>55,0 %</a:t>
+                        <a:t>—</a:t>
                       </a:r>
                     </a:p>
                   </a:txBody>
@@ -11865,7 +11400,7 @@
                           </a:solidFill>
                           <a:latin typeface="Calibri"/>
                         </a:rPr>
-                        <a:t>40,0 %</a:t>
+                        <a:t>—</a:t>
                       </a:r>
                     </a:p>
                   </a:txBody>
@@ -12031,7 +11566,7 @@
                 </a:solidFill>
                 <a:latin typeface="Calibri"/>
               </a:rPr>
-              <a:t>NVIDIA affiche un P/E de 64,8x vs une médiane sectorielle de 30x, soit une prime de 116%. Cette prime est justifiée par des marges brutes de 75% (vs ~50% pour les pairs) et une croissance des revenus de +114% YoY. Une convergence vers la médiane impliquerait un downside de 54%, mais le différentiel de qualité justifie la prime actuelle. Les marges brutes sont passées de 56,9% en 2023 à 75,0% en 2025, grâce à l'effet volume (+114% de croissance) et à la domination du segment Data Center (80% des revenus). La trajectoire est durable tant que la demande en IA reste forte, avec un risque de mean-reversion limité par le pricing power de NVIDIA. NVIDIA se négocie à 64,8x P/E vs une médiane sectorielle de 30x, reflétant une prime de croissance justifiée par des marges exceptionnelles. La valorisation reste attractive au regard de la trajectoire de revenus et de marges.</a:t>
+              <a:t>Analyse fondamentale NVIDIA Corporation (NVDA) — secteur Technology. Ratios cles : EV/EBITDA 55.0x, marge EBITDA 66.0%, ROE 91.9%. Recommandation neutre par defaut, a reviser selon evolution des fondamentaux et catalyseurs sectoriels.</a:t>
             </a:r>
           </a:p>
         </p:txBody>
@@ -12635,186 +12170,222 @@
           </a:p>
         </p:txBody>
       </p:sp>
-      <p:pic>
-        <p:nvPicPr>
-          <p:cNvPr id="17" name="Picture 16" descr="image.png"/>
-          <p:cNvPicPr>
-            <a:picLocks noChangeAspect="1"/>
-          </p:cNvPicPr>
-          <p:nvPr/>
-        </p:nvPicPr>
-        <p:blipFill>
-          <a:blip r:embed="rId2"/>
-          <a:stretch>
-            <a:fillRect/>
-          </a:stretch>
-        </p:blipFill>
-        <p:spPr>
-          <a:xfrm>
-            <a:off x="367200" y="914400"/>
-            <a:ext cx="8413200" cy="2448000"/>
-          </a:xfrm>
-          <a:prstGeom prst="rect">
-            <a:avLst/>
-          </a:prstGeom>
-        </p:spPr>
-      </p:pic>
-      <p:sp>
-        <p:nvSpPr>
-          <p:cNvPr id="18" name="Rectangle 17"/>
-          <p:cNvSpPr/>
-          <p:nvPr/>
-        </p:nvSpPr>
-        <p:spPr>
-          <a:xfrm>
-            <a:off x="367200" y="3488400"/>
-            <a:ext cx="8413200" cy="1281600"/>
-          </a:xfrm>
-          <a:prstGeom prst="rect">
-            <a:avLst/>
-          </a:prstGeom>
-          <a:solidFill>
-            <a:srgbClr val="F5F7FA"/>
-          </a:solidFill>
-          <a:ln>
-            <a:noFill/>
-          </a:ln>
-        </p:spPr>
-        <p:style>
-          <a:lnRef idx="1">
-            <a:schemeClr val="accent1"/>
-          </a:lnRef>
-          <a:fillRef idx="3">
-            <a:schemeClr val="accent1"/>
-          </a:fillRef>
-          <a:effectRef idx="2">
-            <a:schemeClr val="accent1"/>
-          </a:effectRef>
-          <a:fontRef idx="minor">
-            <a:schemeClr val="lt1"/>
-          </a:fontRef>
-        </p:style>
-        <p:txBody>
-          <a:bodyPr rtlCol="0" anchor="ctr"/>
-          <a:lstStyle/>
-          <a:p>
-            <a:pPr algn="ctr"/>
-          </a:p>
-        </p:txBody>
-      </p:sp>
-      <p:sp>
-        <p:nvSpPr>
-          <p:cNvPr id="19" name="Rectangle 18"/>
-          <p:cNvSpPr/>
-          <p:nvPr/>
-        </p:nvSpPr>
-        <p:spPr>
-          <a:xfrm>
-            <a:off x="367200" y="3488400"/>
-            <a:ext cx="79200" cy="1281600"/>
-          </a:xfrm>
-          <a:prstGeom prst="rect">
-            <a:avLst/>
-          </a:prstGeom>
-          <a:solidFill>
-            <a:srgbClr val="2E5FA3"/>
-          </a:solidFill>
-          <a:ln>
-            <a:noFill/>
-          </a:ln>
-        </p:spPr>
-        <p:style>
-          <a:lnRef idx="1">
-            <a:schemeClr val="accent1"/>
-          </a:lnRef>
-          <a:fillRef idx="3">
-            <a:schemeClr val="accent1"/>
-          </a:fillRef>
-          <a:effectRef idx="2">
-            <a:schemeClr val="accent1"/>
-          </a:effectRef>
-          <a:fontRef idx="minor">
-            <a:schemeClr val="lt1"/>
-          </a:fontRef>
-        </p:style>
-        <p:txBody>
-          <a:bodyPr rtlCol="0" anchor="ctr"/>
-          <a:lstStyle/>
-          <a:p>
-            <a:pPr algn="ctr"/>
-          </a:p>
-        </p:txBody>
-      </p:sp>
-      <p:sp>
-        <p:nvSpPr>
-          <p:cNvPr id="20" name="TextBox 19"/>
-          <p:cNvSpPr txBox="1"/>
-          <p:nvPr/>
-        </p:nvSpPr>
-        <p:spPr>
-          <a:xfrm>
-            <a:off x="475200" y="3517200"/>
-            <a:ext cx="8298000" cy="151200"/>
-          </a:xfrm>
-          <a:prstGeom prst="rect">
-            <a:avLst/>
-          </a:prstGeom>
-          <a:noFill/>
-        </p:spPr>
-        <p:txBody>
-          <a:bodyPr wrap="none">
-            <a:spAutoFit/>
-          </a:bodyPr>
-          <a:lstStyle/>
-          <a:p>
-            <a:pPr algn="l"/>
-            <a:r>
-              <a:rPr sz="950" b="1" i="0">
-                <a:solidFill>
-                  <a:srgbClr val="1B3A6B"/>
-                </a:solidFill>
-                <a:latin typeface="Calibri"/>
-              </a:rPr>
-              <a:t>NVDA — football field et fourchette de valorisation</a:t>
-            </a:r>
-          </a:p>
-        </p:txBody>
-      </p:sp>
-      <p:sp>
-        <p:nvSpPr>
-          <p:cNvPr id="21" name="TextBox 20"/>
-          <p:cNvSpPr txBox="1"/>
-          <p:nvPr/>
-        </p:nvSpPr>
-        <p:spPr>
-          <a:xfrm>
-            <a:off x="475200" y="3686400"/>
-            <a:ext cx="8298000" cy="1058400"/>
-          </a:xfrm>
-          <a:prstGeom prst="rect">
-            <a:avLst/>
-          </a:prstGeom>
-          <a:noFill/>
-        </p:spPr>
-        <p:txBody>
-          <a:bodyPr wrap="square">
-            <a:spAutoFit/>
-          </a:bodyPr>
-          <a:lstStyle/>
-          <a:p>
-            <a:pPr algn="l"/>
-            <a:r>
-              <a:rPr sz="850" b="0" i="0">
-                <a:solidFill>
-                  <a:srgbClr val="555555"/>
-                </a:solidFill>
-                <a:latin typeface="Calibri"/>
-              </a:rPr>
-              <a:t>Avec un WACC de 17,1% et un TGR de 3,0%, le prix implicite DCF est de 245 USD (base), soit un upside de 26% vs le cours actuel. Cette valorisation suggère une sous-évaluation structurelle, mais la prime de croissance est déjà partiellement intégrée. Une accélération des revenus Data Center au-delà des attentes débloquerait la valeur. NVIDIA se négocie à 64,8x P/E vs une médiane sectorielle de 30x, reflétant une prime de croissance justifiée par des marges exceptionnelles. La valorisation reste attractive au regard de la trajectoire de revenus et de marges.</a:t>
-            </a:r>
-          </a:p>
-        </p:txBody>
-      </p:sp>
+      <p:graphicFrame>
+        <p:nvGraphicFramePr>
+          <p:cNvPr id="17" name="Table 16"/>
+          <p:cNvGraphicFramePr>
+            <a:graphicFrameLocks noGrp="1"/>
+          </p:cNvGraphicFramePr>
+          <p:nvPr/>
+        </p:nvGraphicFramePr>
+        <p:xfrm>
+          <a:off x="367200" y="914400"/>
+          <a:ext cx="8413200" cy="615600"/>
+        </p:xfrm>
+        <a:graphic>
+          <a:graphicData uri="http://schemas.openxmlformats.org/drawingml/2006/table">
+            <a:tbl>
+              <a:tblPr firstRow="1" bandRow="1">
+                <a:tableStyleId>{5C22544A-7EE6-4342-B048-85BDC9FD1C3A}</a:tableStyleId>
+              </a:tblPr>
+              <a:tblGrid>
+                <a:gridCol w="2944620"/>
+                <a:gridCol w="1682640"/>
+                <a:gridCol w="1682640"/>
+                <a:gridCol w="2103300"/>
+              </a:tblGrid>
+              <a:tr h="307800">
+                <a:tc>
+                  <a:txBody>
+                    <a:bodyPr/>
+                    <a:lstStyle/>
+                    <a:p>
+                      <a:pPr algn="l"/>
+                      <a:r>
+                        <a:rPr sz="800" b="1" i="0">
+                          <a:solidFill>
+                            <a:srgbClr val="FFFFFF"/>
+                          </a:solidFill>
+                          <a:latin typeface="Calibri"/>
+                        </a:rPr>
+                        <a:t>Méthode</a:t>
+                      </a:r>
+                    </a:p>
+                  </a:txBody>
+                  <a:tcPr>
+                    <a:solidFill>
+                      <a:srgbClr val="1B3A6B"/>
+                    </a:solidFill>
+                  </a:tcPr>
+                </a:tc>
+                <a:tc>
+                  <a:txBody>
+                    <a:bodyPr/>
+                    <a:lstStyle/>
+                    <a:p>
+                      <a:pPr algn="ctr"/>
+                      <a:r>
+                        <a:rPr sz="800" b="1" i="0">
+                          <a:solidFill>
+                            <a:srgbClr val="FFFFFF"/>
+                          </a:solidFill>
+                          <a:latin typeface="Calibri"/>
+                        </a:rPr>
+                        <a:t>Fourchette basse</a:t>
+                      </a:r>
+                    </a:p>
+                  </a:txBody>
+                  <a:tcPr>
+                    <a:solidFill>
+                      <a:srgbClr val="1B3A6B"/>
+                    </a:solidFill>
+                  </a:tcPr>
+                </a:tc>
+                <a:tc>
+                  <a:txBody>
+                    <a:bodyPr/>
+                    <a:lstStyle/>
+                    <a:p>
+                      <a:pPr algn="ctr"/>
+                      <a:r>
+                        <a:rPr sz="800" b="1" i="0">
+                          <a:solidFill>
+                            <a:srgbClr val="FFFFFF"/>
+                          </a:solidFill>
+                          <a:latin typeface="Calibri"/>
+                        </a:rPr>
+                        <a:t>Fourchette haute</a:t>
+                      </a:r>
+                    </a:p>
+                  </a:txBody>
+                  <a:tcPr>
+                    <a:solidFill>
+                      <a:srgbClr val="1B3A6B"/>
+                    </a:solidFill>
+                  </a:tcPr>
+                </a:tc>
+                <a:tc>
+                  <a:txBody>
+                    <a:bodyPr/>
+                    <a:lstStyle/>
+                    <a:p>
+                      <a:pPr algn="ctr"/>
+                      <a:r>
+                        <a:rPr sz="800" b="1" i="0">
+                          <a:solidFill>
+                            <a:srgbClr val="FFFFFF"/>
+                          </a:solidFill>
+                          <a:latin typeface="Calibri"/>
+                        </a:rPr>
+                        <a:t>Point central</a:t>
+                      </a:r>
+                    </a:p>
+                  </a:txBody>
+                  <a:tcPr>
+                    <a:solidFill>
+                      <a:srgbClr val="1B3A6B"/>
+                    </a:solidFill>
+                  </a:tcPr>
+                </a:tc>
+              </a:tr>
+              <a:tr h="307800">
+                <a:tc>
+                  <a:txBody>
+                    <a:bodyPr/>
+                    <a:lstStyle/>
+                    <a:p>
+                      <a:pPr algn="l"/>
+                      <a:r>
+                        <a:rPr sz="800" b="0" i="0">
+                          <a:solidFill>
+                            <a:srgbClr val="0D0D0D"/>
+                          </a:solidFill>
+                          <a:latin typeface="Calibri"/>
+                        </a:rPr>
+                        <a:t>Cours actuel (194,90)</a:t>
+                      </a:r>
+                    </a:p>
+                  </a:txBody>
+                  <a:tcPr>
+                    <a:solidFill>
+                      <a:srgbClr val="EEF3FA"/>
+                    </a:solidFill>
+                  </a:tcPr>
+                </a:tc>
+                <a:tc>
+                  <a:txBody>
+                    <a:bodyPr/>
+                    <a:lstStyle/>
+                    <a:p>
+                      <a:pPr algn="ctr"/>
+                      <a:r>
+                        <a:rPr sz="800" b="0" i="0">
+                          <a:solidFill>
+                            <a:srgbClr val="0D0D0D"/>
+                          </a:solidFill>
+                          <a:latin typeface="Calibri"/>
+                        </a:rPr>
+                        <a:t>—</a:t>
+                      </a:r>
+                    </a:p>
+                  </a:txBody>
+                  <a:tcPr>
+                    <a:solidFill>
+                      <a:srgbClr val="EEF3FA"/>
+                    </a:solidFill>
+                  </a:tcPr>
+                </a:tc>
+                <a:tc>
+                  <a:txBody>
+                    <a:bodyPr/>
+                    <a:lstStyle/>
+                    <a:p>
+                      <a:pPr algn="ctr"/>
+                      <a:r>
+                        <a:rPr sz="800" b="0" i="0">
+                          <a:solidFill>
+                            <a:srgbClr val="0D0D0D"/>
+                          </a:solidFill>
+                          <a:latin typeface="Calibri"/>
+                        </a:rPr>
+                        <a:t>—</a:t>
+                      </a:r>
+                    </a:p>
+                  </a:txBody>
+                  <a:tcPr>
+                    <a:solidFill>
+                      <a:srgbClr val="EEF3FA"/>
+                    </a:solidFill>
+                  </a:tcPr>
+                </a:tc>
+                <a:tc>
+                  <a:txBody>
+                    <a:bodyPr/>
+                    <a:lstStyle/>
+                    <a:p>
+                      <a:pPr algn="ctr"/>
+                      <a:r>
+                        <a:rPr sz="800" b="0" i="0">
+                          <a:solidFill>
+                            <a:srgbClr val="0D0D0D"/>
+                          </a:solidFill>
+                          <a:latin typeface="Calibri"/>
+                        </a:rPr>
+                        <a:t>194,90</a:t>
+                      </a:r>
+                    </a:p>
+                  </a:txBody>
+                  <a:tcPr>
+                    <a:solidFill>
+                      <a:srgbClr val="EEF3FA"/>
+                    </a:solidFill>
+                  </a:tcPr>
+                </a:tc>
+              </a:tr>
+            </a:tbl>
+          </a:graphicData>
+        </a:graphic>
+      </p:graphicFrame>
     </p:spTree>
   </p:cSld>
   <p:clrMapOvr>
@@ -13728,7 +13299,7 @@
                           </a:solidFill>
                           <a:latin typeface="Calibri"/>
                         </a:rPr>
-                        <a:t>1 082,1x</a:t>
+                        <a:t>1 084,3x</a:t>
                       </a:r>
                     </a:p>
                   </a:txBody>
@@ -13771,7 +13342,7 @@
                           </a:solidFill>
                           <a:latin typeface="Calibri"/>
                         </a:rPr>
-                        <a:t>790,9x</a:t>
+                        <a:t>792,5x</a:t>
                       </a:r>
                     </a:p>
                   </a:txBody>
@@ -13814,7 +13385,7 @@
                           </a:solidFill>
                           <a:latin typeface="Calibri"/>
                         </a:rPr>
-                        <a:t>213,9x</a:t>
+                        <a:t>214,3x</a:t>
                       </a:r>
                     </a:p>
                   </a:txBody>
@@ -13902,7 +13473,7 @@
                           </a:solidFill>
                           <a:latin typeface="Calibri"/>
                         </a:rPr>
-                        <a:t>158,8x</a:t>
+                        <a:t>159,1x</a:t>
                       </a:r>
                     </a:p>
                   </a:txBody>
@@ -13945,7 +13516,7 @@
                           </a:solidFill>
                           <a:latin typeface="Calibri"/>
                         </a:rPr>
-                        <a:t>132,9x</a:t>
+                        <a:t>133,2x</a:t>
                       </a:r>
                     </a:p>
                   </a:txBody>
@@ -13988,7 +13559,7 @@
                           </a:solidFill>
                           <a:latin typeface="Calibri"/>
                         </a:rPr>
-                        <a:t>110,0x</a:t>
+                        <a:t>110,2x</a:t>
                       </a:r>
                     </a:p>
                   </a:txBody>
@@ -14076,7 +13647,7 @@
                           </a:solidFill>
                           <a:latin typeface="Calibri"/>
                         </a:rPr>
-                        <a:t>64,8x</a:t>
+                        <a:t>65,0x</a:t>
                       </a:r>
                     </a:p>
                   </a:txBody>
@@ -14119,7 +13690,7 @@
                           </a:solidFill>
                           <a:latin typeface="Calibri"/>
                         </a:rPr>
-                        <a:t>54,9x</a:t>
+                        <a:t>55,0x</a:t>
                       </a:r>
                     </a:p>
                   </a:txBody>
@@ -14162,7 +13733,7 @@
                           </a:solidFill>
                           <a:latin typeface="Calibri"/>
                         </a:rPr>
-                        <a:t>59,6x</a:t>
+                        <a:t>59,7x</a:t>
                       </a:r>
                     </a:p>
                   </a:txBody>
@@ -14348,7 +13919,7 @@
                 </a:solidFill>
                 <a:latin typeface="Calibri"/>
               </a:rPr>
-              <a:t>Le P/E affiche une compression multiple de 1017.2x sur la période (1 082,1x → 64,8x), signal d’une réévaluation négative du profil de croissance. L’EV/EBITDA diverge à 54,9x vs 790,9x historique. Le chiffre d'affaires 2025 atteint 130,5 Md$ (+114% YoY), porté par la demande en GPU pour l'IA générative. Les marges brutes de 75% bénéficient d'un mix produit favorable (H100/H200 à haute marge) et d'économies d'échelle. Le bilan est solide avec un ND/EBITDA de -0,0x, permettant des rachats d'actions ou des dividendes.</a:t>
+              <a:t>Le P/E affiche une compression multiple de 94.2x sur la période (159,1x → 65,0x), signal d’une réévaluation négative du profil de croissance. L’EV/EBITDA se stabilise à 55,0x vs 55,0x historique.</a:t>
             </a:r>
           </a:p>
         </p:txBody>
@@ -16683,7 +16254,7 @@
                 </a:solidFill>
                 <a:latin typeface="Calibri"/>
               </a:rPr>
-              <a:t>Le FCF affiche une croissance de 67,4 Mds$ sur la période, avec un FCF yield actuel de 1,5 % — à surveiller au regard de la valorisation de marché. L’allocation vers les dividendes est maintenue malgré la pression sur les marges. Le chiffre d'affaires 2025 atteint 130,5 Md$ (+114% YoY), porté par la demande en GPU pour l'IA générative. Les marges brutes de 75% bénéficient d'un mix produit favorable (H100/H200 à haute marge) et d'économies d'échelle. Le bilan est solide avec un ND/EBITDA de -0,0x, permettant des rachats d'actions ou des dividendes.</a:t>
+              <a:t>Le FCF affiche une croissance de 67,4 Mds$ sur la période, avec un FCF yield actuel de 1,5 % — à surveiller au regard de la valorisation de marché. L’allocation vers les dividendes est maintenue malgré la pression sur les marges.</a:t>
             </a:r>
           </a:p>
         </p:txBody>
@@ -18624,8 +18195,8 @@
         </p:nvSpPr>
         <p:spPr>
           <a:xfrm>
-            <a:off x="367200" y="4140000"/>
-            <a:ext cx="8413200" cy="648000"/>
+            <a:off x="367200" y="3131999"/>
+            <a:ext cx="8413200" cy="1638000"/>
           </a:xfrm>
           <a:prstGeom prst="rect">
             <a:avLst/>
@@ -18667,8 +18238,8 @@
         </p:nvSpPr>
         <p:spPr>
           <a:xfrm>
-            <a:off x="367200" y="4140000"/>
-            <a:ext cx="79200" cy="648000"/>
+            <a:off x="367200" y="3131999"/>
+            <a:ext cx="79200" cy="1638000"/>
           </a:xfrm>
           <a:prstGeom prst="rect">
             <a:avLst/>
@@ -18710,7 +18281,7 @@
         </p:nvSpPr>
         <p:spPr>
           <a:xfrm>
-            <a:off x="475200" y="4168800"/>
+            <a:off x="475200" y="3160800"/>
             <a:ext cx="8298000" cy="151200"/>
           </a:xfrm>
           <a:prstGeom prst="rect">
@@ -18745,8 +18316,8 @@
         </p:nvSpPr>
         <p:spPr>
           <a:xfrm>
-            <a:off x="475200" y="4338000"/>
-            <a:ext cx="8298000" cy="424800"/>
+            <a:off x="475200" y="3330000"/>
+            <a:ext cx="8298000" cy="1414800"/>
           </a:xfrm>
           <a:prstGeom prst="rect">
             <a:avLst/>
@@ -22269,8 +21840,8 @@
         </p:nvSpPr>
         <p:spPr>
           <a:xfrm>
-            <a:off x="367200" y="4031999"/>
-            <a:ext cx="8413200" cy="756000"/>
+            <a:off x="367200" y="3708000"/>
+            <a:ext cx="8413200" cy="1080000"/>
           </a:xfrm>
           <a:prstGeom prst="rect">
             <a:avLst/>
@@ -22312,8 +21883,8 @@
         </p:nvSpPr>
         <p:spPr>
           <a:xfrm>
-            <a:off x="367200" y="4031999"/>
-            <a:ext cx="79200" cy="756000"/>
+            <a:off x="367200" y="3708000"/>
+            <a:ext cx="79200" cy="1080000"/>
           </a:xfrm>
           <a:prstGeom prst="rect">
             <a:avLst/>
@@ -22355,7 +21926,7 @@
         </p:nvSpPr>
         <p:spPr>
           <a:xfrm>
-            <a:off x="475200" y="4060800"/>
+            <a:off x="475200" y="3736800"/>
             <a:ext cx="8298000" cy="151200"/>
           </a:xfrm>
           <a:prstGeom prst="rect">
@@ -22390,8 +21961,8 @@
         </p:nvSpPr>
         <p:spPr>
           <a:xfrm>
-            <a:off x="475200" y="4230000"/>
-            <a:ext cx="8298000" cy="532800"/>
+            <a:off x="475200" y="3906000"/>
+            <a:ext cx="8298000" cy="856800"/>
           </a:xfrm>
           <a:prstGeom prst="rect">
             <a:avLst/>
@@ -26786,7 +26357,7 @@
             <a:avLst/>
           </a:prstGeom>
           <a:solidFill>
-            <a:srgbClr val="EAF4EF"/>
+            <a:srgbClr val="FDF6E8"/>
           </a:solidFill>
           <a:ln>
             <a:noFill/>
@@ -26829,7 +26400,7 @@
             <a:avLst/>
           </a:prstGeom>
           <a:solidFill>
-            <a:srgbClr val="1A7A4A"/>
+            <a:srgbClr val="B06000"/>
           </a:solidFill>
           <a:ln>
             <a:noFill/>
@@ -26883,11 +26454,11 @@
             <a:r>
               <a:rPr sz="1100" b="1" i="0">
                 <a:solidFill>
-                  <a:srgbClr val="1A7A4A"/>
+                  <a:srgbClr val="B06000"/>
                 </a:solidFill>
                 <a:latin typeface="Calibri"/>
               </a:rPr>
-              <a:t>● BUY</a:t>
+              <a:t>● HOLD</a:t>
             </a:r>
           </a:p>
         </p:txBody>
@@ -26922,7 +26493,7 @@
                 </a:solidFill>
                 <a:latin typeface="Calibri"/>
               </a:rPr>
-              <a:t>Prix cible base : 245 $  ·  Upside : +26,0 %  ·  Bear : 180 $ (-7,5 %)  ·  Bull : 280 $ (+44,0 %)</a:t>
+              <a:t>Prix cible base : 195 $  ·  Upside : +0,0 %  ·  Bear : 166 $ (-15,0 %)  ·  Bull : 234 $ (+20,0 %)</a:t>
             </a:r>
           </a:p>
         </p:txBody>
@@ -27078,7 +26649,7 @@
                 </a:solidFill>
                 <a:latin typeface="Calibri"/>
               </a:rPr>
-              <a:t>Leadership IA</a:t>
+              <a:t>NVIDIA Corporation presente un profil financier EV/EBITDA 55.0x, marge EBITDA…</a:t>
             </a:r>
           </a:p>
         </p:txBody>
@@ -27113,7 +26684,7 @@
                 </a:solidFill>
                 <a:latin typeface="Calibri"/>
               </a:rPr>
-              <a:t>NVIDIA capte 80% du marché des GPU pour centres de données avec une marge brute de 75%, tirée par la demande en IA générative estimée à +120% par an jusqu'en 2027</a:t>
+              <a:t>—</a:t>
             </a:r>
           </a:p>
         </p:txBody>
@@ -27191,7 +26762,7 @@
                 </a:solidFill>
                 <a:latin typeface="Calibri"/>
               </a:rPr>
-              <a:t>Marges record</a:t>
+              <a:t>L'analyse fondamentale indique un equilibre risque/rendement neutre a court…</a:t>
             </a:r>
           </a:p>
         </p:txBody>
@@ -27226,7 +26797,7 @@
                 </a:solidFill>
                 <a:latin typeface="Calibri"/>
               </a:rPr>
-              <a:t>Le chiffre d'affaires 2025 de 130,5 Md$ (+114% YoY) devrait atteindre 200 Md$ en 2026 grâce aux contrats avec les hyperscalers</a:t>
+              <a:t>—</a:t>
             </a:r>
           </a:p>
         </p:txBody>
@@ -27304,7 +26875,7 @@
                 </a:solidFill>
                 <a:latin typeface="Calibri"/>
               </a:rPr>
-              <a:t>Écosystème CUDA</a:t>
+              <a:t>Une revision de la these necessite la confirmation des prochains catalyseurs…</a:t>
             </a:r>
           </a:p>
         </p:txBody>
@@ -27339,7 +26910,7 @@
                 </a:solidFill>
                 <a:latin typeface="Calibri"/>
               </a:rPr>
-              <a:t>Les marges nettes de 56% en 2025 pourraient atteindre 60% en 2027 via l'effet volume et la réduction des coûts unitaires.</a:t>
+              <a:t>—</a:t>
             </a:r>
           </a:p>
         </p:txBody>
@@ -27495,7 +27066,7 @@
                 </a:solidFill>
                 <a:latin typeface="Calibri"/>
               </a:rPr>
-              <a:t>Concurrence AMD</a:t>
+              <a:t>{'title': 'Compression des marges', 'description': 'Pression concurrentielle ou…</a:t>
             </a:r>
           </a:p>
         </p:txBody>
@@ -27530,7 +27101,7 @@
                 </a:solidFill>
                 <a:latin typeface="Calibri"/>
               </a:rPr>
-              <a:t>Concurrence accrue d'AMD avec ses GPU Instinct MI300X, menaçant 15% de part de marché d'ici 2026 | Régulation antitrust aux États-Unis ou en UE, impactant les contrats avec les hyperscalers</a:t>
+              <a:t>Impact potentiel sur la thèse d'investissement — surveillance recommandée sur les 6-12 prochains mois.</a:t>
             </a:r>
           </a:p>
         </p:txBody>
@@ -27608,7 +27179,7 @@
                 </a:solidFill>
                 <a:latin typeface="Calibri"/>
               </a:rPr>
-              <a:t>Régulation</a:t>
+              <a:t>{'title': 'Choc macroeconomique', 'description': 'Recession, hausse des taux…</a:t>
             </a:r>
           </a:p>
         </p:txBody>
@@ -27643,7 +27214,7 @@
                 </a:solidFill>
                 <a:latin typeface="Calibri"/>
               </a:rPr>
-              <a:t>Le ratio EV/EBITDA à 54,87x implique une valorisation excessive de 42% par rapport à la moyenne sectorielle de 38,5x, sans justification tangible d'un maintien de cette prime.</a:t>
+              <a:t>Impact potentiel sur la thèse d'investissement — surveillance recommandée sur les 6-12 prochains mois.</a:t>
             </a:r>
           </a:p>
         </p:txBody>
@@ -27721,7 +27292,7 @@
                 </a:solidFill>
                 <a:latin typeface="Calibri"/>
               </a:rPr>
-              <a:t>Dépendance hyperscalers</a:t>
+              <a:t>{'title': 'Risque de revision baissiere', 'description': "Les revisions du…</a:t>
             </a:r>
           </a:p>
         </p:txBody>
@@ -27756,7 +27327,7 @@
                 </a:solidFill>
                 <a:latin typeface="Calibri"/>
               </a:rPr>
-              <a:t>L'hypothèse de croissance des revenus de 114,2% en 2025 est intenable : les ventes de GPU pour centres de données pourraient chuter de 30% si les budgets IA des hyperscalers se contractent,</a:t>
+              <a:t>Impact potentiel sur la thèse d'investissement — surveillance recommandée sur les 6-12 prochains mois.</a:t>
             </a:r>
           </a:p>
         </p:txBody>
@@ -27855,7 +27426,7 @@
         </p:nvSpPr>
         <p:spPr>
           <a:xfrm>
-            <a:off x="367200" y="3168000"/>
+            <a:off x="367200" y="3024000"/>
             <a:ext cx="8413200" cy="162000"/>
           </a:xfrm>
           <a:prstGeom prst="rect">
@@ -27898,7 +27469,7 @@
         </p:nvSpPr>
         <p:spPr>
           <a:xfrm>
-            <a:off x="413999" y="3175200"/>
+            <a:off x="413999" y="3031200"/>
             <a:ext cx="8352000" cy="151200"/>
           </a:xfrm>
           <a:prstGeom prst="rect">
@@ -27933,7 +27504,7 @@
         </p:nvSpPr>
         <p:spPr>
           <a:xfrm>
-            <a:off x="367200" y="3384000"/>
+            <a:off x="367200" y="3240000"/>
             <a:ext cx="36000" cy="79200"/>
           </a:xfrm>
           <a:prstGeom prst="rect">
@@ -27976,7 +27547,7 @@
         </p:nvSpPr>
         <p:spPr>
           <a:xfrm>
-            <a:off x="432000" y="3366000"/>
+            <a:off x="432000" y="3221999"/>
             <a:ext cx="4111200" cy="223200"/>
           </a:xfrm>
           <a:prstGeom prst="rect">
@@ -27998,7 +27569,7 @@
                 </a:solidFill>
                 <a:latin typeface="Calibri"/>
               </a:rPr>
-              <a:t>Contrats hyperscalers : Signature de contrats pluriannuels avec AWS, Google et Microsoft pour 50 Md$ de GPU H200/H300 d'ici fin 2025, garantissant 60% de la…</a:t>
+              <a:t>Publication trimestrielle : Resultats du prochain trimestre — surveiller marges et guidance vs consensus. Impact direct sur la perception de la trajectoire.</a:t>
             </a:r>
           </a:p>
         </p:txBody>
@@ -28011,7 +27582,7 @@
         </p:nvSpPr>
         <p:spPr>
           <a:xfrm>
-            <a:off x="4572000" y="3384000"/>
+            <a:off x="4572000" y="3240000"/>
             <a:ext cx="36000" cy="79200"/>
           </a:xfrm>
           <a:prstGeom prst="rect">
@@ -28054,7 +27625,7 @@
         </p:nvSpPr>
         <p:spPr>
           <a:xfrm>
-            <a:off x="4636800" y="3366000"/>
+            <a:off x="4636800" y="3221999"/>
             <a:ext cx="4111200" cy="223200"/>
           </a:xfrm>
           <a:prstGeom prst="rect">
@@ -28076,7 +27647,7 @@
                 </a:solidFill>
                 <a:latin typeface="Calibri"/>
               </a:rPr>
-              <a:t>Lancement Blackwell : Déploiement des GPU Blackwell en Q3 2025 avec une performance 3x supérieure aux H100, captant 70% du marché des nouveaux centres de…</a:t>
+              <a:t>Evolution macro sectorielle : Cycle Technology : taux directeurs, demande finale, et indicateurs avances PMI/credit. Toute inflexion macro impacte le re-rating.</a:t>
             </a:r>
           </a:p>
         </p:txBody>
@@ -28089,7 +27660,7 @@
         </p:nvSpPr>
         <p:spPr>
           <a:xfrm>
-            <a:off x="367200" y="3618000"/>
+            <a:off x="367200" y="3492000"/>
             <a:ext cx="36000" cy="79200"/>
           </a:xfrm>
           <a:prstGeom prst="rect">
@@ -28132,7 +27703,7 @@
         </p:nvSpPr>
         <p:spPr>
           <a:xfrm>
-            <a:off x="432000" y="3600000"/>
+            <a:off x="432000" y="3474000"/>
             <a:ext cx="4111200" cy="223200"/>
           </a:xfrm>
           <a:prstGeom prst="rect">
@@ -28154,7 +27725,7 @@
                 </a:solidFill>
                 <a:latin typeface="Calibri"/>
               </a:rPr>
-              <a:t>Expansion internationale : Ouverture de data centers en Asie (Japon, Corée) et en Europe (Allemagne, France) pour répondre à la demande locale, avec un CA…</a:t>
+              <a:t>Annonces strategiques : Operations M&amp;A, lancement produits, ou changement de guidance peuvent declencher une revision rapide de la these.</a:t>
             </a:r>
           </a:p>
         </p:txBody>
@@ -28167,7 +27738,7 @@
         </p:nvSpPr>
         <p:spPr>
           <a:xfrm>
-            <a:off x="4572000" y="3618000"/>
+            <a:off x="4572000" y="3492000"/>
             <a:ext cx="36000" cy="79200"/>
           </a:xfrm>
           <a:prstGeom prst="rect">
@@ -28210,7 +27781,7 @@
         </p:nvSpPr>
         <p:spPr>
           <a:xfrm>
-            <a:off x="4636800" y="3600000"/>
+            <a:off x="4636800" y="3474000"/>
             <a:ext cx="4111200" cy="223200"/>
           </a:xfrm>
           <a:prstGeom prst="rect">
@@ -28396,7 +27967,7 @@
                 </a:solidFill>
                 <a:latin typeface="Calibri"/>
               </a:rPr>
-              <a:t>54,9x</a:t>
+              <a:t>55,0x</a:t>
             </a:r>
           </a:p>
         </p:txBody>
@@ -28466,7 +28037,7 @@
                 </a:solidFill>
                 <a:latin typeface="Calibri"/>
               </a:rPr>
-              <a:t>vs 25,0x med. pairs</a:t>
+              <a:t>vs — med. pairs</a:t>
             </a:r>
           </a:p>
         </p:txBody>
@@ -28778,7 +28349,7 @@
                 </a:solidFill>
                 <a:latin typeface="Calibri"/>
               </a:rPr>
-              <a:t>245 $</a:t>
+              <a:t>195 $</a:t>
             </a:r>
           </a:p>
         </p:txBody>
@@ -28848,7 +28419,7 @@
                 </a:solidFill>
                 <a:latin typeface="Calibri"/>
               </a:rPr>
-              <a:t>Upside +26,0 % vs cours</a:t>
+              <a:t>Upside +0,0 % vs cours</a:t>
             </a:r>
           </a:p>
         </p:txBody>
@@ -28969,7 +28540,7 @@
                 </a:solidFill>
                 <a:latin typeface="Calibri"/>
               </a:rPr>
-              <a:t>+0,230</a:t>
+              <a:t>+0,164</a:t>
             </a:r>
           </a:p>
         </p:txBody>
@@ -29039,7 +28610,7 @@
                 </a:solidFill>
                 <a:latin typeface="Calibri"/>
               </a:rPr>
-              <a:t>Positif  ·  30 art.</a:t>
+              <a:t>Neutre +  ·  30 art.</a:t>
             </a:r>
           </a:p>
         </p:txBody>
@@ -30012,7 +29583,7 @@
                 </a:solidFill>
                 <a:latin typeface="Calibri"/>
               </a:rPr>
-              <a:t>Concurrence AMD Intel</a:t>
+              <a:t>{'title': 'Compression des marges', 'description': 'Pression concurrentielle ou hausse des couts intrants peuvent degrader la rentabilite operationnelle (marge EBITDA actuelle 66.0% si dispo).'}</a:t>
             </a:r>
           </a:p>
         </p:txBody>
@@ -30047,7 +29618,7 @@
                 </a:solidFill>
                 <a:latin typeface="Calibri"/>
               </a:rPr>
-              <a:t>Les marges record de 75% reposent sur un quasi-monopole sur les GPU haut de gamme, mais la concurrence d'AMD et Intel en 2025 pourrait grignoter 15% de parts de marché, réduisant le pricing power de NVDA. Les coûts de R&amp;D explosifs (3,2 Md$ en 2024) menacent la rentabilité à long terme malgré des marges actuelles élevées.</a:t>
+              <a:t>{'title': 'Compression des marges', 'description': 'Pression concurrentielle ou hausse des couts intrants peuvent degrader la rentabilite operationnelle (marge EBITDA actuelle 66.0% si dispo).'}</a:t>
             </a:r>
           </a:p>
         </p:txBody>
@@ -30168,7 +29739,7 @@
                 </a:solidFill>
                 <a:latin typeface="Calibri"/>
               </a:rPr>
-              <a:t>Valorisation excessive</a:t>
+              <a:t>{'title': 'Choc macroeconomique', 'description': 'Recession, hausse des taux directeurs, ou degradation du credit sectoriel peuvent declencher un de-rating significatif.'}</a:t>
             </a:r>
           </a:p>
         </p:txBody>
@@ -30203,7 +29774,7 @@
                 </a:solidFill>
                 <a:latin typeface="Calibri"/>
               </a:rPr>
-              <a:t>Le ratio EV/EBITDA à 54,87x implique une valorisation excessive de 42% par rapport à la moyenne sectorielle de 38,5x, sans justification tangible d'un maintien de cette prime.</a:t>
+              <a:t>{'title': 'Choc macroeconomique', 'description': 'Recession, hausse des taux directeurs, ou degradation du credit sectoriel peuvent declencher un de-rating significatif.'}</a:t>
             </a:r>
           </a:p>
         </p:txBody>
@@ -30324,7 +29895,7 @@
                 </a:solidFill>
                 <a:latin typeface="Calibri"/>
               </a:rPr>
-              <a:t>Demande IA volatile</a:t>
+              <a:t>{'title': 'Risque de revision baissiere', 'description': "Les revisions du consensus sur les 1-2 prochains trimestres constituent un signal d'alerte avance."}</a:t>
             </a:r>
           </a:p>
         </p:txBody>
@@ -30359,7 +29930,7 @@
                 </a:solidFill>
                 <a:latin typeface="Calibri"/>
               </a:rPr>
-              <a:t>L'hypothèse de croissance des revenus de 114,2% en 2025 est intenable : les ventes de GPU pour centres de données pourraient chuter de 30% si les budgets IA des hyperscalers se contractent, comme suggéré par les commandes réduites de Meta et Google. |</a:t>
+              <a:t>{'title': 'Risque de revision baissiere', 'description': "Les revisions du consensus sur les 1-2 prochains trimestres constituent un signal d'alerte avance."}</a:t>
             </a:r>
           </a:p>
         </p:txBody>
@@ -30573,7 +30144,7 @@
                           </a:solidFill>
                           <a:latin typeface="Calibri"/>
                         </a:rPr>
-                        <a:t>Récession mondiale réduisant la demande en centres de données de 30%</a:t>
+                        <a:t>Remontée des taux directeurs &gt; 200bps</a:t>
                       </a:r>
                     </a:p>
                   </a:txBody>
@@ -30644,7 +30215,7 @@
                           </a:solidFill>
                           <a:latin typeface="Calibri"/>
                         </a:rPr>
-                        <a:t>Concurrence AMD/Intel avec des GPU 30% moins chers et performants d'ici 2026</a:t>
+                        <a:t>Rupture technologique remettant en cause le modèle</a:t>
                       </a:r>
                     </a:p>
                   </a:txBody>
@@ -30692,7 +30263,7 @@
                           </a:solidFill>
                           <a:latin typeface="Calibri"/>
                         </a:rPr>
-                        <a:t>Societe</a:t>
+                        <a:t>Société</a:t>
                       </a:r>
                     </a:p>
                   </a:txBody>
@@ -30715,7 +30286,7 @@
                           </a:solidFill>
                           <a:latin typeface="Calibri"/>
                         </a:rPr>
-                        <a:t>Échec du déploiement des GPU Blackwell en 2025, retardant les livraisons de 6 mois</a:t>
+                        <a:t>Détérioration matérielle des marges opérationnelles</a:t>
                       </a:r>
                     </a:p>
                   </a:txBody>
@@ -32447,7 +32018,7 @@
                 </a:solidFill>
                 <a:latin typeface="Calibri"/>
               </a:rPr>
-              <a:t>Positif</a:t>
+              <a:t>Neutre +</a:t>
             </a:r>
           </a:p>
         </p:txBody>
@@ -32517,7 +32088,7 @@
                 </a:solidFill>
                 <a:latin typeface="Calibri"/>
               </a:rPr>
-              <a:t>Score agrégé : +0,230</a:t>
+              <a:t>Score agrégé : +0,164</a:t>
             </a:r>
           </a:p>
         </p:txBody>
@@ -32829,7 +32400,7 @@
                 </a:solidFill>
                 <a:latin typeface="Calibri"/>
               </a:rPr>
-              <a:t>42,7 %</a:t>
+              <a:t>47,2 %</a:t>
             </a:r>
           </a:p>
         </p:txBody>
@@ -33020,7 +32591,7 @@
                 </a:solidFill>
                 <a:latin typeface="Calibri"/>
               </a:rPr>
-              <a:t>BUY</a:t>
+              <a:t>HOLD</a:t>
             </a:r>
           </a:p>
         </p:txBody>
@@ -33285,7 +32856,7 @@
                           </a:solidFill>
                           <a:latin typeface="Calibri"/>
                         </a:rPr>
-                        <a:t>14</a:t>
+                        <a:t>9</a:t>
                       </a:r>
                     </a:p>
                   </a:txBody>
@@ -33308,7 +32879,7 @@
                           </a:solidFill>
                           <a:latin typeface="Calibri"/>
                         </a:rPr>
-                        <a:t>+0,427</a:t>
+                        <a:t>+0,346</a:t>
                       </a:r>
                     </a:p>
                   </a:txBody>
@@ -33331,7 +32902,7 @@
                           </a:solidFill>
                           <a:latin typeface="Calibri"/>
                         </a:rPr>
-                        <a:t>Adoption massive de l'IA générative dans les centres de données d'ici 2027, avec un marché estimé à 200 Md$ | Croissance des revenus Data Center de +85% YoY en 2026 grâce aux contrats hyperscalers | Expansion des marges nettes à 60% en…</a:t>
+                        <a:t>Catalyseurs, croissance, résultats</a:t>
                       </a:r>
                     </a:p>
                   </a:txBody>
@@ -33379,7 +32950,7 @@
                           </a:solidFill>
                           <a:latin typeface="Calibri"/>
                         </a:rPr>
-                        <a:t>11</a:t>
+                        <a:t>16</a:t>
                       </a:r>
                     </a:p>
                   </a:txBody>
@@ -33402,7 +32973,7 @@
                           </a:solidFill>
                           <a:latin typeface="Calibri"/>
                         </a:rPr>
-                        <a:t>+0,376</a:t>
+                        <a:t>+0,472</a:t>
                       </a:r>
                     </a:p>
                   </a:txBody>
@@ -33496,7 +33067,7 @@
                           </a:solidFill>
                           <a:latin typeface="Calibri"/>
                         </a:rPr>
-                        <a:t>+0,197</a:t>
+                        <a:t>+0,182</a:t>
                       </a:r>
                     </a:p>
                   </a:txBody>
@@ -33519,7 +33090,7 @@
                           </a:solidFill>
                           <a:latin typeface="Calibri"/>
                         </a:rPr>
-                        <a:t>Concurrence accrue d'AMD avec ses GPU Instinct MI300X, menaçant 15% de part de marché d'ici 2026 | Régulation antitrust aux États-Unis ou en UE, impactant les contrats avec les hyperscalers | Ralentissement de la demande en IA générative…</a:t>
+                        <a:t>Risques macro, concurrence, dette</a:t>
                       </a:r>
                     </a:p>
                   </a:txBody>
@@ -33536,14 +33107,135 @@
       </p:graphicFrame>
       <p:sp>
         <p:nvSpPr>
-          <p:cNvPr id="39" name="TextBox 38"/>
+          <p:cNvPr id="39" name="Rectangle 38"/>
+          <p:cNvSpPr/>
+          <p:nvPr/>
+        </p:nvSpPr>
+        <p:spPr>
+          <a:xfrm>
+            <a:off x="367200" y="3924000"/>
+            <a:ext cx="8413200" cy="845999"/>
+          </a:xfrm>
+          <a:prstGeom prst="rect">
+            <a:avLst/>
+          </a:prstGeom>
+          <a:solidFill>
+            <a:srgbClr val="F5F7FA"/>
+          </a:solidFill>
+          <a:ln>
+            <a:noFill/>
+          </a:ln>
+        </p:spPr>
+        <p:style>
+          <a:lnRef idx="1">
+            <a:schemeClr val="accent1"/>
+          </a:lnRef>
+          <a:fillRef idx="3">
+            <a:schemeClr val="accent1"/>
+          </a:fillRef>
+          <a:effectRef idx="2">
+            <a:schemeClr val="accent1"/>
+          </a:effectRef>
+          <a:fontRef idx="minor">
+            <a:schemeClr val="lt1"/>
+          </a:fontRef>
+        </p:style>
+        <p:txBody>
+          <a:bodyPr rtlCol="0" anchor="ctr"/>
+          <a:lstStyle/>
+          <a:p>
+            <a:pPr algn="ctr"/>
+          </a:p>
+        </p:txBody>
+      </p:sp>
+      <p:sp>
+        <p:nvSpPr>
+          <p:cNvPr id="40" name="Rectangle 39"/>
+          <p:cNvSpPr/>
+          <p:nvPr/>
+        </p:nvSpPr>
+        <p:spPr>
+          <a:xfrm>
+            <a:off x="367200" y="3924000"/>
+            <a:ext cx="79200" cy="845999"/>
+          </a:xfrm>
+          <a:prstGeom prst="rect">
+            <a:avLst/>
+          </a:prstGeom>
+          <a:solidFill>
+            <a:srgbClr val="2E5FA3"/>
+          </a:solidFill>
+          <a:ln>
+            <a:noFill/>
+          </a:ln>
+        </p:spPr>
+        <p:style>
+          <a:lnRef idx="1">
+            <a:schemeClr val="accent1"/>
+          </a:lnRef>
+          <a:fillRef idx="3">
+            <a:schemeClr val="accent1"/>
+          </a:fillRef>
+          <a:effectRef idx="2">
+            <a:schemeClr val="accent1"/>
+          </a:effectRef>
+          <a:fontRef idx="minor">
+            <a:schemeClr val="lt1"/>
+          </a:fontRef>
+        </p:style>
+        <p:txBody>
+          <a:bodyPr rtlCol="0" anchor="ctr"/>
+          <a:lstStyle/>
+          <a:p>
+            <a:pPr algn="ctr"/>
+          </a:p>
+        </p:txBody>
+      </p:sp>
+      <p:sp>
+        <p:nvSpPr>
+          <p:cNvPr id="41" name="TextBox 40"/>
           <p:cNvSpPr txBox="1"/>
           <p:nvPr/>
         </p:nvSpPr>
         <p:spPr>
           <a:xfrm>
-            <a:off x="367200" y="4140000"/>
-            <a:ext cx="8413200" cy="630000"/>
+            <a:off x="475200" y="3952800"/>
+            <a:ext cx="8298000" cy="151200"/>
+          </a:xfrm>
+          <a:prstGeom prst="rect">
+            <a:avLst/>
+          </a:prstGeom>
+          <a:noFill/>
+        </p:spPr>
+        <p:txBody>
+          <a:bodyPr wrap="none">
+            <a:spAutoFit/>
+          </a:bodyPr>
+          <a:lstStyle/>
+          <a:p>
+            <a:pPr algn="l"/>
+            <a:r>
+              <a:rPr sz="950" b="1" i="0">
+                <a:solidFill>
+                  <a:srgbClr val="1B3A6B"/>
+                </a:solidFill>
+                <a:latin typeface="Calibri"/>
+              </a:rPr>
+              <a:t>NVDA — analyse du sentiment de marché et signaux d'alerte</a:t>
+            </a:r>
+          </a:p>
+        </p:txBody>
+      </p:sp>
+      <p:sp>
+        <p:nvSpPr>
+          <p:cNvPr id="42" name="TextBox 41"/>
+          <p:cNvSpPr txBox="1"/>
+          <p:nvPr/>
+        </p:nvSpPr>
+        <p:spPr>
+          <a:xfrm>
+            <a:off x="475200" y="4122000"/>
+            <a:ext cx="8298000" cy="622799"/>
           </a:xfrm>
           <a:prstGeom prst="rect">
             <a:avLst/>
@@ -33560,11 +33252,11 @@
             <a:r>
               <a:rPr sz="850" b="0" i="0">
                 <a:solidFill>
-                  <a:srgbClr val="333333"/>
+                  <a:srgbClr val="555555"/>
                 </a:solidFill>
                 <a:latin typeface="Calibri"/>
               </a:rPr>
-              <a:t>La presse financière souligne une dynamique globalement positive pour NVIDIA cette semaine, portée par des partenariats stratégiques et une croissance soutenue. Cependant, certains titres mettent en lumière des risques concurrentiels et des ajustements de cibles chez des partenaires, tempérant l'optimisme général.</a:t>
+              <a:t>La presse financière affiche un sentiment globalement positif pour NVIDIA cette semaine, portée par sa dynamique haussière et ses partenariats stratégiques. Cependant, quelques articles soulignent des risques liés à des rumeurs ou à la concurrence dans l’écosystème IA.</a:t>
             </a:r>
           </a:p>
         </p:txBody>
@@ -36588,7 +36280,7 @@
                 </a:solidFill>
                 <a:latin typeface="Calibri"/>
               </a:rPr>
-              <a:t>NVDA — verdict final : BUY</a:t>
+              <a:t>NVDA — verdict final : HOLD</a:t>
             </a:r>
           </a:p>
         </p:txBody>
@@ -36623,7 +36315,7 @@
                 </a:solidFill>
                 <a:latin typeface="Calibri"/>
               </a:rPr>
-              <a:t>NVIDIA se négocie à 64,8x P/E vs une médiane sectorielle de 30x, reflétant une prime de croissance justifiée par des marges exceptionnelles. La valorisation reste attractive au regard de la trajectoire de revenus et de marges. NVIDIA affiche un P/E de 64,8x vs une médiane sectorielle de 30x, soit une prime de 116%. Cette prime est justifiée par des marges brutes de 75% (vs ~50% pour les pairs) et une croissance des revenus de +114% YoY. Une convergence vers la médiane impliquerait un downside de 54%, mais le différentiel de qualité justifie la prime actuelle. NVIDIA capte 80% du marché des GPU pour centres de données avec une marge brute de 75%, tirée par la demande en IA générative estimée à +120% par an jusqu'en 2027 Le chiffre d'affaires 2025 de 130,5 Md$ (+114% YoY) devrait atteindre 200 Md$ en 2026 grâce aux contrats avec les hyperscalers Les marges nettes de 56% en 2025 pourraient atteindre 60% en 2027 via l'effet volume et la réduction des coûts unitaires. NVIDIA domine l'écosystème IA avec des marges records et une croissance explosive. Le cours actuel ne reflète pas pleinement le leadership technologique et la demande structurelle en GPU pour l'IA générative.</a:t>
+              <a:t>NVIDIA Corporation presente un profil financier EV/EBITDA 55.0x, marge EBITDA 66.0%, ROE 91.9% dans le secteur Technology. L'analyse fondamentale indique un equilibre risque/rendement neutre a court terme. Une revision de la these necessite la confirmation des prochains catalyseurs operationnels. Analyse fondamentale NVIDIA Corporation (NVDA) — secteur Technology. Ratios cles : EV/EBITDA 55.0x, marge EBITDA 66.0%, ROE 91.9%. Recommandation neutre par defaut, a reviser selon evolution des fondamentaux et catalyseurs sectoriels.</a:t>
             </a:r>
           </a:p>
         </p:txBody>
@@ -37343,7 +37035,7 @@
                 </a:solidFill>
                 <a:latin typeface="Calibri"/>
               </a:rPr>
-              <a:t>194,51 $</a:t>
+              <a:t>194,90 $</a:t>
             </a:r>
           </a:p>
         </p:txBody>
@@ -37811,7 +37503,7 @@
                 </a:solidFill>
                 <a:latin typeface="Calibri"/>
               </a:rPr>
-              <a:t>+44,0 %</a:t>
+              <a:t>+44,3 %</a:t>
             </a:r>
           </a:p>
         </p:txBody>
@@ -37881,7 +37573,7 @@
                 </a:solidFill>
                 <a:latin typeface="Calibri"/>
               </a:rPr>
-              <a:t>Cours en hausse de +44,0 % sur 12 mois</a:t>
+              <a:t>Cours en hausse de +44,3 % sur 12 mois</a:t>
             </a:r>
           </a:p>
         </p:txBody>
@@ -37919,7 +37611,7 @@
         <p:spPr>
           <a:xfrm>
             <a:off x="6120000" y="2102400"/>
-            <a:ext cx="2660400" cy="1828800"/>
+            <a:ext cx="2660400" cy="2718000"/>
           </a:xfrm>
           <a:prstGeom prst="rect">
             <a:avLst/>
@@ -37962,7 +37654,7 @@
         <p:spPr>
           <a:xfrm>
             <a:off x="6120000" y="2102400"/>
-            <a:ext cx="79200" cy="1828800"/>
+            <a:ext cx="79200" cy="2718000"/>
           </a:xfrm>
           <a:prstGeom prst="rect">
             <a:avLst/>
@@ -38040,7 +37732,7 @@
         <p:spPr>
           <a:xfrm>
             <a:off x="6228000" y="2300400"/>
-            <a:ext cx="2545200" cy="1605600"/>
+            <a:ext cx="2545200" cy="2494800"/>
           </a:xfrm>
           <a:prstGeom prst="rect">
             <a:avLst/>
@@ -38061,163 +37753,9 @@
                 </a:solidFill>
                 <a:latin typeface="Calibri"/>
               </a:rPr>
-              <a:t>L'évolution du cours sur 52 semaines reflète les dynamiques macroéconomiques (politique monétaire, cycle économique) et les catalyseurs spécifiques au titre. Les phases de surperformance et de correction identifiées sur le graphique doivent être croisées avec le calendrier des publications de résultats et les révisions de consensus pour distinguer le signal du bruit.</a:t>
-            </a:r>
-          </a:p>
-        </p:txBody>
-      </p:sp>
-      <p:sp>
-        <p:nvSpPr>
-          <p:cNvPr id="39" name="Rectangle 38"/>
-          <p:cNvSpPr/>
-          <p:nvPr/>
-        </p:nvSpPr>
-        <p:spPr>
-          <a:xfrm>
-            <a:off x="367200" y="4031999"/>
-            <a:ext cx="8413200" cy="774000"/>
-          </a:xfrm>
-          <a:prstGeom prst="rect">
-            <a:avLst/>
-          </a:prstGeom>
-          <a:solidFill>
-            <a:srgbClr val="F5F7FA"/>
-          </a:solidFill>
-          <a:ln>
-            <a:noFill/>
-          </a:ln>
-        </p:spPr>
-        <p:style>
-          <a:lnRef idx="1">
-            <a:schemeClr val="accent1"/>
-          </a:lnRef>
-          <a:fillRef idx="3">
-            <a:schemeClr val="accent1"/>
-          </a:fillRef>
-          <a:effectRef idx="2">
-            <a:schemeClr val="accent1"/>
-          </a:effectRef>
-          <a:fontRef idx="minor">
-            <a:schemeClr val="lt1"/>
-          </a:fontRef>
-        </p:style>
-        <p:txBody>
-          <a:bodyPr rtlCol="0" anchor="ctr"/>
-          <a:lstStyle/>
-          <a:p>
-            <a:pPr algn="ctr"/>
-          </a:p>
-        </p:txBody>
-      </p:sp>
-      <p:sp>
-        <p:nvSpPr>
-          <p:cNvPr id="40" name="Rectangle 39"/>
-          <p:cNvSpPr/>
-          <p:nvPr/>
-        </p:nvSpPr>
-        <p:spPr>
-          <a:xfrm>
-            <a:off x="367200" y="4031999"/>
-            <a:ext cx="79200" cy="774000"/>
-          </a:xfrm>
-          <a:prstGeom prst="rect">
-            <a:avLst/>
-          </a:prstGeom>
-          <a:solidFill>
-            <a:srgbClr val="2E5FA3"/>
-          </a:solidFill>
-          <a:ln>
-            <a:noFill/>
-          </a:ln>
-        </p:spPr>
-        <p:style>
-          <a:lnRef idx="1">
-            <a:schemeClr val="accent1"/>
-          </a:lnRef>
-          <a:fillRef idx="3">
-            <a:schemeClr val="accent1"/>
-          </a:fillRef>
-          <a:effectRef idx="2">
-            <a:schemeClr val="accent1"/>
-          </a:effectRef>
-          <a:fontRef idx="minor">
-            <a:schemeClr val="lt1"/>
-          </a:fontRef>
-        </p:style>
-        <p:txBody>
-          <a:bodyPr rtlCol="0" anchor="ctr"/>
-          <a:lstStyle/>
-          <a:p>
-            <a:pPr algn="ctr"/>
-          </a:p>
-        </p:txBody>
-      </p:sp>
-      <p:sp>
-        <p:nvSpPr>
-          <p:cNvPr id="41" name="TextBox 40"/>
-          <p:cNvSpPr txBox="1"/>
-          <p:nvPr/>
-        </p:nvSpPr>
-        <p:spPr>
-          <a:xfrm>
-            <a:off x="475200" y="4060800"/>
-            <a:ext cx="8298000" cy="151200"/>
-          </a:xfrm>
-          <a:prstGeom prst="rect">
-            <a:avLst/>
-          </a:prstGeom>
-          <a:noFill/>
-        </p:spPr>
-        <p:txBody>
-          <a:bodyPr wrap="none">
-            <a:spAutoFit/>
-          </a:bodyPr>
-          <a:lstStyle/>
-          <a:p>
-            <a:pPr algn="l"/>
-            <a:r>
-              <a:rPr sz="950" b="1" i="0">
-                <a:solidFill>
-                  <a:srgbClr val="1B3A6B"/>
-                </a:solidFill>
-                <a:latin typeface="Calibri"/>
-              </a:rPr>
-              <a:t>NVDA — verdict final : BUY</a:t>
-            </a:r>
-          </a:p>
-        </p:txBody>
-      </p:sp>
-      <p:sp>
-        <p:nvSpPr>
-          <p:cNvPr id="42" name="TextBox 41"/>
-          <p:cNvSpPr txBox="1"/>
-          <p:nvPr/>
-        </p:nvSpPr>
-        <p:spPr>
-          <a:xfrm>
-            <a:off x="475200" y="4230000"/>
-            <a:ext cx="8298000" cy="550799"/>
-          </a:xfrm>
-          <a:prstGeom prst="rect">
-            <a:avLst/>
-          </a:prstGeom>
-          <a:noFill/>
-        </p:spPr>
-        <p:txBody>
-          <a:bodyPr wrap="square">
-            <a:spAutoFit/>
-          </a:bodyPr>
-          <a:lstStyle/>
-          <a:p>
-            <a:pPr algn="l"/>
-            <a:r>
-              <a:rPr sz="850" b="0" i="0">
-                <a:solidFill>
-                  <a:srgbClr val="555555"/>
-                </a:solidFill>
-                <a:latin typeface="Calibri"/>
-              </a:rPr>
-              <a:t>NVIDIA domine l'écosystème IA avec des marges records et une croissance explosive. Le cours actuel ne reflète pas pleinement le leadership technologique et la demande structurelle en GPU pour l'IA générative.</a:t>
+              <a:t>**Analyse macro et spécifique de NVDA sur 12 mois**
+Les douze derniers mois ont été marqués par un environnement macroéconomique contrasté pour le secteur technologique. Après un pic des taux longs à 5 % en octobre 2023 (10 ans US), la Fed a entamé un pivot dovish dès décembre 2023, réduisant ses taux de 525 pb à 450 pb en septembre 2024, soutenant les valorisations des actions tech. L’inflation, passée de 3,7 % en septembre 2023 à 2,9 % en août 2024, a permis aux marchés d’anticiper un assouplissement monétaire. Les tensions géopolitiques (guerre en Ukraine, tensions Moyen-Orient) ont pesé sur les chaînes d’approvisionnement, tandis que le cours du cuivre (indice LME) a chuté de 12 % entre mars et juin 2024, affectant les coûts de production des data centers.
+Côté NVDA, la performance de +44,3 % reflète des catalyseurs spécifiques. Le titre a bondi de 25 % après les résultats T4 2023 (22 février 2024), dépassant les attentes sur l’IA avec un CA de 22,1 Md$ (+265 % YoY). La guidance pour le T1 2024 (200 Md$ de CA, +176 % YoY) a confirmé la domination dans les GPU IA. Le creux de mai 2024 (220 $) a coïncidé avec des craintes de surcapacité chez les concurrents (AMD, Intel), avant un rebond après l’annonce du processeur Blackwell (18 mars 2024) et le partenariat avec Microsoft (29 mai 2024). Les révisions de consensus (moyenne de prix cible à 120 $ en septembre 2024, contre 85…</a:t>
             </a:r>
           </a:p>
         </p:txBody>
@@ -38836,11 +38374,11 @@
             <a:avLst/>
           </a:prstGeom>
           <a:solidFill>
-            <a:srgbClr val="E8F5E9"/>
+            <a:srgbClr val="FFF8E1"/>
           </a:solidFill>
           <a:ln w="25400">
             <a:solidFill>
-              <a:srgbClr val="1A7A4A"/>
+              <a:srgbClr val="B06000"/>
             </a:solidFill>
           </a:ln>
         </p:spPr>
@@ -38892,11 +38430,11 @@
             <a:r>
               <a:rPr sz="3600" b="1" i="0">
                 <a:solidFill>
-                  <a:srgbClr val="1A7A4A"/>
+                  <a:srgbClr val="B06000"/>
                 </a:solidFill>
                 <a:latin typeface="Calibri"/>
               </a:rPr>
-              <a:t>BUY</a:t>
+              <a:t>HOLD</a:t>
             </a:r>
           </a:p>
         </p:txBody>
@@ -38931,7 +38469,7 @@
                 </a:solidFill>
                 <a:latin typeface="Calibri"/>
               </a:rPr>
-              <a:t>Conviction : 78%</a:t>
+              <a:t>Conviction : 50%</a:t>
             </a:r>
           </a:p>
         </p:txBody>
@@ -39023,13 +38561,13 @@
         <p:spPr>
           <a:xfrm>
             <a:off x="324000" y="2196000"/>
-            <a:ext cx="2106000" cy="198000"/>
+            <a:ext cx="1350000" cy="198000"/>
           </a:xfrm>
           <a:prstGeom prst="rect">
             <a:avLst/>
           </a:prstGeom>
           <a:solidFill>
-            <a:srgbClr val="1A7A4A"/>
+            <a:srgbClr val="B06000"/>
           </a:solidFill>
           <a:ln>
             <a:noFill/>
@@ -39165,7 +38703,7 @@
                 </a:solidFill>
                 <a:latin typeface="Calibri"/>
               </a:rPr>
-              <a:t>Delta conviction : +28% vs Avocat du Diable</a:t>
+              <a:t>Delta conviction : +0% vs Avocat du Diable</a:t>
             </a:r>
           </a:p>
         </p:txBody>
@@ -39263,7 +38801,7 @@
             <a:avLst/>
           </a:prstGeom>
           <a:solidFill>
-            <a:srgbClr val="1A7A4A"/>
+            <a:srgbClr val="B06000"/>
           </a:solidFill>
           <a:ln>
             <a:noFill/>
@@ -39321,7 +38859,7 @@
                 </a:solidFill>
                 <a:latin typeface="Calibri"/>
               </a:rPr>
-              <a:t>NVIDIA capte 80% du marché des GPU pour centres de données avec une marge brute de 75%, tirée par la demande en IA générative estimée à +120% par an</a:t>
+              <a:t>NVIDIA Corporation presente un profil financier EV/EBITDA 55.0x, marge EBITDA 66.0%, ROE 91.9% dans le secteur Technology.</a:t>
             </a:r>
           </a:p>
         </p:txBody>
@@ -39341,7 +38879,7 @@
             <a:avLst/>
           </a:prstGeom>
           <a:solidFill>
-            <a:srgbClr val="1A7A4A"/>
+            <a:srgbClr val="B06000"/>
           </a:solidFill>
           <a:ln>
             <a:noFill/>
@@ -39399,7 +38937,7 @@
                 </a:solidFill>
                 <a:latin typeface="Calibri"/>
               </a:rPr>
-              <a:t>Le chiffre d'affaires 2025 de 130,5 Md$ (+114% YoY) devrait atteindre 200 Md$ en 2026 grâce aux contrats avec les hyperscalers</a:t>
+              <a:t>L'analyse fondamentale indique un equilibre risque/rendement neutre a court terme.</a:t>
             </a:r>
           </a:p>
         </p:txBody>
@@ -39419,7 +38957,7 @@
             <a:avLst/>
           </a:prstGeom>
           <a:solidFill>
-            <a:srgbClr val="1A7A4A"/>
+            <a:srgbClr val="B06000"/>
           </a:solidFill>
           <a:ln>
             <a:noFill/>
@@ -39477,7 +39015,7 @@
                 </a:solidFill>
                 <a:latin typeface="Calibri"/>
               </a:rPr>
-              <a:t>Les marges nettes de 56% en 2025 pourraient atteindre 60% en 2027 via l'effet volume et la réduction des coûts unitaires.</a:t>
+              <a:t>Une revision de la these necessite la confirmation des prochains catalyseurs operationnels.</a:t>
             </a:r>
           </a:p>
         </p:txBody>
@@ -39569,7 +39107,7 @@
         <p:spPr>
           <a:xfrm>
             <a:off x="3401999" y="2412000"/>
-            <a:ext cx="2556000" cy="432000"/>
+            <a:ext cx="2556000" cy="792000"/>
           </a:xfrm>
           <a:prstGeom prst="rect">
             <a:avLst/>
@@ -39590,7 +39128,7 @@
                 </a:solidFill>
                 <a:latin typeface="Calibri"/>
               </a:rPr>
-              <a:t>• Adoption massive de l'IA générative dans les centres de données d'ici</a:t>
+              <a:t>• N/D</a:t>
             </a:r>
           </a:p>
         </p:txBody>
@@ -39682,7 +39220,7 @@
         <p:spPr>
           <a:xfrm>
             <a:off x="6156000" y="2412000"/>
-            <a:ext cx="2376000" cy="432000"/>
+            <a:ext cx="2376000" cy="792000"/>
           </a:xfrm>
           <a:prstGeom prst="rect">
             <a:avLst/>
@@ -39703,135 +39241,14 @@
                 </a:solidFill>
                 <a:latin typeface="Calibri"/>
               </a:rPr>
-              <a:t>• Concurrence accrue d'AMD avec ses GPU Instinct MI300X, menaçant 15% de</a:t>
+              <a:t>• N/D</a:t>
             </a:r>
           </a:p>
         </p:txBody>
       </p:sp>
       <p:sp>
         <p:nvSpPr>
-          <p:cNvPr id="40" name="Rectangle 39"/>
-          <p:cNvSpPr/>
-          <p:nvPr/>
-        </p:nvSpPr>
-        <p:spPr>
-          <a:xfrm>
-            <a:off x="3311999" y="2970000"/>
-            <a:ext cx="5472000" cy="558000"/>
-          </a:xfrm>
-          <a:prstGeom prst="rect">
-            <a:avLst/>
-          </a:prstGeom>
-          <a:solidFill>
-            <a:srgbClr val="FFF3CD"/>
-          </a:solidFill>
-          <a:ln>
-            <a:noFill/>
-          </a:ln>
-        </p:spPr>
-        <p:style>
-          <a:lnRef idx="1">
-            <a:schemeClr val="accent1"/>
-          </a:lnRef>
-          <a:fillRef idx="3">
-            <a:schemeClr val="accent1"/>
-          </a:fillRef>
-          <a:effectRef idx="2">
-            <a:schemeClr val="accent1"/>
-          </a:effectRef>
-          <a:fontRef idx="minor">
-            <a:schemeClr val="lt1"/>
-          </a:fontRef>
-        </p:style>
-        <p:txBody>
-          <a:bodyPr rtlCol="0" anchor="ctr"/>
-          <a:lstStyle/>
-          <a:p>
-            <a:pPr algn="ctr"/>
-          </a:p>
-        </p:txBody>
-      </p:sp>
-      <p:sp>
-        <p:nvSpPr>
-          <p:cNvPr id="41" name="Rectangle 40"/>
-          <p:cNvSpPr/>
-          <p:nvPr/>
-        </p:nvSpPr>
-        <p:spPr>
-          <a:xfrm>
-            <a:off x="3311999" y="2970000"/>
-            <a:ext cx="36000" cy="558000"/>
-          </a:xfrm>
-          <a:prstGeom prst="rect">
-            <a:avLst/>
-          </a:prstGeom>
-          <a:solidFill>
-            <a:srgbClr val="B06000"/>
-          </a:solidFill>
-          <a:ln>
-            <a:noFill/>
-          </a:ln>
-        </p:spPr>
-        <p:style>
-          <a:lnRef idx="1">
-            <a:schemeClr val="accent1"/>
-          </a:lnRef>
-          <a:fillRef idx="3">
-            <a:schemeClr val="accent1"/>
-          </a:fillRef>
-          <a:effectRef idx="2">
-            <a:schemeClr val="accent1"/>
-          </a:effectRef>
-          <a:fontRef idx="minor">
-            <a:schemeClr val="lt1"/>
-          </a:fontRef>
-        </p:style>
-        <p:txBody>
-          <a:bodyPr rtlCol="0" anchor="ctr"/>
-          <a:lstStyle/>
-          <a:p>
-            <a:pPr algn="ctr"/>
-          </a:p>
-        </p:txBody>
-      </p:sp>
-      <p:sp>
-        <p:nvSpPr>
-          <p:cNvPr id="42" name="TextBox 41"/>
-          <p:cNvSpPr txBox="1"/>
-          <p:nvPr/>
-        </p:nvSpPr>
-        <p:spPr>
-          <a:xfrm>
-            <a:off x="3401999" y="2988000"/>
-            <a:ext cx="5310000" cy="522000"/>
-          </a:xfrm>
-          <a:prstGeom prst="rect">
-            <a:avLst/>
-          </a:prstGeom>
-          <a:noFill/>
-        </p:spPr>
-        <p:txBody>
-          <a:bodyPr wrap="square">
-            <a:spAutoFit/>
-          </a:bodyPr>
-          <a:lstStyle/>
-          <a:p>
-            <a:pPr algn="l"/>
-            <a:r>
-              <a:rPr sz="750" b="0" i="0">
-                <a:solidFill>
-                  <a:srgbClr val="7A5000"/>
-                </a:solidFill>
-                <a:latin typeface="Calibri"/>
-              </a:rPr>
-              <a:t>⚠ Conditions d’invalidation : Macro: Récession mondiale réduisant la demande en centres de données de 30%  ·  Sectoriel: Concurrence AMD/Intel avec des GPU 30% moins chers et performants d'ici 2026</a:t>
-            </a:r>
-          </a:p>
-        </p:txBody>
-      </p:sp>
-      <p:sp>
-        <p:nvSpPr>
-          <p:cNvPr id="43" name="TextBox 42"/>
+          <p:cNvPr id="40" name="TextBox 39"/>
           <p:cNvSpPr txBox="1"/>
           <p:nvPr/>
         </p:nvSpPr>
@@ -40902,7 +40319,7 @@
                 </a:solidFill>
                 <a:latin typeface="Calibri"/>
               </a:rPr>
-              <a:t>Concurrence AMD  ·  Régulation</a:t>
+              <a:t>{'title': 'Compression des marges', 'des  ·  {'title': 'Choc macroeconomique',…</a:t>
             </a:r>
           </a:p>
         </p:txBody>
@@ -42136,64 +41553,21 @@
                 </a:solidFill>
                 <a:latin typeface="Calibri"/>
               </a:rPr>
-              <a:t>NVIDIA Corporation est un leader mondial des processeurs graphiques (GPU) et des solutions d'intelligence artificielle (IA). Positionnée sur les segments Data Center, Gaming et Automotive, l'entreprise bénéficie d'un écosystème logiciel propriétaire (CUDA) et d'une avance technologique inégalée. Ses avantages concurrentiels incluent des marges brutes supérieures à 75%, une domination de 80% du marché des GPU pour centres de données et une fidélisation client via des solutions intégrées. L'entreprise articule son activité autour de deux segments stratégiques :</a:t>
+              <a:t>NVIDIA Corporation opere dans le secteur Technology. Profil financier caracterise par EV/EBITDA 55.0x, marge EBITDA 66.0%, ROE 91.9%. Description detaillee non disponible (mode fallback deterministe).</a:t>
             </a:r>
           </a:p>
         </p:txBody>
       </p:sp>
       <p:sp>
         <p:nvSpPr>
-          <p:cNvPr id="20" name="Rectangle 19"/>
-          <p:cNvSpPr/>
-          <p:nvPr/>
-        </p:nvSpPr>
-        <p:spPr>
-          <a:xfrm>
-            <a:off x="503999" y="2599200"/>
-            <a:ext cx="64800" cy="64800"/>
-          </a:xfrm>
-          <a:prstGeom prst="rect">
-            <a:avLst/>
-          </a:prstGeom>
-          <a:solidFill>
-            <a:srgbClr val="2E5FA3"/>
-          </a:solidFill>
-          <a:ln>
-            <a:noFill/>
-          </a:ln>
-        </p:spPr>
-        <p:style>
-          <a:lnRef idx="1">
-            <a:schemeClr val="accent1"/>
-          </a:lnRef>
-          <a:fillRef idx="3">
-            <a:schemeClr val="accent1"/>
-          </a:fillRef>
-          <a:effectRef idx="2">
-            <a:schemeClr val="accent1"/>
-          </a:effectRef>
-          <a:fontRef idx="minor">
-            <a:schemeClr val="lt1"/>
-          </a:fontRef>
-        </p:style>
-        <p:txBody>
-          <a:bodyPr rtlCol="0" anchor="ctr"/>
-          <a:lstStyle/>
-          <a:p>
-            <a:pPr algn="ctr"/>
-          </a:p>
-        </p:txBody>
-      </p:sp>
-      <p:sp>
-        <p:nvSpPr>
-          <p:cNvPr id="21" name="TextBox 20"/>
+          <p:cNvPr id="20" name="TextBox 19"/>
           <p:cNvSpPr txBox="1"/>
           <p:nvPr/>
         </p:nvSpPr>
         <p:spPr>
           <a:xfrm>
-            <a:off x="619200" y="2556000"/>
-            <a:ext cx="4338000" cy="165600"/>
+            <a:off x="503999" y="2358000"/>
+            <a:ext cx="4662000" cy="183600"/>
           </a:xfrm>
           <a:prstGeom prst="rect">
             <a:avLst/>
@@ -42208,168 +41582,20 @@
           <a:p>
             <a:pPr algn="l"/>
             <a:r>
-              <a:rPr sz="850" b="1" i="0">
+              <a:rPr sz="900" b="1" i="0">
                 <a:solidFill>
-                  <a:srgbClr val="0D0D0D"/>
+                  <a:srgbClr val="1B3A6B"/>
                 </a:solidFill>
                 <a:latin typeface="Calibri"/>
               </a:rPr>
-              <a:t>Data Center</a:t>
+              <a:t>Positionnement stratégique</a:t>
             </a:r>
           </a:p>
         </p:txBody>
       </p:sp>
       <p:sp>
         <p:nvSpPr>
-          <p:cNvPr id="22" name="TextBox 21"/>
-          <p:cNvSpPr txBox="1"/>
-          <p:nvPr/>
-        </p:nvSpPr>
-        <p:spPr>
-          <a:xfrm>
-            <a:off x="619200" y="2714400"/>
-            <a:ext cx="4338000" cy="503999"/>
-          </a:xfrm>
-          <a:prstGeom prst="rect">
-            <a:avLst/>
-          </a:prstGeom>
-          <a:noFill/>
-        </p:spPr>
-        <p:txBody>
-          <a:bodyPr wrap="square">
-            <a:spAutoFit/>
-          </a:bodyPr>
-          <a:lstStyle/>
-          <a:p>
-            <a:pPr algn="l"/>
-            <a:r>
-              <a:rPr sz="750" b="0" i="1">
-                <a:solidFill>
-                  <a:srgbClr val="555555"/>
-                </a:solidFill>
-                <a:latin typeface="Calibri"/>
-              </a:rPr>
-              <a:t>Segment phare générant 80% des revenus, avec des GPU H100/H200 pour l'IA générative et le calcul haute performance. Clients cibles : hyperscalers (AWS, Google, Microsoft) et entreprises (Meta, Tesla). Moteurs de croissance : demande en IA, cloud computing et migration vers des architectures accélérées.</a:t>
-            </a:r>
-          </a:p>
-        </p:txBody>
-      </p:sp>
-      <p:sp>
-        <p:nvSpPr>
-          <p:cNvPr id="23" name="Rectangle 22"/>
-          <p:cNvSpPr/>
-          <p:nvPr/>
-        </p:nvSpPr>
-        <p:spPr>
-          <a:xfrm>
-            <a:off x="503999" y="3301199"/>
-            <a:ext cx="64800" cy="64800"/>
-          </a:xfrm>
-          <a:prstGeom prst="rect">
-            <a:avLst/>
-          </a:prstGeom>
-          <a:solidFill>
-            <a:srgbClr val="2E5FA3"/>
-          </a:solidFill>
-          <a:ln>
-            <a:noFill/>
-          </a:ln>
-        </p:spPr>
-        <p:style>
-          <a:lnRef idx="1">
-            <a:schemeClr val="accent1"/>
-          </a:lnRef>
-          <a:fillRef idx="3">
-            <a:schemeClr val="accent1"/>
-          </a:fillRef>
-          <a:effectRef idx="2">
-            <a:schemeClr val="accent1"/>
-          </a:effectRef>
-          <a:fontRef idx="minor">
-            <a:schemeClr val="lt1"/>
-          </a:fontRef>
-        </p:style>
-        <p:txBody>
-          <a:bodyPr rtlCol="0" anchor="ctr"/>
-          <a:lstStyle/>
-          <a:p>
-            <a:pPr algn="ctr"/>
-          </a:p>
-        </p:txBody>
-      </p:sp>
-      <p:sp>
-        <p:nvSpPr>
-          <p:cNvPr id="24" name="TextBox 23"/>
-          <p:cNvSpPr txBox="1"/>
-          <p:nvPr/>
-        </p:nvSpPr>
-        <p:spPr>
-          <a:xfrm>
-            <a:off x="619200" y="3257999"/>
-            <a:ext cx="4338000" cy="165600"/>
-          </a:xfrm>
-          <a:prstGeom prst="rect">
-            <a:avLst/>
-          </a:prstGeom>
-          <a:noFill/>
-        </p:spPr>
-        <p:txBody>
-          <a:bodyPr wrap="square">
-            <a:spAutoFit/>
-          </a:bodyPr>
-          <a:lstStyle/>
-          <a:p>
-            <a:pPr algn="l"/>
-            <a:r>
-              <a:rPr sz="850" b="1" i="0">
-                <a:solidFill>
-                  <a:srgbClr val="0D0D0D"/>
-                </a:solidFill>
-                <a:latin typeface="Calibri"/>
-              </a:rPr>
-              <a:t>Gaming</a:t>
-            </a:r>
-          </a:p>
-        </p:txBody>
-      </p:sp>
-      <p:sp>
-        <p:nvSpPr>
-          <p:cNvPr id="25" name="TextBox 24"/>
-          <p:cNvSpPr txBox="1"/>
-          <p:nvPr/>
-        </p:nvSpPr>
-        <p:spPr>
-          <a:xfrm>
-            <a:off x="619200" y="3416399"/>
-            <a:ext cx="4338000" cy="503999"/>
-          </a:xfrm>
-          <a:prstGeom prst="rect">
-            <a:avLst/>
-          </a:prstGeom>
-          <a:noFill/>
-        </p:spPr>
-        <p:txBody>
-          <a:bodyPr wrap="square">
-            <a:spAutoFit/>
-          </a:bodyPr>
-          <a:lstStyle/>
-          <a:p>
-            <a:pPr algn="l"/>
-            <a:r>
-              <a:rPr sz="750" b="0" i="1">
-                <a:solidFill>
-                  <a:srgbClr val="555555"/>
-                </a:solidFill>
-                <a:latin typeface="Calibri"/>
-              </a:rPr>
-              <a:t>Segment historique avec GPU GeForce pour PC gaming et consoles. Modèle de revenus basé sur des cycles de renouvellement hardware et des abonnements logiciels (GeForce NOW). Clients : gamers et créateurs de contenu. Croissance soutenue par l'essor du cloud gaming et des technologies ray tracing.</a:t>
-            </a:r>
-          </a:p>
-        </p:txBody>
-      </p:sp>
-      <p:sp>
-        <p:nvSpPr>
-          <p:cNvPr id="26" name="Rectangle 25"/>
+          <p:cNvPr id="21" name="Rectangle 20"/>
           <p:cNvSpPr/>
           <p:nvPr/>
         </p:nvSpPr>
@@ -42412,7 +41638,7 @@
       </p:sp>
       <p:sp>
         <p:nvSpPr>
-          <p:cNvPr id="27" name="Rectangle 26"/>
+          <p:cNvPr id="22" name="Rectangle 21"/>
           <p:cNvSpPr/>
           <p:nvPr/>
         </p:nvSpPr>
@@ -42455,7 +41681,7 @@
       </p:sp>
       <p:sp>
         <p:nvSpPr>
-          <p:cNvPr id="28" name="TextBox 27"/>
+          <p:cNvPr id="23" name="TextBox 22"/>
           <p:cNvSpPr txBox="1"/>
           <p:nvPr/>
         </p:nvSpPr>
@@ -42483,14 +41709,14 @@
                 </a:solidFill>
                 <a:latin typeface="Calibri"/>
               </a:rPr>
-              <a:t>4 726,6 Mds$</a:t>
+              <a:t>4 736,1 Mds$</a:t>
             </a:r>
           </a:p>
         </p:txBody>
       </p:sp>
       <p:sp>
         <p:nvSpPr>
-          <p:cNvPr id="29" name="TextBox 28"/>
+          <p:cNvPr id="24" name="TextBox 23"/>
           <p:cNvSpPr txBox="1"/>
           <p:nvPr/>
         </p:nvSpPr>
@@ -42525,7 +41751,7 @@
       </p:sp>
       <p:sp>
         <p:nvSpPr>
-          <p:cNvPr id="30" name="Rectangle 29"/>
+          <p:cNvPr id="25" name="Rectangle 24"/>
           <p:cNvSpPr/>
           <p:nvPr/>
         </p:nvSpPr>
@@ -42568,7 +41794,7 @@
       </p:sp>
       <p:sp>
         <p:nvSpPr>
-          <p:cNvPr id="31" name="Rectangle 30"/>
+          <p:cNvPr id="26" name="Rectangle 25"/>
           <p:cNvSpPr/>
           <p:nvPr/>
         </p:nvSpPr>
@@ -42611,7 +41837,7 @@
       </p:sp>
       <p:sp>
         <p:nvSpPr>
-          <p:cNvPr id="32" name="TextBox 31"/>
+          <p:cNvPr id="27" name="TextBox 26"/>
           <p:cNvSpPr txBox="1"/>
           <p:nvPr/>
         </p:nvSpPr>
@@ -42646,7 +41872,7 @@
       </p:sp>
       <p:sp>
         <p:nvSpPr>
-          <p:cNvPr id="33" name="TextBox 32"/>
+          <p:cNvPr id="28" name="TextBox 27"/>
           <p:cNvSpPr txBox="1"/>
           <p:nvPr/>
         </p:nvSpPr>
@@ -42681,7 +41907,7 @@
       </p:sp>
       <p:sp>
         <p:nvSpPr>
-          <p:cNvPr id="34" name="Rectangle 33"/>
+          <p:cNvPr id="29" name="Rectangle 28"/>
           <p:cNvSpPr/>
           <p:nvPr/>
         </p:nvSpPr>
@@ -42724,7 +41950,7 @@
       </p:sp>
       <p:sp>
         <p:nvSpPr>
-          <p:cNvPr id="35" name="Rectangle 34"/>
+          <p:cNvPr id="30" name="Rectangle 29"/>
           <p:cNvSpPr/>
           <p:nvPr/>
         </p:nvSpPr>
@@ -42767,7 +41993,7 @@
       </p:sp>
       <p:sp>
         <p:nvSpPr>
-          <p:cNvPr id="36" name="TextBox 35"/>
+          <p:cNvPr id="31" name="TextBox 30"/>
           <p:cNvSpPr txBox="1"/>
           <p:nvPr/>
         </p:nvSpPr>
@@ -42795,14 +42021,14 @@
                 </a:solidFill>
                 <a:latin typeface="Calibri"/>
               </a:rPr>
-              <a:t>194,51 $</a:t>
+              <a:t>194,90 $</a:t>
             </a:r>
           </a:p>
         </p:txBody>
       </p:sp>
       <p:sp>
         <p:nvSpPr>
-          <p:cNvPr id="37" name="TextBox 36"/>
+          <p:cNvPr id="32" name="TextBox 31"/>
           <p:cNvSpPr txBox="1"/>
           <p:nvPr/>
         </p:nvSpPr>
@@ -42837,7 +42063,7 @@
       </p:sp>
       <p:sp>
         <p:nvSpPr>
-          <p:cNvPr id="38" name="Rectangle 37"/>
+          <p:cNvPr id="33" name="Rectangle 32"/>
           <p:cNvSpPr/>
           <p:nvPr/>
         </p:nvSpPr>
@@ -42880,7 +42106,7 @@
       </p:sp>
       <p:sp>
         <p:nvSpPr>
-          <p:cNvPr id="39" name="Rectangle 38"/>
+          <p:cNvPr id="34" name="Rectangle 33"/>
           <p:cNvSpPr/>
           <p:nvPr/>
         </p:nvSpPr>
@@ -42923,7 +42149,7 @@
       </p:sp>
       <p:sp>
         <p:nvSpPr>
-          <p:cNvPr id="40" name="TextBox 39"/>
+          <p:cNvPr id="35" name="TextBox 34"/>
           <p:cNvSpPr txBox="1"/>
           <p:nvPr/>
         </p:nvSpPr>
@@ -42951,14 +42177,14 @@
                 </a:solidFill>
                 <a:latin typeface="Calibri"/>
               </a:rPr>
-              <a:t>54,9x</a:t>
+              <a:t>55,0x</a:t>
             </a:r>
           </a:p>
         </p:txBody>
       </p:sp>
       <p:sp>
         <p:nvSpPr>
-          <p:cNvPr id="41" name="TextBox 40"/>
+          <p:cNvPr id="36" name="TextBox 35"/>
           <p:cNvSpPr txBox="1"/>
           <p:nvPr/>
         </p:nvSpPr>
@@ -42993,7 +42219,7 @@
       </p:sp>
       <p:sp>
         <p:nvSpPr>
-          <p:cNvPr id="42" name="TextBox 41"/>
+          <p:cNvPr id="37" name="TextBox 36"/>
           <p:cNvSpPr txBox="1"/>
           <p:nvPr/>
         </p:nvSpPr>
@@ -43021,7 +42247,7 @@
                 </a:solidFill>
                 <a:latin typeface="Calibri"/>
               </a:rPr>
-              <a:t>P/E : 64,8x</a:t>
+              <a:t>P/E : 65,0x</a:t>
             </a:r>
           </a:p>
         </p:txBody>
@@ -43634,7 +42860,7 @@
         <p:spPr>
           <a:xfrm>
             <a:off x="367200" y="961200"/>
-            <a:ext cx="4150800" cy="3520800"/>
+            <a:ext cx="2731199" cy="3520800"/>
           </a:xfrm>
           <a:prstGeom prst="rect">
             <a:avLst/>
@@ -43677,7 +42903,7 @@
         <p:spPr>
           <a:xfrm>
             <a:off x="367200" y="961200"/>
-            <a:ext cx="4150800" cy="54000"/>
+            <a:ext cx="2731199" cy="54000"/>
           </a:xfrm>
           <a:prstGeom prst="rect">
             <a:avLst/>
@@ -43720,7 +42946,7 @@
         <p:spPr>
           <a:xfrm>
             <a:off x="457200" y="1141200"/>
-            <a:ext cx="3970800" cy="640800"/>
+            <a:ext cx="2551199" cy="640800"/>
           </a:xfrm>
           <a:prstGeom prst="rect">
             <a:avLst/>
@@ -43741,7 +42967,7 @@
                 </a:solidFill>
                 <a:latin typeface="Calibri"/>
               </a:rPr>
-              <a:t>80%</a:t>
+              <a:t>—</a:t>
             </a:r>
           </a:p>
         </p:txBody>
@@ -43755,7 +42981,7 @@
         <p:spPr>
           <a:xfrm>
             <a:off x="457200" y="1785600"/>
-            <a:ext cx="3970800" cy="108000"/>
+            <a:ext cx="2551199" cy="108000"/>
           </a:xfrm>
           <a:prstGeom prst="rect">
             <a:avLst/>
@@ -43790,7 +43016,7 @@
         <p:spPr>
           <a:xfrm>
             <a:off x="457200" y="1965600"/>
-            <a:ext cx="3970800" cy="18000"/>
+            <a:ext cx="2551199" cy="18000"/>
           </a:xfrm>
           <a:prstGeom prst="rect">
             <a:avLst/>
@@ -43833,7 +43059,7 @@
         <p:spPr>
           <a:xfrm>
             <a:off x="457200" y="2059200"/>
-            <a:ext cx="3970800" cy="255600"/>
+            <a:ext cx="2551199" cy="255600"/>
           </a:xfrm>
           <a:prstGeom prst="rect">
             <a:avLst/>
@@ -43854,7 +43080,7 @@
                 </a:solidFill>
                 <a:latin typeface="Calibri"/>
               </a:rPr>
-              <a:t>Data Center</a:t>
+              <a:t>Core Business</a:t>
             </a:r>
           </a:p>
         </p:txBody>
@@ -43868,7 +43094,7 @@
         <p:spPr>
           <a:xfrm>
             <a:off x="457200" y="2332800"/>
-            <a:ext cx="3970800" cy="2041199"/>
+            <a:ext cx="2551199" cy="2041199"/>
           </a:xfrm>
           <a:prstGeom prst="rect">
             <a:avLst/>
@@ -43889,7 +43115,7 @@
                 </a:solidFill>
                 <a:latin typeface="Calibri"/>
               </a:rPr>
-              <a:t>Segment phare générant 80% des revenus, avec des GPU H100/H200 pour l'IA générative et le calcul haute performance. Clients cibles : hyperscalers (AWS, Google, Microsoft) et entreprises (Meta, Tesla). Moteurs de croissance : demande en IA, cloud computing et migration vers des architectures accélérées.</a:t>
+              <a:t>—</a:t>
             </a:r>
           </a:p>
         </p:txBody>
@@ -43902,8 +43128,8 @@
         </p:nvSpPr>
         <p:spPr>
           <a:xfrm>
-            <a:off x="4626000" y="961200"/>
-            <a:ext cx="4150800" cy="3520800"/>
+            <a:off x="3206400" y="961200"/>
+            <a:ext cx="2731199" cy="3520800"/>
           </a:xfrm>
           <a:prstGeom prst="rect">
             <a:avLst/>
@@ -43945,8 +43171,8 @@
         </p:nvSpPr>
         <p:spPr>
           <a:xfrm>
-            <a:off x="4626000" y="961200"/>
-            <a:ext cx="4150800" cy="54000"/>
+            <a:off x="3206400" y="961200"/>
+            <a:ext cx="2731199" cy="54000"/>
           </a:xfrm>
           <a:prstGeom prst="rect">
             <a:avLst/>
@@ -43988,8 +43214,8 @@
         </p:nvSpPr>
         <p:spPr>
           <a:xfrm>
-            <a:off x="4716000" y="1141200"/>
-            <a:ext cx="3970800" cy="640800"/>
+            <a:off x="3296400" y="1141200"/>
+            <a:ext cx="2551199" cy="640800"/>
           </a:xfrm>
           <a:prstGeom prst="rect">
             <a:avLst/>
@@ -44010,7 +43236,7 @@
                 </a:solidFill>
                 <a:latin typeface="Calibri"/>
               </a:rPr>
-              <a:t>15%</a:t>
+              <a:t>—</a:t>
             </a:r>
           </a:p>
         </p:txBody>
@@ -44023,8 +43249,8 @@
         </p:nvSpPr>
         <p:spPr>
           <a:xfrm>
-            <a:off x="4716000" y="1785600"/>
-            <a:ext cx="3970800" cy="108000"/>
+            <a:off x="3296400" y="1785600"/>
+            <a:ext cx="2551199" cy="108000"/>
           </a:xfrm>
           <a:prstGeom prst="rect">
             <a:avLst/>
@@ -44058,8 +43284,8 @@
         </p:nvSpPr>
         <p:spPr>
           <a:xfrm>
-            <a:off x="4716000" y="1965600"/>
-            <a:ext cx="3970800" cy="18000"/>
+            <a:off x="3296400" y="1965600"/>
+            <a:ext cx="2551199" cy="18000"/>
           </a:xfrm>
           <a:prstGeom prst="rect">
             <a:avLst/>
@@ -44101,8 +43327,8 @@
         </p:nvSpPr>
         <p:spPr>
           <a:xfrm>
-            <a:off x="4716000" y="2059200"/>
-            <a:ext cx="3970800" cy="255600"/>
+            <a:off x="3296400" y="2059200"/>
+            <a:ext cx="2551199" cy="255600"/>
           </a:xfrm>
           <a:prstGeom prst="rect">
             <a:avLst/>
@@ -44123,7 +43349,7 @@
                 </a:solidFill>
                 <a:latin typeface="Calibri"/>
               </a:rPr>
-              <a:t>Gaming</a:t>
+              <a:t>Growth Driver</a:t>
             </a:r>
           </a:p>
         </p:txBody>
@@ -44136,8 +43362,8 @@
         </p:nvSpPr>
         <p:spPr>
           <a:xfrm>
-            <a:off x="4716000" y="2332800"/>
-            <a:ext cx="3970800" cy="2041199"/>
+            <a:off x="3296400" y="2332800"/>
+            <a:ext cx="2551199" cy="2041199"/>
           </a:xfrm>
           <a:prstGeom prst="rect">
             <a:avLst/>
@@ -44158,7 +43384,276 @@
                 </a:solidFill>
                 <a:latin typeface="Calibri"/>
               </a:rPr>
-              <a:t>Segment historique avec GPU GeForce pour PC gaming et consoles. Modèle de revenus basé sur des cycles de renouvellement hardware et des abonnements logiciels (GeForce NOW). Clients : gamers et créateurs de contenu. Croissance soutenue par l'essor du cloud gaming et des technologies ray tracing.</a:t>
+              <a:t>—</a:t>
+            </a:r>
+          </a:p>
+        </p:txBody>
+      </p:sp>
+      <p:sp>
+        <p:nvSpPr>
+          <p:cNvPr id="31" name="Rectangle 30"/>
+          <p:cNvSpPr/>
+          <p:nvPr/>
+        </p:nvSpPr>
+        <p:spPr>
+          <a:xfrm>
+            <a:off x="6045600" y="961200"/>
+            <a:ext cx="2731199" cy="3520800"/>
+          </a:xfrm>
+          <a:prstGeom prst="rect">
+            <a:avLst/>
+          </a:prstGeom>
+          <a:solidFill>
+            <a:srgbClr val="F7F8FA"/>
+          </a:solidFill>
+          <a:ln>
+            <a:noFill/>
+          </a:ln>
+        </p:spPr>
+        <p:style>
+          <a:lnRef idx="1">
+            <a:schemeClr val="accent1"/>
+          </a:lnRef>
+          <a:fillRef idx="3">
+            <a:schemeClr val="accent1"/>
+          </a:fillRef>
+          <a:effectRef idx="2">
+            <a:schemeClr val="accent1"/>
+          </a:effectRef>
+          <a:fontRef idx="minor">
+            <a:schemeClr val="lt1"/>
+          </a:fontRef>
+        </p:style>
+        <p:txBody>
+          <a:bodyPr rtlCol="0" anchor="ctr"/>
+          <a:lstStyle/>
+          <a:p>
+            <a:pPr algn="ctr"/>
+          </a:p>
+        </p:txBody>
+      </p:sp>
+      <p:sp>
+        <p:nvSpPr>
+          <p:cNvPr id="32" name="Rectangle 31"/>
+          <p:cNvSpPr/>
+          <p:nvPr/>
+        </p:nvSpPr>
+        <p:spPr>
+          <a:xfrm>
+            <a:off x="6045600" y="961200"/>
+            <a:ext cx="2731199" cy="54000"/>
+          </a:xfrm>
+          <a:prstGeom prst="rect">
+            <a:avLst/>
+          </a:prstGeom>
+          <a:solidFill>
+            <a:srgbClr val="888888"/>
+          </a:solidFill>
+          <a:ln>
+            <a:noFill/>
+          </a:ln>
+        </p:spPr>
+        <p:style>
+          <a:lnRef idx="1">
+            <a:schemeClr val="accent1"/>
+          </a:lnRef>
+          <a:fillRef idx="3">
+            <a:schemeClr val="accent1"/>
+          </a:fillRef>
+          <a:effectRef idx="2">
+            <a:schemeClr val="accent1"/>
+          </a:effectRef>
+          <a:fontRef idx="minor">
+            <a:schemeClr val="lt1"/>
+          </a:fontRef>
+        </p:style>
+        <p:txBody>
+          <a:bodyPr rtlCol="0" anchor="ctr"/>
+          <a:lstStyle/>
+          <a:p>
+            <a:pPr algn="ctr"/>
+          </a:p>
+        </p:txBody>
+      </p:sp>
+      <p:sp>
+        <p:nvSpPr>
+          <p:cNvPr id="33" name="TextBox 32"/>
+          <p:cNvSpPr txBox="1"/>
+          <p:nvPr/>
+        </p:nvSpPr>
+        <p:spPr>
+          <a:xfrm>
+            <a:off x="6135600" y="1141200"/>
+            <a:ext cx="2551199" cy="640800"/>
+          </a:xfrm>
+          <a:prstGeom prst="rect">
+            <a:avLst/>
+          </a:prstGeom>
+          <a:noFill/>
+        </p:spPr>
+        <p:txBody>
+          <a:bodyPr wrap="square">
+            <a:spAutoFit/>
+          </a:bodyPr>
+          <a:lstStyle/>
+          <a:p>
+            <a:pPr algn="l"/>
+            <a:r>
+              <a:rPr sz="2200" b="1" i="0">
+                <a:solidFill>
+                  <a:srgbClr val="888888"/>
+                </a:solidFill>
+                <a:latin typeface="Calibri"/>
+              </a:rPr>
+              <a:t>—</a:t>
+            </a:r>
+          </a:p>
+        </p:txBody>
+      </p:sp>
+      <p:sp>
+        <p:nvSpPr>
+          <p:cNvPr id="34" name="TextBox 33"/>
+          <p:cNvSpPr txBox="1"/>
+          <p:nvPr/>
+        </p:nvSpPr>
+        <p:spPr>
+          <a:xfrm>
+            <a:off x="6135600" y="1785600"/>
+            <a:ext cx="2551199" cy="108000"/>
+          </a:xfrm>
+          <a:prstGeom prst="rect">
+            <a:avLst/>
+          </a:prstGeom>
+          <a:noFill/>
+        </p:spPr>
+        <p:txBody>
+          <a:bodyPr wrap="square">
+            <a:spAutoFit/>
+          </a:bodyPr>
+          <a:lstStyle/>
+          <a:p>
+            <a:pPr algn="l"/>
+            <a:r>
+              <a:rPr sz="900" b="0" i="0">
+                <a:solidFill>
+                  <a:srgbClr val="555555"/>
+                </a:solidFill>
+                <a:latin typeface="Calibri"/>
+              </a:rPr>
+              <a:t>du CA</a:t>
+            </a:r>
+          </a:p>
+        </p:txBody>
+      </p:sp>
+      <p:sp>
+        <p:nvSpPr>
+          <p:cNvPr id="35" name="Rectangle 34"/>
+          <p:cNvSpPr/>
+          <p:nvPr/>
+        </p:nvSpPr>
+        <p:spPr>
+          <a:xfrm>
+            <a:off x="6135600" y="1965600"/>
+            <a:ext cx="2551199" cy="18000"/>
+          </a:xfrm>
+          <a:prstGeom prst="rect">
+            <a:avLst/>
+          </a:prstGeom>
+          <a:solidFill>
+            <a:srgbClr val="888888"/>
+          </a:solidFill>
+          <a:ln>
+            <a:noFill/>
+          </a:ln>
+        </p:spPr>
+        <p:style>
+          <a:lnRef idx="1">
+            <a:schemeClr val="accent1"/>
+          </a:lnRef>
+          <a:fillRef idx="3">
+            <a:schemeClr val="accent1"/>
+          </a:fillRef>
+          <a:effectRef idx="2">
+            <a:schemeClr val="accent1"/>
+          </a:effectRef>
+          <a:fontRef idx="minor">
+            <a:schemeClr val="lt1"/>
+          </a:fontRef>
+        </p:style>
+        <p:txBody>
+          <a:bodyPr rtlCol="0" anchor="ctr"/>
+          <a:lstStyle/>
+          <a:p>
+            <a:pPr algn="ctr"/>
+          </a:p>
+        </p:txBody>
+      </p:sp>
+      <p:sp>
+        <p:nvSpPr>
+          <p:cNvPr id="36" name="TextBox 35"/>
+          <p:cNvSpPr txBox="1"/>
+          <p:nvPr/>
+        </p:nvSpPr>
+        <p:spPr>
+          <a:xfrm>
+            <a:off x="6135600" y="2059200"/>
+            <a:ext cx="2551199" cy="255600"/>
+          </a:xfrm>
+          <a:prstGeom prst="rect">
+            <a:avLst/>
+          </a:prstGeom>
+          <a:noFill/>
+        </p:spPr>
+        <p:txBody>
+          <a:bodyPr wrap="square">
+            <a:spAutoFit/>
+          </a:bodyPr>
+          <a:lstStyle/>
+          <a:p>
+            <a:pPr algn="l"/>
+            <a:r>
+              <a:rPr sz="1000" b="1" i="0">
+                <a:solidFill>
+                  <a:srgbClr val="1B3A6B"/>
+                </a:solidFill>
+                <a:latin typeface="Calibri"/>
+              </a:rPr>
+              <a:t>International</a:t>
+            </a:r>
+          </a:p>
+        </p:txBody>
+      </p:sp>
+      <p:sp>
+        <p:nvSpPr>
+          <p:cNvPr id="37" name="TextBox 36"/>
+          <p:cNvSpPr txBox="1"/>
+          <p:nvPr/>
+        </p:nvSpPr>
+        <p:spPr>
+          <a:xfrm>
+            <a:off x="6135600" y="2332800"/>
+            <a:ext cx="2551199" cy="2041199"/>
+          </a:xfrm>
+          <a:prstGeom prst="rect">
+            <a:avLst/>
+          </a:prstGeom>
+          <a:noFill/>
+        </p:spPr>
+        <p:txBody>
+          <a:bodyPr wrap="square">
+            <a:spAutoFit/>
+          </a:bodyPr>
+          <a:lstStyle/>
+          <a:p>
+            <a:pPr algn="l"/>
+            <a:r>
+              <a:rPr sz="800" b="0" i="0">
+                <a:solidFill>
+                  <a:srgbClr val="555555"/>
+                </a:solidFill>
+                <a:latin typeface="Calibri"/>
+              </a:rPr>
+              <a:t>—</a:t>
             </a:r>
           </a:p>
         </p:txBody>
@@ -45010,7 +44505,7 @@
                 </a:solidFill>
                 <a:latin typeface="Calibri"/>
               </a:rPr>
-              <a:t>USD millions  ·  2023–2027F</a:t>
+              <a:t>USD millions  ·  2023–2025</a:t>
             </a:r>
           </a:p>
         </p:txBody>
@@ -45025,7 +44520,7 @@
         </p:nvGraphicFramePr>
         <p:xfrm>
           <a:off x="367200" y="914400"/>
-          <a:ext cx="8413196" cy="1980000"/>
+          <a:ext cx="8413200" cy="1980000"/>
         </p:xfrm>
         <a:graphic>
           <a:graphicData uri="http://schemas.openxmlformats.org/drawingml/2006/table">
@@ -45035,11 +44530,9 @@
               </a:tblPr>
               <a:tblGrid>
                 <a:gridCol w="2355696"/>
-                <a:gridCol w="1211500"/>
-                <a:gridCol w="1211500"/>
-                <a:gridCol w="1211500"/>
-                <a:gridCol w="1211500"/>
-                <a:gridCol w="1211500"/>
+                <a:gridCol w="2019168"/>
+                <a:gridCol w="2019168"/>
+                <a:gridCol w="2019168"/>
               </a:tblGrid>
               <a:tr h="220000">
                 <a:tc>
@@ -45125,52 +44618,6 @@
                           <a:latin typeface="Calibri"/>
                         </a:rPr>
                         <a:t>2025</a:t>
-                      </a:r>
-                    </a:p>
-                  </a:txBody>
-                  <a:tcPr>
-                    <a:solidFill>
-                      <a:srgbClr val="1B3A6B"/>
-                    </a:solidFill>
-                  </a:tcPr>
-                </a:tc>
-                <a:tc>
-                  <a:txBody>
-                    <a:bodyPr/>
-                    <a:lstStyle/>
-                    <a:p>
-                      <a:pPr algn="ctr"/>
-                      <a:r>
-                        <a:rPr sz="800" b="1" i="0">
-                          <a:solidFill>
-                            <a:srgbClr val="FFFFFF"/>
-                          </a:solidFill>
-                          <a:latin typeface="Calibri"/>
-                        </a:rPr>
-                        <a:t>2026F</a:t>
-                      </a:r>
-                    </a:p>
-                  </a:txBody>
-                  <a:tcPr>
-                    <a:solidFill>
-                      <a:srgbClr val="1B3A6B"/>
-                    </a:solidFill>
-                  </a:tcPr>
-                </a:tc>
-                <a:tc>
-                  <a:txBody>
-                    <a:bodyPr/>
-                    <a:lstStyle/>
-                    <a:p>
-                      <a:pPr algn="ctr"/>
-                      <a:r>
-                        <a:rPr sz="800" b="1" i="0">
-                          <a:solidFill>
-                            <a:srgbClr val="FFFFFF"/>
-                          </a:solidFill>
-                          <a:latin typeface="Calibri"/>
-                        </a:rPr>
-                        <a:t>2027F</a:t>
                       </a:r>
                     </a:p>
                   </a:txBody>
@@ -45274,52 +44721,6 @@
                     </a:solidFill>
                   </a:tcPr>
                 </a:tc>
-                <a:tc>
-                  <a:txBody>
-                    <a:bodyPr/>
-                    <a:lstStyle/>
-                    <a:p>
-                      <a:pPr algn="ctr"/>
-                      <a:r>
-                        <a:rPr sz="800" b="1" i="0">
-                          <a:solidFill>
-                            <a:srgbClr val="0D0D0D"/>
-                          </a:solidFill>
-                          <a:latin typeface="Calibri"/>
-                        </a:rPr>
-                        <a:t>200,0</a:t>
-                      </a:r>
-                    </a:p>
-                  </a:txBody>
-                  <a:tcPr>
-                    <a:solidFill>
-                      <a:srgbClr val="FFFFFF"/>
-                    </a:solidFill>
-                  </a:tcPr>
-                </a:tc>
-                <a:tc>
-                  <a:txBody>
-                    <a:bodyPr/>
-                    <a:lstStyle/>
-                    <a:p>
-                      <a:pPr algn="ctr"/>
-                      <a:r>
-                        <a:rPr sz="800" b="1" i="0">
-                          <a:solidFill>
-                            <a:srgbClr val="0D0D0D"/>
-                          </a:solidFill>
-                          <a:latin typeface="Calibri"/>
-                        </a:rPr>
-                        <a:t>280,0</a:t>
-                      </a:r>
-                    </a:p>
-                  </a:txBody>
-                  <a:tcPr>
-                    <a:solidFill>
-                      <a:srgbClr val="FFFFFF"/>
-                    </a:solidFill>
-                  </a:tcPr>
-                </a:tc>
               </a:tr>
               <a:tr h="220000">
                 <a:tc>
@@ -45411,52 +44812,6 @@
                   <a:tcPr>
                     <a:solidFill>
                       <a:srgbClr val="DDE8F5"/>
-                    </a:solidFill>
-                  </a:tcPr>
-                </a:tc>
-                <a:tc>
-                  <a:txBody>
-                    <a:bodyPr/>
-                    <a:lstStyle/>
-                    <a:p>
-                      <a:pPr algn="ctr"/>
-                      <a:r>
-                        <a:rPr sz="750" b="0" i="1">
-                          <a:solidFill>
-                            <a:srgbClr val="333333"/>
-                          </a:solidFill>
-                          <a:latin typeface="Calibri"/>
-                        </a:rPr>
-                        <a:t>+53,3 %</a:t>
-                      </a:r>
-                    </a:p>
-                  </a:txBody>
-                  <a:tcPr>
-                    <a:solidFill>
-                      <a:srgbClr val="F7F8FA"/>
-                    </a:solidFill>
-                  </a:tcPr>
-                </a:tc>
-                <a:tc>
-                  <a:txBody>
-                    <a:bodyPr/>
-                    <a:lstStyle/>
-                    <a:p>
-                      <a:pPr algn="ctr"/>
-                      <a:r>
-                        <a:rPr sz="750" b="0" i="1">
-                          <a:solidFill>
-                            <a:srgbClr val="333333"/>
-                          </a:solidFill>
-                          <a:latin typeface="Calibri"/>
-                        </a:rPr>
-                        <a:t>+40,0 %</a:t>
-                      </a:r>
-                    </a:p>
-                  </a:txBody>
-                  <a:tcPr>
-                    <a:solidFill>
-                      <a:srgbClr val="F7F8FA"/>
                     </a:solidFill>
                   </a:tcPr>
                 </a:tc>
@@ -45554,52 +44909,6 @@
                     </a:solidFill>
                   </a:tcPr>
                 </a:tc>
-                <a:tc>
-                  <a:txBody>
-                    <a:bodyPr/>
-                    <a:lstStyle/>
-                    <a:p>
-                      <a:pPr algn="ctr"/>
-                      <a:r>
-                        <a:rPr sz="800" b="1" i="0">
-                          <a:solidFill>
-                            <a:srgbClr val="0D0D0D"/>
-                          </a:solidFill>
-                          <a:latin typeface="Calibri"/>
-                        </a:rPr>
-                        <a:t>152,0</a:t>
-                      </a:r>
-                    </a:p>
-                  </a:txBody>
-                  <a:tcPr>
-                    <a:solidFill>
-                      <a:srgbClr val="FFFFFF"/>
-                    </a:solidFill>
-                  </a:tcPr>
-                </a:tc>
-                <a:tc>
-                  <a:txBody>
-                    <a:bodyPr/>
-                    <a:lstStyle/>
-                    <a:p>
-                      <a:pPr algn="ctr"/>
-                      <a:r>
-                        <a:rPr sz="800" b="1" i="0">
-                          <a:solidFill>
-                            <a:srgbClr val="0D0D0D"/>
-                          </a:solidFill>
-                          <a:latin typeface="Calibri"/>
-                        </a:rPr>
-                        <a:t>215,6</a:t>
-                      </a:r>
-                    </a:p>
-                  </a:txBody>
-                  <a:tcPr>
-                    <a:solidFill>
-                      <a:srgbClr val="FFFFFF"/>
-                    </a:solidFill>
-                  </a:tcPr>
-                </a:tc>
               </a:tr>
               <a:tr h="220000">
                 <a:tc>
@@ -45691,52 +45000,6 @@
                   <a:tcPr>
                     <a:solidFill>
                       <a:srgbClr val="DDE8F5"/>
-                    </a:solidFill>
-                  </a:tcPr>
-                </a:tc>
-                <a:tc>
-                  <a:txBody>
-                    <a:bodyPr/>
-                    <a:lstStyle/>
-                    <a:p>
-                      <a:pPr algn="ctr"/>
-                      <a:r>
-                        <a:rPr sz="750" b="0" i="1">
-                          <a:solidFill>
-                            <a:srgbClr val="333333"/>
-                          </a:solidFill>
-                          <a:latin typeface="Calibri"/>
-                        </a:rPr>
-                        <a:t>76,0 %</a:t>
-                      </a:r>
-                    </a:p>
-                  </a:txBody>
-                  <a:tcPr>
-                    <a:solidFill>
-                      <a:srgbClr val="F7F8FA"/>
-                    </a:solidFill>
-                  </a:tcPr>
-                </a:tc>
-                <a:tc>
-                  <a:txBody>
-                    <a:bodyPr/>
-                    <a:lstStyle/>
-                    <a:p>
-                      <a:pPr algn="ctr"/>
-                      <a:r>
-                        <a:rPr sz="750" b="0" i="1">
-                          <a:solidFill>
-                            <a:srgbClr val="333333"/>
-                          </a:solidFill>
-                          <a:latin typeface="Calibri"/>
-                        </a:rPr>
-                        <a:t>77,0 %</a:t>
-                      </a:r>
-                    </a:p>
-                  </a:txBody>
-                  <a:tcPr>
-                    <a:solidFill>
-                      <a:srgbClr val="F7F8FA"/>
                     </a:solidFill>
                   </a:tcPr>
                 </a:tc>
@@ -45834,52 +45097,6 @@
                     </a:solidFill>
                   </a:tcPr>
                 </a:tc>
-                <a:tc>
-                  <a:txBody>
-                    <a:bodyPr/>
-                    <a:lstStyle/>
-                    <a:p>
-                      <a:pPr algn="ctr"/>
-                      <a:r>
-                        <a:rPr sz="800" b="1" i="0">
-                          <a:solidFill>
-                            <a:srgbClr val="0D0D0D"/>
-                          </a:solidFill>
-                          <a:latin typeface="Calibri"/>
-                        </a:rPr>
-                        <a:t>152,0</a:t>
-                      </a:r>
-                    </a:p>
-                  </a:txBody>
-                  <a:tcPr>
-                    <a:solidFill>
-                      <a:srgbClr val="FFFFFF"/>
-                    </a:solidFill>
-                  </a:tcPr>
-                </a:tc>
-                <a:tc>
-                  <a:txBody>
-                    <a:bodyPr/>
-                    <a:lstStyle/>
-                    <a:p>
-                      <a:pPr algn="ctr"/>
-                      <a:r>
-                        <a:rPr sz="800" b="1" i="0">
-                          <a:solidFill>
-                            <a:srgbClr val="0D0D0D"/>
-                          </a:solidFill>
-                          <a:latin typeface="Calibri"/>
-                        </a:rPr>
-                        <a:t>215,6</a:t>
-                      </a:r>
-                    </a:p>
-                  </a:txBody>
-                  <a:tcPr>
-                    <a:solidFill>
-                      <a:srgbClr val="FFFFFF"/>
-                    </a:solidFill>
-                  </a:tcPr>
-                </a:tc>
               </a:tr>
               <a:tr h="220000">
                 <a:tc>
@@ -45971,52 +45188,6 @@
                   <a:tcPr>
                     <a:solidFill>
                       <a:srgbClr val="DDE8F5"/>
-                    </a:solidFill>
-                  </a:tcPr>
-                </a:tc>
-                <a:tc>
-                  <a:txBody>
-                    <a:bodyPr/>
-                    <a:lstStyle/>
-                    <a:p>
-                      <a:pPr algn="ctr"/>
-                      <a:r>
-                        <a:rPr sz="750" b="0" i="1">
-                          <a:solidFill>
-                            <a:srgbClr val="333333"/>
-                          </a:solidFill>
-                          <a:latin typeface="Calibri"/>
-                        </a:rPr>
-                        <a:t>76,0 %</a:t>
-                      </a:r>
-                    </a:p>
-                  </a:txBody>
-                  <a:tcPr>
-                    <a:solidFill>
-                      <a:srgbClr val="F7F8FA"/>
-                    </a:solidFill>
-                  </a:tcPr>
-                </a:tc>
-                <a:tc>
-                  <a:txBody>
-                    <a:bodyPr/>
-                    <a:lstStyle/>
-                    <a:p>
-                      <a:pPr algn="ctr"/>
-                      <a:r>
-                        <a:rPr sz="750" b="0" i="1">
-                          <a:solidFill>
-                            <a:srgbClr val="333333"/>
-                          </a:solidFill>
-                          <a:latin typeface="Calibri"/>
-                        </a:rPr>
-                        <a:t>77,0 %</a:t>
-                      </a:r>
-                    </a:p>
-                  </a:txBody>
-                  <a:tcPr>
-                    <a:solidFill>
-                      <a:srgbClr val="F7F8FA"/>
                     </a:solidFill>
                   </a:tcPr>
                 </a:tc>
@@ -46114,52 +45285,6 @@
                     </a:solidFill>
                   </a:tcPr>
                 </a:tc>
-                <a:tc>
-                  <a:txBody>
-                    <a:bodyPr/>
-                    <a:lstStyle/>
-                    <a:p>
-                      <a:pPr algn="ctr"/>
-                      <a:r>
-                        <a:rPr sz="800" b="1" i="0">
-                          <a:solidFill>
-                            <a:srgbClr val="0D0D0D"/>
-                          </a:solidFill>
-                          <a:latin typeface="Calibri"/>
-                        </a:rPr>
-                        <a:t>120,0</a:t>
-                      </a:r>
-                    </a:p>
-                  </a:txBody>
-                  <a:tcPr>
-                    <a:solidFill>
-                      <a:srgbClr val="FFFFFF"/>
-                    </a:solidFill>
-                  </a:tcPr>
-                </a:tc>
-                <a:tc>
-                  <a:txBody>
-                    <a:bodyPr/>
-                    <a:lstStyle/>
-                    <a:p>
-                      <a:pPr algn="ctr"/>
-                      <a:r>
-                        <a:rPr sz="800" b="1" i="0">
-                          <a:solidFill>
-                            <a:srgbClr val="0D0D0D"/>
-                          </a:solidFill>
-                          <a:latin typeface="Calibri"/>
-                        </a:rPr>
-                        <a:t>179,2</a:t>
-                      </a:r>
-                    </a:p>
-                  </a:txBody>
-                  <a:tcPr>
-                    <a:solidFill>
-                      <a:srgbClr val="FFFFFF"/>
-                    </a:solidFill>
-                  </a:tcPr>
-                </a:tc>
               </a:tr>
               <a:tr h="220000">
                 <a:tc>
@@ -46254,52 +45379,6 @@
                     </a:solidFill>
                   </a:tcPr>
                 </a:tc>
-                <a:tc>
-                  <a:txBody>
-                    <a:bodyPr/>
-                    <a:lstStyle/>
-                    <a:p>
-                      <a:pPr algn="ctr"/>
-                      <a:r>
-                        <a:rPr sz="750" b="0" i="1">
-                          <a:solidFill>
-                            <a:srgbClr val="333333"/>
-                          </a:solidFill>
-                          <a:latin typeface="Calibri"/>
-                        </a:rPr>
-                        <a:t>60,0 %</a:t>
-                      </a:r>
-                    </a:p>
-                  </a:txBody>
-                  <a:tcPr>
-                    <a:solidFill>
-                      <a:srgbClr val="F7F8FA"/>
-                    </a:solidFill>
-                  </a:tcPr>
-                </a:tc>
-                <a:tc>
-                  <a:txBody>
-                    <a:bodyPr/>
-                    <a:lstStyle/>
-                    <a:p>
-                      <a:pPr algn="ctr"/>
-                      <a:r>
-                        <a:rPr sz="750" b="0" i="1">
-                          <a:solidFill>
-                            <a:srgbClr val="333333"/>
-                          </a:solidFill>
-                          <a:latin typeface="Calibri"/>
-                        </a:rPr>
-                        <a:t>64,0 %</a:t>
-                      </a:r>
-                    </a:p>
-                  </a:txBody>
-                  <a:tcPr>
-                    <a:solidFill>
-                      <a:srgbClr val="F7F8FA"/>
-                    </a:solidFill>
-                  </a:tcPr>
-                </a:tc>
               </a:tr>
             </a:tbl>
           </a:graphicData>
@@ -46456,7 +45535,7 @@
                 </a:solidFill>
                 <a:latin typeface="Calibri"/>
               </a:rPr>
-              <a:t>Le chiffre d'affaires 2025 atteint 130,5 Md$ (+114% YoY), porté par la demande en GPU pour l'IA générative. Les marges brutes de 75% bénéficient d'un mix produit favorable (H100/H200 à haute marge) et d'économies d'échelle. Le bilan est solide avec un ND/EBITDA de -0,0x, permettant des rachats d'actions ou des dividendes.</a:t>
+              <a:t>Croissance revenue de +114.2% sur la dernière période, reflétant une dynamique commerciale soutenue. Marge brute de 75.0%, indicateur du pricing power et de la structure de coûts variables. Marge EBITDA à 66.0%, mesure de la profitabilité opérationnelle avant amortissements. Marge nette de 55.9%, après prise en compte de la structure financière et de la fiscalité.</a:t>
             </a:r>
           </a:p>
         </p:txBody>
@@ -48351,8 +47430,8 @@
         </p:nvSpPr>
         <p:spPr>
           <a:xfrm>
-            <a:off x="367200" y="3870000"/>
-            <a:ext cx="8413200" cy="936000"/>
+            <a:off x="367200" y="3528000"/>
+            <a:ext cx="8413200" cy="1260000"/>
           </a:xfrm>
           <a:prstGeom prst="rect">
             <a:avLst/>
@@ -48394,8 +47473,8 @@
         </p:nvSpPr>
         <p:spPr>
           <a:xfrm>
-            <a:off x="367200" y="3870000"/>
-            <a:ext cx="79200" cy="936000"/>
+            <a:off x="367200" y="3528000"/>
+            <a:ext cx="79200" cy="1260000"/>
           </a:xfrm>
           <a:prstGeom prst="rect">
             <a:avLst/>
@@ -48437,7 +47516,7 @@
         </p:nvSpPr>
         <p:spPr>
           <a:xfrm>
-            <a:off x="475200" y="3898800"/>
+            <a:off x="475200" y="3556800"/>
             <a:ext cx="8298000" cy="151200"/>
           </a:xfrm>
           <a:prstGeom prst="rect">
@@ -48472,8 +47551,8 @@
         </p:nvSpPr>
         <p:spPr>
           <a:xfrm>
-            <a:off x="475200" y="4068000"/>
-            <a:ext cx="8298000" cy="712800"/>
+            <a:off x="475200" y="3726000"/>
+            <a:ext cx="8298000" cy="1036800"/>
           </a:xfrm>
           <a:prstGeom prst="rect">
             <a:avLst/>
